--- a/docs/slides-arquitectura.pptx
+++ b/docs/slides-arquitectura.pptx
@@ -1119,7 +1119,7 @@
             <a:r>
               <a:rPr lang="en-US" sz="900" dirty="0">
                 <a:solidFill>
-                  <a:srgbClr val="8A8FA3"/>
+                  <a:srgbClr val="B0B0B0"/>
                 </a:solidFill>
                 <a:latin typeface="Calibri" pitchFamily="34" charset="0"/>
                 <a:ea typeface="Calibri" pitchFamily="34" charset="-122"/>
@@ -3556,7 +3556,7 @@
             <a:r>
               <a:rPr lang="en-US" sz="700" dirty="0">
                 <a:solidFill>
-                  <a:srgbClr val="8A8FA3"/>
+                  <a:srgbClr val="B0B0B0"/>
                 </a:solidFill>
                 <a:latin typeface="Calibri" pitchFamily="34" charset="0"/>
                 <a:ea typeface="Calibri" pitchFamily="34" charset="-122"/>
@@ -3634,7 +3634,7 @@
             <a:r>
               <a:rPr lang="en-US" sz="700" dirty="0">
                 <a:solidFill>
-                  <a:srgbClr val="8A8FA3"/>
+                  <a:srgbClr val="B0B0B0"/>
                 </a:solidFill>
                 <a:latin typeface="Calibri" pitchFamily="34" charset="0"/>
                 <a:ea typeface="Calibri" pitchFamily="34" charset="-122"/>
@@ -3712,7 +3712,7 @@
             <a:r>
               <a:rPr lang="en-US" sz="700" dirty="0">
                 <a:solidFill>
-                  <a:srgbClr val="8A8FA3"/>
+                  <a:srgbClr val="B0B0B0"/>
                 </a:solidFill>
                 <a:latin typeface="Calibri" pitchFamily="34" charset="0"/>
                 <a:ea typeface="Calibri" pitchFamily="34" charset="-122"/>
@@ -3751,7 +3751,7 @@
             <a:r>
               <a:rPr lang="en-US" sz="700" dirty="0">
                 <a:solidFill>
-                  <a:srgbClr val="8A8FA3"/>
+                  <a:srgbClr val="B0B0B0"/>
                 </a:solidFill>
                 <a:latin typeface="Calibri" pitchFamily="34" charset="0"/>
                 <a:ea typeface="Calibri" pitchFamily="34" charset="-122"/>
@@ -3861,7 +3861,7 @@
             <a:r>
               <a:rPr lang="en-US" sz="900" dirty="0">
                 <a:solidFill>
-                  <a:srgbClr val="8A8FA3"/>
+                  <a:srgbClr val="B0B0B0"/>
                 </a:solidFill>
                 <a:latin typeface="Calibri" pitchFamily="34" charset="0"/>
                 <a:ea typeface="Calibri" pitchFamily="34" charset="-122"/>
@@ -4914,7 +4914,7 @@
             <a:r>
               <a:rPr lang="en-US" sz="800" dirty="0">
                 <a:solidFill>
-                  <a:srgbClr val="8A8FA3"/>
+                  <a:srgbClr val="B0B0B0"/>
                 </a:solidFill>
                 <a:latin typeface="Calibri" pitchFamily="34" charset="0"/>
                 <a:ea typeface="Calibri" pitchFamily="34" charset="-122"/>
@@ -4931,7 +4931,7 @@
             <a:r>
               <a:rPr lang="en-US" sz="800" dirty="0">
                 <a:solidFill>
-                  <a:srgbClr val="8A8FA3"/>
+                  <a:srgbClr val="B0B0B0"/>
                 </a:solidFill>
                 <a:latin typeface="Calibri" pitchFamily="34" charset="0"/>
                 <a:ea typeface="Calibri" pitchFamily="34" charset="-122"/>
@@ -5009,7 +5009,7 @@
             <a:r>
               <a:rPr lang="en-US" sz="800" dirty="0">
                 <a:solidFill>
-                  <a:srgbClr val="8A8FA3"/>
+                  <a:srgbClr val="B0B0B0"/>
                 </a:solidFill>
                 <a:latin typeface="Calibri" pitchFamily="34" charset="0"/>
                 <a:ea typeface="Calibri" pitchFamily="34" charset="-122"/>
@@ -5026,7 +5026,7 @@
             <a:r>
               <a:rPr lang="en-US" sz="800" dirty="0">
                 <a:solidFill>
-                  <a:srgbClr val="8A8FA3"/>
+                  <a:srgbClr val="B0B0B0"/>
                 </a:solidFill>
                 <a:latin typeface="Calibri" pitchFamily="34" charset="0"/>
                 <a:ea typeface="Calibri" pitchFamily="34" charset="-122"/>
@@ -5104,7 +5104,7 @@
             <a:r>
               <a:rPr lang="en-US" sz="800" dirty="0">
                 <a:solidFill>
-                  <a:srgbClr val="8A8FA3"/>
+                  <a:srgbClr val="B0B0B0"/>
                 </a:solidFill>
                 <a:latin typeface="Calibri" pitchFamily="34" charset="0"/>
                 <a:ea typeface="Calibri" pitchFamily="34" charset="-122"/>
@@ -5121,7 +5121,7 @@
             <a:r>
               <a:rPr lang="en-US" sz="800" dirty="0">
                 <a:solidFill>
-                  <a:srgbClr val="8A8FA3"/>
+                  <a:srgbClr val="B0B0B0"/>
                 </a:solidFill>
                 <a:latin typeface="Calibri" pitchFamily="34" charset="0"/>
                 <a:ea typeface="Calibri" pitchFamily="34" charset="-122"/>
@@ -5199,7 +5199,7 @@
             <a:r>
               <a:rPr lang="en-US" sz="800" dirty="0">
                 <a:solidFill>
-                  <a:srgbClr val="8A8FA3"/>
+                  <a:srgbClr val="B0B0B0"/>
                 </a:solidFill>
                 <a:latin typeface="Calibri" pitchFamily="34" charset="0"/>
                 <a:ea typeface="Calibri" pitchFamily="34" charset="-122"/>
@@ -5216,7 +5216,7 @@
             <a:r>
               <a:rPr lang="en-US" sz="800" dirty="0">
                 <a:solidFill>
-                  <a:srgbClr val="8A8FA3"/>
+                  <a:srgbClr val="B0B0B0"/>
                 </a:solidFill>
                 <a:latin typeface="Calibri" pitchFamily="34" charset="0"/>
                 <a:ea typeface="Calibri" pitchFamily="34" charset="-122"/>
@@ -5294,7 +5294,7 @@
             <a:r>
               <a:rPr lang="en-US" sz="800" dirty="0">
                 <a:solidFill>
-                  <a:srgbClr val="8A8FA3"/>
+                  <a:srgbClr val="B0B0B0"/>
                 </a:solidFill>
                 <a:latin typeface="Calibri" pitchFamily="34" charset="0"/>
                 <a:ea typeface="Calibri" pitchFamily="34" charset="-122"/>
@@ -5311,7 +5311,7 @@
             <a:r>
               <a:rPr lang="en-US" sz="800" dirty="0">
                 <a:solidFill>
-                  <a:srgbClr val="8A8FA3"/>
+                  <a:srgbClr val="B0B0B0"/>
                 </a:solidFill>
                 <a:latin typeface="Calibri" pitchFamily="34" charset="0"/>
                 <a:ea typeface="Calibri" pitchFamily="34" charset="-122"/>
@@ -5411,7 +5411,7 @@
             <a:r>
               <a:rPr lang="en-US" sz="700" dirty="0">
                 <a:solidFill>
-                  <a:srgbClr val="8A8FA3"/>
+                  <a:srgbClr val="B0B0B0"/>
                 </a:solidFill>
                 <a:latin typeface="Calibri" pitchFamily="34" charset="0"/>
                 <a:ea typeface="Calibri" pitchFamily="34" charset="-122"/>
@@ -5521,7 +5521,7 @@
             <a:r>
               <a:rPr lang="en-US" sz="900" dirty="0">
                 <a:solidFill>
-                  <a:srgbClr val="8A8FA3"/>
+                  <a:srgbClr val="B0B0B0"/>
                 </a:solidFill>
                 <a:latin typeface="Calibri" pitchFamily="34" charset="0"/>
                 <a:ea typeface="Calibri" pitchFamily="34" charset="-122"/>
@@ -6718,7 +6718,7 @@
             <a:r>
               <a:rPr lang="en-US" sz="700" dirty="0">
                 <a:solidFill>
-                  <a:srgbClr val="8A8FA3"/>
+                  <a:srgbClr val="B0B0B0"/>
                 </a:solidFill>
                 <a:latin typeface="Calibri" pitchFamily="34" charset="0"/>
                 <a:ea typeface="Calibri" pitchFamily="34" charset="-122"/>
@@ -6735,7 +6735,7 @@
             <a:r>
               <a:rPr lang="en-US" sz="700" dirty="0">
                 <a:solidFill>
-                  <a:srgbClr val="8A8FA3"/>
+                  <a:srgbClr val="B0B0B0"/>
                 </a:solidFill>
                 <a:latin typeface="Calibri" pitchFamily="34" charset="0"/>
                 <a:ea typeface="Calibri" pitchFamily="34" charset="-122"/>
@@ -6840,7 +6840,7 @@
             <a:r>
               <a:rPr lang="en-US" sz="700" dirty="0">
                 <a:solidFill>
-                  <a:srgbClr val="8A8FA3"/>
+                  <a:srgbClr val="B0B0B0"/>
                 </a:solidFill>
                 <a:latin typeface="Calibri" pitchFamily="34" charset="0"/>
                 <a:ea typeface="Calibri" pitchFamily="34" charset="-122"/>
@@ -6857,7 +6857,7 @@
             <a:r>
               <a:rPr lang="en-US" sz="700" dirty="0">
                 <a:solidFill>
-                  <a:srgbClr val="8A8FA3"/>
+                  <a:srgbClr val="B0B0B0"/>
                 </a:solidFill>
                 <a:latin typeface="Calibri" pitchFamily="34" charset="0"/>
                 <a:ea typeface="Calibri" pitchFamily="34" charset="-122"/>
@@ -6962,7 +6962,7 @@
             <a:r>
               <a:rPr lang="en-US" sz="700" dirty="0">
                 <a:solidFill>
-                  <a:srgbClr val="8A8FA3"/>
+                  <a:srgbClr val="B0B0B0"/>
                 </a:solidFill>
                 <a:latin typeface="Calibri" pitchFamily="34" charset="0"/>
                 <a:ea typeface="Calibri" pitchFamily="34" charset="-122"/>
@@ -6979,7 +6979,7 @@
             <a:r>
               <a:rPr lang="en-US" sz="700" dirty="0">
                 <a:solidFill>
-                  <a:srgbClr val="8A8FA3"/>
+                  <a:srgbClr val="B0B0B0"/>
                 </a:solidFill>
                 <a:latin typeface="Calibri" pitchFamily="34" charset="0"/>
                 <a:ea typeface="Calibri" pitchFamily="34" charset="-122"/>
@@ -7084,7 +7084,7 @@
             <a:r>
               <a:rPr lang="en-US" sz="700" dirty="0">
                 <a:solidFill>
-                  <a:srgbClr val="8A8FA3"/>
+                  <a:srgbClr val="B0B0B0"/>
                 </a:solidFill>
                 <a:latin typeface="Calibri" pitchFamily="34" charset="0"/>
                 <a:ea typeface="Calibri" pitchFamily="34" charset="-122"/>
@@ -7101,7 +7101,7 @@
             <a:r>
               <a:rPr lang="en-US" sz="700" dirty="0">
                 <a:solidFill>
-                  <a:srgbClr val="8A8FA3"/>
+                  <a:srgbClr val="B0B0B0"/>
                 </a:solidFill>
                 <a:latin typeface="Calibri" pitchFamily="34" charset="0"/>
                 <a:ea typeface="Calibri" pitchFamily="34" charset="-122"/>
@@ -7206,7 +7206,7 @@
             <a:r>
               <a:rPr lang="en-US" sz="700" dirty="0">
                 <a:solidFill>
-                  <a:srgbClr val="8A8FA3"/>
+                  <a:srgbClr val="B0B0B0"/>
                 </a:solidFill>
                 <a:latin typeface="Calibri" pitchFamily="34" charset="0"/>
                 <a:ea typeface="Calibri" pitchFamily="34" charset="-122"/>
@@ -7223,7 +7223,7 @@
             <a:r>
               <a:rPr lang="en-US" sz="700" dirty="0">
                 <a:solidFill>
-                  <a:srgbClr val="8A8FA3"/>
+                  <a:srgbClr val="B0B0B0"/>
                 </a:solidFill>
                 <a:latin typeface="Calibri" pitchFamily="34" charset="0"/>
                 <a:ea typeface="Calibri" pitchFamily="34" charset="-122"/>
@@ -7323,7 +7323,7 @@
             <a:r>
               <a:rPr lang="en-US" sz="700" dirty="0">
                 <a:solidFill>
-                  <a:srgbClr val="8A8FA3"/>
+                  <a:srgbClr val="B0B0B0"/>
                 </a:solidFill>
                 <a:latin typeface="Calibri" pitchFamily="34" charset="0"/>
                 <a:ea typeface="Calibri" pitchFamily="34" charset="-122"/>

--- a/docs/slides-arquitectura.pptx
+++ b/docs/slides-arquitectura.pptx
@@ -1198,6 +1198,10 @@
             </a:outerShdw>
           </a:effectLst>
         </p:spPr>
+        <p:txBody>
+          <a:bodyPr/>
+          <a:p/>
+        </p:txBody>
       </p:sp>
       <p:sp>
         <p:nvSpPr>
@@ -1358,6 +1362,10 @@
             </a:outerShdw>
           </a:effectLst>
         </p:spPr>
+        <p:txBody>
+          <a:bodyPr/>
+          <a:p/>
+        </p:txBody>
       </p:sp>
       <p:sp>
         <p:nvSpPr>
@@ -1501,6 +1509,10 @@
             </a:outerShdw>
           </a:effectLst>
         </p:spPr>
+        <p:txBody>
+          <a:bodyPr/>
+          <a:p/>
+        </p:txBody>
       </p:sp>
       <p:sp>
         <p:nvSpPr>
@@ -1608,6 +1620,10 @@
             </a:outerShdw>
           </a:effectLst>
         </p:spPr>
+        <p:txBody>
+          <a:bodyPr/>
+          <a:p/>
+        </p:txBody>
       </p:sp>
       <p:sp>
         <p:nvSpPr>
@@ -1751,6 +1767,10 @@
             </a:outerShdw>
           </a:effectLst>
         </p:spPr>
+        <p:txBody>
+          <a:bodyPr/>
+          <a:p/>
+        </p:txBody>
       </p:sp>
       <p:sp>
         <p:nvSpPr>
@@ -1914,6 +1934,10 @@
             </a:outerShdw>
           </a:effectLst>
         </p:spPr>
+        <p:txBody>
+          <a:bodyPr/>
+          <a:p/>
+        </p:txBody>
       </p:sp>
       <p:sp>
         <p:nvSpPr>
@@ -1948,7 +1972,7 @@
                 <a:ea typeface="Calibri" pitchFamily="34" charset="-122"/>
                 <a:cs typeface="Calibri" pitchFamily="34" charset="-120"/>
               </a:rPr>
-              <a:t>MRS (Spark)</a:t>
+              <a:t>DLI Spark</a:t>
             </a:r>
             <a:endParaRPr lang="en-US" sz="900" dirty="0"/>
           </a:p>
@@ -2057,6 +2081,10 @@
             </a:outerShdw>
           </a:effectLst>
         </p:spPr>
+        <p:txBody>
+          <a:bodyPr/>
+          <a:p/>
+        </p:txBody>
       </p:sp>
       <p:sp>
         <p:nvSpPr>
@@ -2164,6 +2192,10 @@
             </a:outerShdw>
           </a:effectLst>
         </p:spPr>
+        <p:txBody>
+          <a:bodyPr/>
+          <a:p/>
+        </p:txBody>
       </p:sp>
       <p:sp>
         <p:nvSpPr>
@@ -2307,6 +2339,10 @@
             </a:outerShdw>
           </a:effectLst>
         </p:spPr>
+        <p:txBody>
+          <a:bodyPr/>
+          <a:p/>
+        </p:txBody>
       </p:sp>
       <p:sp>
         <p:nvSpPr>
@@ -2453,6 +2489,10 @@
             </a:outerShdw>
           </a:effectLst>
         </p:spPr>
+        <p:txBody>
+          <a:bodyPr/>
+          <a:p/>
+        </p:txBody>
       </p:sp>
       <p:sp>
         <p:nvSpPr>
@@ -2596,6 +2636,10 @@
             </a:outerShdw>
           </a:effectLst>
         </p:spPr>
+        <p:txBody>
+          <a:bodyPr/>
+          <a:p/>
+        </p:txBody>
       </p:sp>
       <p:sp>
         <p:nvSpPr>
@@ -2720,6 +2764,10 @@
             </a:outerShdw>
           </a:effectLst>
         </p:spPr>
+        <p:txBody>
+          <a:bodyPr/>
+          <a:p/>
+        </p:txBody>
       </p:sp>
       <p:sp>
         <p:nvSpPr>
@@ -2863,6 +2911,10 @@
             </a:outerShdw>
           </a:effectLst>
         </p:spPr>
+        <p:txBody>
+          <a:bodyPr/>
+          <a:p/>
+        </p:txBody>
       </p:sp>
       <p:sp>
         <p:nvSpPr>
@@ -3009,6 +3061,10 @@
             </a:outerShdw>
           </a:effectLst>
         </p:spPr>
+        <p:txBody>
+          <a:bodyPr/>
+          <a:p/>
+        </p:txBody>
       </p:sp>
       <p:sp>
         <p:nvSpPr>
@@ -3116,6 +3172,10 @@
             </a:outerShdw>
           </a:effectLst>
         </p:spPr>
+        <p:txBody>
+          <a:bodyPr/>
+          <a:p/>
+        </p:txBody>
       </p:sp>
       <p:sp>
         <p:nvSpPr>
@@ -3216,6 +3276,10 @@
           </a:solidFill>
           <a:ln/>
         </p:spPr>
+        <p:txBody>
+          <a:bodyPr/>
+          <a:p/>
+        </p:txBody>
       </p:sp>
       <p:sp>
         <p:nvSpPr>
@@ -3901,6 +3965,10 @@
             </a:outerShdw>
           </a:effectLst>
         </p:spPr>
+        <p:txBody>
+          <a:bodyPr/>
+          <a:p/>
+        </p:txBody>
       </p:sp>
       <p:sp>
         <p:nvSpPr>
@@ -4039,6 +4107,10 @@
             </a:outerShdw>
           </a:effectLst>
         </p:spPr>
+        <p:txBody>
+          <a:bodyPr/>
+          <a:p/>
+        </p:txBody>
       </p:sp>
       <p:sp>
         <p:nvSpPr>
@@ -4177,6 +4249,10 @@
             </a:outerShdw>
           </a:effectLst>
         </p:spPr>
+        <p:txBody>
+          <a:bodyPr/>
+          <a:p/>
+        </p:txBody>
       </p:sp>
       <p:sp>
         <p:nvSpPr>
@@ -4315,6 +4391,10 @@
             </a:outerShdw>
           </a:effectLst>
         </p:spPr>
+        <p:txBody>
+          <a:bodyPr/>
+          <a:p/>
+        </p:txBody>
       </p:sp>
       <p:sp>
         <p:nvSpPr>
@@ -4349,7 +4429,7 @@
                 <a:ea typeface="Calibri" pitchFamily="34" charset="-122"/>
                 <a:cs typeface="Calibri" pitchFamily="34" charset="-120"/>
               </a:rPr>
-              <a:t>MRS Spark</a:t>
+              <a:t>DLI Spark</a:t>
             </a:r>
             <a:endParaRPr lang="en-US" sz="900" dirty="0"/>
           </a:p>
@@ -4453,6 +4533,10 @@
             </a:outerShdw>
           </a:effectLst>
         </p:spPr>
+        <p:txBody>
+          <a:bodyPr/>
+          <a:p/>
+        </p:txBody>
       </p:sp>
       <p:sp>
         <p:nvSpPr>
@@ -4555,6 +4639,10 @@
             </a:outerShdw>
           </a:effectLst>
         </p:spPr>
+        <p:txBody>
+          <a:bodyPr/>
+          <a:p/>
+        </p:txBody>
       </p:sp>
       <p:sp>
         <p:nvSpPr>
@@ -4662,6 +4750,10 @@
             </a:outerShdw>
           </a:effectLst>
         </p:spPr>
+        <p:txBody>
+          <a:bodyPr/>
+          <a:p/>
+        </p:txBody>
       </p:sp>
       <p:sp>
         <p:nvSpPr>
@@ -4769,6 +4861,10 @@
             </a:outerShdw>
           </a:effectLst>
         </p:spPr>
+        <p:txBody>
+          <a:bodyPr/>
+          <a:p/>
+        </p:txBody>
       </p:sp>
       <p:sp>
         <p:nvSpPr>
@@ -5344,6 +5440,10 @@
           </a:solidFill>
           <a:ln/>
         </p:spPr>
+        <p:txBody>
+          <a:bodyPr/>
+          <a:p/>
+        </p:txBody>
       </p:sp>
       <p:sp>
         <p:nvSpPr>
@@ -5561,6 +5661,10 @@
             </a:outerShdw>
           </a:effectLst>
         </p:spPr>
+        <p:txBody>
+          <a:bodyPr/>
+          <a:p/>
+        </p:txBody>
       </p:sp>
       <p:sp>
         <p:nvSpPr>
@@ -5682,6 +5786,10 @@
             </a:outerShdw>
           </a:effectLst>
         </p:spPr>
+        <p:txBody>
+          <a:bodyPr/>
+          <a:p/>
+        </p:txBody>
       </p:sp>
       <p:sp>
         <p:nvSpPr>
@@ -5803,6 +5911,10 @@
             </a:outerShdw>
           </a:effectLst>
         </p:spPr>
+        <p:txBody>
+          <a:bodyPr/>
+          <a:p/>
+        </p:txBody>
       </p:sp>
       <p:sp>
         <p:nvSpPr>
@@ -5924,6 +6036,10 @@
             </a:outerShdw>
           </a:effectLst>
         </p:spPr>
+        <p:txBody>
+          <a:bodyPr/>
+          <a:p/>
+        </p:txBody>
       </p:sp>
       <p:sp>
         <p:nvSpPr>
@@ -6045,6 +6161,10 @@
             </a:outerShdw>
           </a:effectLst>
         </p:spPr>
+        <p:txBody>
+          <a:bodyPr/>
+          <a:p/>
+        </p:txBody>
       </p:sp>
       <p:sp>
         <p:nvSpPr>
@@ -6166,6 +6286,10 @@
             </a:outerShdw>
           </a:effectLst>
         </p:spPr>
+        <p:txBody>
+          <a:bodyPr/>
+          <a:p/>
+        </p:txBody>
       </p:sp>
       <p:sp>
         <p:nvSpPr>
@@ -6287,6 +6411,10 @@
             </a:outerShdw>
           </a:effectLst>
         </p:spPr>
+        <p:txBody>
+          <a:bodyPr/>
+          <a:p/>
+        </p:txBody>
       </p:sp>
       <p:sp>
         <p:nvSpPr>
@@ -6408,6 +6536,10 @@
             </a:outerShdw>
           </a:effectLst>
         </p:spPr>
+        <p:txBody>
+          <a:bodyPr/>
+          <a:p/>
+        </p:txBody>
       </p:sp>
       <p:sp>
         <p:nvSpPr>
@@ -6529,6 +6661,10 @@
             </a:outerShdw>
           </a:effectLst>
         </p:spPr>
+        <p:txBody>
+          <a:bodyPr/>
+          <a:p/>
+        </p:txBody>
       </p:sp>
       <p:sp>
         <p:nvSpPr>
@@ -6651,6 +6787,10 @@
             <a:prstDash val="solid"/>
           </a:ln>
         </p:spPr>
+        <p:txBody>
+          <a:bodyPr/>
+          <a:p/>
+        </p:txBody>
       </p:sp>
       <p:sp>
         <p:nvSpPr>
@@ -6773,6 +6913,10 @@
             <a:prstDash val="solid"/>
           </a:ln>
         </p:spPr>
+        <p:txBody>
+          <a:bodyPr/>
+          <a:p/>
+        </p:txBody>
       </p:sp>
       <p:sp>
         <p:nvSpPr>
@@ -6895,6 +7039,10 @@
             <a:prstDash val="solid"/>
           </a:ln>
         </p:spPr>
+        <p:txBody>
+          <a:bodyPr/>
+          <a:p/>
+        </p:txBody>
       </p:sp>
       <p:sp>
         <p:nvSpPr>
@@ -7017,6 +7165,10 @@
             <a:prstDash val="solid"/>
           </a:ln>
         </p:spPr>
+        <p:txBody>
+          <a:bodyPr/>
+          <a:p/>
+        </p:txBody>
       </p:sp>
       <p:sp>
         <p:nvSpPr>
@@ -7139,6 +7291,10 @@
             <a:prstDash val="solid"/>
           </a:ln>
         </p:spPr>
+        <p:txBody>
+          <a:bodyPr/>
+          <a:p/>
+        </p:txBody>
       </p:sp>
       <p:sp>
         <p:nvSpPr>
@@ -7256,6 +7412,10 @@
           </a:solidFill>
           <a:ln/>
         </p:spPr>
+        <p:txBody>
+          <a:bodyPr/>
+          <a:p/>
+        </p:txBody>
       </p:sp>
       <p:sp>
         <p:nvSpPr>

--- a/docs/slides-arquitectura.pptx
+++ b/docs/slides-arquitectura.pptx
@@ -1538,17 +1538,6 @@
             <a:pPr algn="ctr" indent="0" marL="0">
               <a:buNone/>
             </a:pPr>
-            <a:r>
-              <a:rPr lang="en-US" sz="900" b="1" dirty="0">
-                <a:solidFill>
-                  <a:srgbClr val="FFFFFF"/>
-                </a:solidFill>
-                <a:latin typeface="Calibri" pitchFamily="34" charset="0"/>
-                <a:ea typeface="Calibri" pitchFamily="34" charset="-122"/>
-                <a:cs typeface="Calibri" pitchFamily="34" charset="-120"/>
-              </a:rPr>
-              <a:t>DMS</a:t>
-            </a:r>
             <a:endParaRPr lang="en-US" sz="900" dirty="0"/>
           </a:p>
         </p:txBody>
@@ -1586,7 +1575,7 @@
                 <a:ea typeface="Calibri" pitchFamily="34" charset="-122"/>
                 <a:cs typeface="Calibri" pitchFamily="34" charset="-120"/>
               </a:rPr>
-              <a:t>Kafka</a:t>
+              <a:t/>
             </a:r>
             <a:endParaRPr lang="en-US" sz="700" dirty="0"/>
           </a:p>
@@ -5940,6 +5929,12 @@
             <a:pPr algn="ctr" indent="0" marL="0">
               <a:buNone/>
             </a:pPr>
+            <a:endParaRPr lang="en-US" sz="900" dirty="0"/>
+          </a:p>
+          <a:p>
+            <a:pPr algn="ctr" indent="0" marL="0">
+              <a:buNone/>
+            </a:pPr>
             <a:r>
               <a:rPr lang="en-US" sz="900" dirty="0">
                 <a:solidFill>
@@ -5949,24 +5944,7 @@
                 <a:ea typeface="Calibri" pitchFamily="34" charset="-122"/>
                 <a:cs typeface="Calibri" pitchFamily="34" charset="-120"/>
               </a:rPr>
-              <a:t>DMS</a:t>
-            </a:r>
-            <a:endParaRPr lang="en-US" sz="900" dirty="0"/>
-          </a:p>
-          <a:p>
-            <a:pPr algn="ctr" indent="0" marL="0">
-              <a:buNone/>
-            </a:pPr>
-            <a:r>
-              <a:rPr lang="en-US" sz="900" dirty="0">
-                <a:solidFill>
-                  <a:srgbClr val="FFFFFF"/>
-                </a:solidFill>
-                <a:latin typeface="Calibri" pitchFamily="34" charset="0"/>
-                <a:ea typeface="Calibri" pitchFamily="34" charset="-122"/>
-                <a:cs typeface="Calibri" pitchFamily="34" charset="-120"/>
-              </a:rPr>
-              <a:t>Kafka</a:t>
+              <a:t/>
             </a:r>
             <a:endParaRPr lang="en-US" sz="900" dirty="0"/>
           </a:p>

--- a/docs/slides-arquitectura.pptx
+++ b/docs/slides-arquitectura.pptx
@@ -3342,7 +3342,7 @@
                 <a:ea typeface="Calibri" pitchFamily="34" charset="-122"/>
                 <a:cs typeface="Calibri" pitchFamily="34" charset="-120"/>
               </a:rPr>
-              <a:t>CFW Firewall</a:t>
+              <a:t>Security Groups</a:t>
             </a:r>
             <a:endParaRPr lang="en-US" sz="700" dirty="0"/>
           </a:p>
@@ -3381,7 +3381,7 @@
                 <a:ea typeface="Calibri" pitchFamily="34" charset="-122"/>
                 <a:cs typeface="Calibri" pitchFamily="34" charset="-120"/>
               </a:rPr>
-              <a:t>WAF</a:t>
+              <a:t>VPC Isolation</a:t>
             </a:r>
             <a:endParaRPr lang="en-US" sz="700" dirty="0"/>
           </a:p>
@@ -3420,7 +3420,7 @@
                 <a:ea typeface="Calibri" pitchFamily="34" charset="-122"/>
                 <a:cs typeface="Calibri" pitchFamily="34" charset="-120"/>
               </a:rPr>
-              <a:t>IAM Condicional</a:t>
+              <a:t>IAM Roles</a:t>
             </a:r>
             <a:endParaRPr lang="en-US" sz="700" dirty="0"/>
           </a:p>
@@ -3498,7 +3498,7 @@
                 <a:ea typeface="Calibri" pitchFamily="34" charset="-122"/>
                 <a:cs typeface="Calibri" pitchFamily="34" charset="-120"/>
               </a:rPr>
-              <a:t>CNBV Compliance</a:t>
+              <a:t>Controles CNBV</a:t>
             </a:r>
             <a:endParaRPr lang="en-US" sz="700" dirty="0"/>
           </a:p>
@@ -4888,7 +4888,7 @@
                 <a:ea typeface="Calibri" pitchFamily="34" charset="-122"/>
                 <a:cs typeface="Calibri" pitchFamily="34" charset="-120"/>
               </a:rPr>
-              <a:t>CNBV Compliance</a:t>
+              <a:t>Controles CNBV</a:t>
             </a:r>
             <a:endParaRPr lang="en-US" sz="1000" dirty="0"/>
           </a:p>
@@ -5346,7 +5346,7 @@
                 <a:ea typeface="Calibri" pitchFamily="34" charset="-122"/>
                 <a:cs typeface="Calibri" pitchFamily="34" charset="-120"/>
               </a:rPr>
-              <a:t>99.98%</a:t>
+              <a:t>3</a:t>
             </a:r>
             <a:endParaRPr lang="en-US" sz="1800" dirty="0"/>
           </a:p>
@@ -5385,7 +5385,7 @@
                 <a:ea typeface="Calibri" pitchFamily="34" charset="-122"/>
                 <a:cs typeface="Calibri" pitchFamily="34" charset="-120"/>
               </a:rPr>
-              <a:t>disponibilidad</a:t>
+              <a:t>demos</a:t>
             </a:r>
             <a:endParaRPr lang="en-US" sz="800" dirty="0"/>
           </a:p>
@@ -5402,7 +5402,7 @@
                 <a:ea typeface="Calibri" pitchFamily="34" charset="-122"/>
                 <a:cs typeface="Calibri" pitchFamily="34" charset="-120"/>
               </a:rPr>
-              <a:t>plataforma</a:t>
+              <a:t>integrados</a:t>
             </a:r>
             <a:endParaRPr lang="en-US" sz="800" dirty="0"/>
           </a:p>
@@ -5467,7 +5467,7 @@
                 <a:ea typeface="Calibri" pitchFamily="34" charset="-122"/>
                 <a:cs typeface="Calibri" pitchFamily="34" charset="-120"/>
               </a:rPr>
-              <a:t>CFW · WAF · IAM · KMS  |  Cumplimiento CNBV · Banxico · Ley Fintech (AML/KYC)</a:t>
+              <a:t>Security Groups · IAM · KMS · OBS Encryption  |  Controles alineados a CNBV/Banxico (AML/KYC)</a:t>
             </a:r>
             <a:endParaRPr lang="en-US" sz="700" dirty="0"/>
           </a:p>
@@ -7428,7 +7428,7 @@
                 <a:ea typeface="Calibri" pitchFamily="34" charset="-122"/>
                 <a:cs typeface="Calibri" pitchFamily="34" charset="-120"/>
               </a:rPr>
-              <a:t>De revisar contratos en silos → chatbot que responde en segundos sobre todo tu portafolio. DeepSeek + Dify = abogado AI 24/7.</a:t>
+              <a:t>De revisar contratos en silos → chatbot que responde en segundos sobre todo tu portafolio. DeepSeek + Dify = asistente contractual 24/7.</a:t>
             </a:r>
             <a:endParaRPr lang="en-US" sz="900" dirty="0"/>
           </a:p>

--- a/docs/slides-arquitectura.pptx
+++ b/docs/slides-arquitectura.pptx
@@ -5243,15 +5243,7 @@
               <a:buNone/>
             </a:pPr>
             <a:r>
-              <a:rPr lang="en-US" sz="1800" b="1" dirty="0">
-                <a:solidFill>
-                  <a:srgbClr val="C7000B"/>
-                </a:solidFill>
-                <a:latin typeface="Calibri" pitchFamily="34" charset="0"/>
-                <a:ea typeface="Calibri" pitchFamily="34" charset="-122"/>
-                <a:cs typeface="Calibri" pitchFamily="34" charset="-120"/>
-              </a:rPr>
-              <a:t>3 SAR</a:t>
+              <a:t>20 alertas</a:t>
             </a:r>
             <a:endParaRPr lang="en-US" sz="1800" dirty="0"/>
           </a:p>
@@ -5697,15 +5689,7 @@
               <a:buNone/>
             </a:pPr>
             <a:r>
-              <a:rPr lang="en-US" sz="900" dirty="0">
-                <a:solidFill>
-                  <a:srgbClr val="FFFFFF"/>
-                </a:solidFill>
-                <a:latin typeface="Calibri" pitchFamily="34" charset="0"/>
-                <a:ea typeface="Calibri" pitchFamily="34" charset="-122"/>
-                <a:cs typeface="Calibri" pitchFamily="34" charset="-120"/>
-              </a:rPr>
-              <a:t>3 Contratos → OBS</a:t>
+              <a:t>20 Contratos → OBS</a:t>
             </a:r>
             <a:endParaRPr lang="en-US" sz="900" dirty="0"/>
           </a:p>

--- a/docs/slides-arquitectura.pptx
+++ b/docs/slides-arquitectura.pptx
@@ -5749,7 +5749,7 @@
               </a:defRPr>
             </a:pPr>
             <a:r>
-              <a:t>200ms</a:t>
+              <a:t>Dry run</a:t>
             </a:r>
           </a:p>
         </p:txBody>
@@ -5785,7 +5785,7 @@
               </a:defRPr>
             </a:pPr>
             <a:r>
-              <a:t>avg latency</a:t>
+              <a:t>latency</a:t>
             </a:r>
           </a:p>
         </p:txBody>
@@ -5900,7 +5900,7 @@
               </a:defRPr>
             </a:pPr>
             <a:r>
-              <a:t>▸  VPC Isolation — 10.1.0.0/16 private subnets</a:t>
+              <a:t>▸  VPC Isolation — 172.16.0.0/16 private subnets</a:t>
             </a:r>
           </a:p>
         </p:txBody>
@@ -6080,7 +6080,7 @@
               </a:defRPr>
             </a:pPr>
             <a:r>
-              <a:t>▸  CNBV compliance — AML, KYC, audit trail</a:t>
+              <a:t>▸  CNBV alignment — AML, KYC, audit trail</a:t>
             </a:r>
           </a:p>
         </p:txBody>

--- a/docs/slides-arquitectura.pptx
+++ b/docs/slides-arquitectura.pptx
@@ -11,7 +11,7 @@
     <p:sldId id="259" r:id="rId10"/>
     <p:sldId id="260" r:id="rId11"/>
   </p:sldIdLst>
-  <p:sldSz cx="12192000" cy="6858000" type="screen4x3"/>
+  <p:sldSz cx="12192000" cy="6858000" type="wide"/>
   <p:notesSz cx="6858000" cy="9144000"/>
   <p:defaultTextStyle>
     <a:defPPr>
@@ -3083,317 +3083,898 @@
 </file>
 
 <file path=ppt/slides/slide1.xml><?xml version="1.0" encoding="utf-8"?>
-<p:sld xmlns:a="http://schemas.openxmlformats.org/drawingml/2006/main" xmlns:p="http://schemas.openxmlformats.org/presentationml/2006/main" xmlns:r="http://schemas.openxmlformats.org/officeDocument/2006/relationships">
+<p:sld xmlns:a="http://schemas.openxmlformats.org/drawingml/2006/main" xmlns:r="http://schemas.openxmlformats.org/officeDocument/2006/relationships" xmlns:p="http://schemas.openxmlformats.org/presentationml/2006/main">
   <p:cSld>
-    <p:bg>
-      <p:bgPr>
-        <a:solidFill>
-          <a:srgbClr val="0A0A0A"/>
-        </a:solidFill>
-        <a:effectLst/>
-      </p:bgPr>
-    </p:bg>
     <p:spTree>
       <p:nvGrpSpPr>
         <p:cNvPr id="1" name=""/>
         <p:cNvGrpSpPr/>
         <p:nvPr/>
       </p:nvGrpSpPr>
-      <p:grpSpPr/>
-      <p:sp>
-        <p:nvSpPr>
-          <p:cNvPr id="2" name="Rectangle 1"/>
+      <p:grpSpPr>
+        <a:xfrm>
+          <a:off x="0" y="0"/>
+          <a:ext cx="12192000" cy="6858000"/>
+          <a:chOff x="0" y="0"/>
+          <a:chExt cx="12192000" cy="6858000"/>
+        </a:xfrm>
+      </p:grpSpPr>
+      <p:sp>
+        <p:nvSpPr>
+          <p:cNvPr id="2" name="Block"/>
           <p:cNvSpPr/>
           <p:nvPr/>
         </p:nvSpPr>
         <p:spPr>
           <a:xfrm>
             <a:off x="0" y="0"/>
-            <a:ext cx="12191695" cy="54864"/>
+            <a:ext cx="12191695" cy="6858000"/>
           </a:xfrm>
           <a:prstGeom prst="rect">
             <a:avLst/>
           </a:prstGeom>
           <a:solidFill>
-            <a:srgbClr val="E4002B"/>
+            <a:srgbClr val="F7FAFC"/>
           </a:solidFill>
           <a:ln>
             <a:noFill/>
           </a:ln>
         </p:spPr>
-        <p:style>
-          <a:lnRef idx="1">
-            <a:schemeClr val="accent1"/>
-          </a:lnRef>
-          <a:fillRef idx="3">
-            <a:schemeClr val="accent1"/>
-          </a:fillRef>
-          <a:effectRef idx="2">
-            <a:schemeClr val="accent1"/>
-          </a:effectRef>
-          <a:fontRef idx="minor">
-            <a:schemeClr val="lt1"/>
-          </a:fontRef>
-        </p:style>
-        <p:txBody>
-          <a:bodyPr rtlCol="0" anchor="ctr"/>
-          <a:lstStyle/>
-          <a:p>
-            <a:pPr algn="ctr"/>
-          </a:p>
-        </p:txBody>
-      </p:sp>
-      <p:sp>
-        <p:nvSpPr>
-          <p:cNvPr id="3" name="TextBox 2"/>
-          <p:cNvSpPr txBox="1"/>
-          <p:nvPr/>
-        </p:nvSpPr>
-        <p:spPr>
-          <a:xfrm>
-            <a:off x="457200" y="274320"/>
-            <a:ext cx="7315200" cy="548640"/>
+        <p:txBody>
+          <a:bodyPr/>
+          <a:lstStyle/>
+          <a:p/>
+        </p:txBody>
+      </p:sp>
+      <p:sp>
+        <p:nvSpPr>
+          <p:cNvPr id="3" name="Block"/>
+          <p:cNvSpPr/>
+          <p:nvPr/>
+        </p:nvSpPr>
+        <p:spPr>
+          <a:xfrm>
+            <a:off x="0" y="0"/>
+            <a:ext cx="201168" cy="6858000"/>
           </a:xfrm>
           <a:prstGeom prst="rect">
             <a:avLst/>
           </a:prstGeom>
-          <a:noFill/>
-        </p:spPr>
-        <p:txBody>
-          <a:bodyPr wrap="square">
-            <a:spAutoFit/>
-          </a:bodyPr>
-          <a:lstStyle/>
-          <a:p>
-            <a:pPr algn="l">
-              <a:defRPr sz="2800" b="1">
-                <a:solidFill>
-                  <a:srgbClr val="FFFFFF"/>
-                </a:solidFill>
-                <a:latin typeface="Calibri"/>
-              </a:defRPr>
-            </a:pPr>
-            <a:r>
-              <a:t>AYCO — Contract Risk Intelligence Platform</a:t>
-            </a:r>
-          </a:p>
-        </p:txBody>
-      </p:sp>
-      <p:sp>
-        <p:nvSpPr>
-          <p:cNvPr id="4" name="TextBox 3"/>
-          <p:cNvSpPr txBox="1"/>
-          <p:nvPr/>
-        </p:nvSpPr>
-        <p:spPr>
-          <a:xfrm>
-            <a:off x="457200" y="822960"/>
-            <a:ext cx="7315200" cy="365760"/>
-          </a:xfrm>
-          <a:prstGeom prst="rect">
-            <a:avLst/>
-          </a:prstGeom>
-          <a:noFill/>
-        </p:spPr>
-        <p:txBody>
-          <a:bodyPr wrap="square">
-            <a:spAutoFit/>
-          </a:bodyPr>
-          <a:lstStyle/>
-          <a:p>
-            <a:pPr algn="l">
-              <a:defRPr sz="1400" b="0">
-                <a:solidFill>
-                  <a:srgbClr val="999999"/>
-                </a:solidFill>
-                <a:latin typeface="Calibri"/>
-              </a:defRPr>
-            </a:pPr>
-            <a:r>
-              <a:t>3 Casos de Uso sobre Infraestructura Unificada  |  la-north-2 (México)</a:t>
-            </a:r>
-          </a:p>
-        </p:txBody>
-      </p:sp>
-      <p:sp>
-        <p:nvSpPr>
-          <p:cNvPr id="5" name="Rectangle 4"/>
-          <p:cNvSpPr/>
-          <p:nvPr/>
-        </p:nvSpPr>
-        <p:spPr>
-          <a:xfrm>
-            <a:off x="457200" y="1188720"/>
-            <a:ext cx="2286000" cy="36576"/>
-          </a:xfrm>
-          <a:prstGeom prst="rect">
-            <a:avLst/>
-          </a:prstGeom>
-          <a:solidFill>
-            <a:srgbClr val="E4002B"/>
+          <a:solidFill>
+            <a:srgbClr val="1FB6C9"/>
           </a:solidFill>
           <a:ln>
             <a:noFill/>
           </a:ln>
         </p:spPr>
-        <p:style>
-          <a:lnRef idx="1">
-            <a:schemeClr val="accent1"/>
-          </a:lnRef>
-          <a:fillRef idx="3">
-            <a:schemeClr val="accent1"/>
-          </a:fillRef>
-          <a:effectRef idx="2">
-            <a:schemeClr val="accent1"/>
-          </a:effectRef>
-          <a:fontRef idx="minor">
-            <a:schemeClr val="lt1"/>
-          </a:fontRef>
-        </p:style>
-        <p:txBody>
-          <a:bodyPr rtlCol="0" anchor="ctr"/>
-          <a:lstStyle/>
-          <a:p>
-            <a:pPr algn="ctr"/>
-          </a:p>
-        </p:txBody>
-      </p:sp>
-      <p:pic>
-        <p:nvPicPr>
-          <p:cNvPr id="6" name="Picture 5" descr="ayco-main-diagram.png"/>
-          <p:cNvPicPr>
-            <a:picLocks noChangeAspect="1"/>
-          </p:cNvPicPr>
-          <p:nvPr/>
-        </p:nvPicPr>
-        <p:blipFill>
-          <a:blip r:embed="rId2"/>
-          <a:stretch>
-            <a:fillRect/>
-          </a:stretch>
-        </p:blipFill>
-        <p:spPr>
-          <a:xfrm>
-            <a:off x="457200" y="1371600"/>
-            <a:ext cx="11277295" cy="4846320"/>
+        <p:txBody>
+          <a:bodyPr/>
+          <a:lstStyle/>
+          <a:p/>
+        </p:txBody>
+      </p:sp>
+      <p:sp>
+        <p:nvSpPr>
+          <p:cNvPr id="4" name="Kicker"/>
+          <p:cNvSpPr txBox="1"/>
+          <p:nvPr/>
+        </p:nvSpPr>
+        <p:spPr>
+          <a:xfrm>
+            <a:off x="502920" y="256032"/>
+            <a:ext cx="4572000" cy="256032"/>
           </a:xfrm>
           <a:prstGeom prst="rect">
             <a:avLst/>
           </a:prstGeom>
-        </p:spPr>
-      </p:pic>
-      <p:sp>
-        <p:nvSpPr>
-          <p:cNvPr id="7" name="Rectangle 6"/>
-          <p:cNvSpPr/>
-          <p:nvPr/>
-        </p:nvSpPr>
-        <p:spPr>
-          <a:xfrm>
-            <a:off x="0" y="6492240"/>
-            <a:ext cx="12191695" cy="54864"/>
-          </a:xfrm>
-          <a:prstGeom prst="rect">
-            <a:avLst/>
-          </a:prstGeom>
-          <a:solidFill>
-            <a:srgbClr val="1A1A1A"/>
-          </a:solidFill>
+          <a:noFill/>
           <a:ln>
             <a:noFill/>
           </a:ln>
         </p:spPr>
-        <p:style>
-          <a:lnRef idx="1">
-            <a:schemeClr val="accent1"/>
-          </a:lnRef>
-          <a:fillRef idx="3">
-            <a:schemeClr val="accent1"/>
-          </a:fillRef>
-          <a:effectRef idx="2">
-            <a:schemeClr val="accent1"/>
-          </a:effectRef>
-          <a:fontRef idx="minor">
-            <a:schemeClr val="lt1"/>
-          </a:fontRef>
-        </p:style>
-        <p:txBody>
-          <a:bodyPr rtlCol="0" anchor="ctr"/>
-          <a:lstStyle/>
-          <a:p>
-            <a:pPr algn="ctr"/>
-          </a:p>
-        </p:txBody>
-      </p:sp>
-      <p:sp>
-        <p:nvSpPr>
-          <p:cNvPr id="8" name="TextBox 7"/>
+        <p:txBody>
+          <a:bodyPr wrap="square" anchor="mid" lIns="73152" rIns="73152" tIns="73152" bIns="73152"/>
+          <a:lstStyle/>
+          <a:p>
+            <a:pPr algn="l">
+              <a:spcAft>
+                <a:spcPts val="0"/>
+              </a:spcAft>
+            </a:pPr>
+            <a:r>
+              <a:rPr lang="es-MX" sz="850" b="1">
+                <a:solidFill>
+                  <a:srgbClr val="1FB6C9"/>
+                </a:solidFill>
+                <a:latin typeface="Aptos"/>
+              </a:rPr>
+              <a:t>AYCO CONTRACT RISK INTELLIGENCE PLATFORM</a:t>
+            </a:r>
+            <a:endParaRPr lang="es-MX" sz="850"/>
+          </a:p>
+        </p:txBody>
+      </p:sp>
+      <p:sp>
+        <p:nvSpPr>
+          <p:cNvPr id="5" name="Title"/>
           <p:cNvSpPr txBox="1"/>
           <p:nvPr/>
         </p:nvSpPr>
         <p:spPr>
           <a:xfrm>
-            <a:off x="457200" y="6510528"/>
-            <a:ext cx="11277295" cy="320040"/>
+            <a:off x="502920" y="502920"/>
+            <a:ext cx="7955280" cy="566928"/>
           </a:xfrm>
           <a:prstGeom prst="rect">
             <a:avLst/>
           </a:prstGeom>
           <a:noFill/>
-        </p:spPr>
-        <p:txBody>
-          <a:bodyPr wrap="square">
-            <a:spAutoFit/>
-          </a:bodyPr>
+          <a:ln>
+            <a:noFill/>
+          </a:ln>
+        </p:spPr>
+        <p:txBody>
+          <a:bodyPr wrap="square" anchor="mid" lIns="73152" rIns="73152" tIns="73152" bIns="73152"/>
+          <a:lstStyle/>
+          <a:p>
+            <a:pPr algn="l">
+              <a:spcAft>
+                <a:spcPts val="0"/>
+              </a:spcAft>
+            </a:pPr>
+            <a:r>
+              <a:rPr lang="es-MX" sz="2500" b="1">
+                <a:solidFill>
+                  <a:srgbClr val="0B1728"/>
+                </a:solidFill>
+                <a:latin typeface="Aptos"/>
+              </a:rPr>
+              <a:t>De PDFs a inteligencia de riesgo gobernada</a:t>
+            </a:r>
+            <a:endParaRPr lang="es-MX" sz="2500"/>
+          </a:p>
+        </p:txBody>
+      </p:sp>
+      <p:sp>
+        <p:nvSpPr>
+          <p:cNvPr id="6" name="Text"/>
+          <p:cNvSpPr txBox="1"/>
+          <p:nvPr/>
+        </p:nvSpPr>
+        <p:spPr>
+          <a:xfrm>
+            <a:off x="530352" y="1261872"/>
+            <a:ext cx="7132320" cy="566928"/>
+          </a:xfrm>
+          <a:prstGeom prst="rect">
+            <a:avLst/>
+          </a:prstGeom>
+          <a:noFill/>
+          <a:ln>
+            <a:noFill/>
+          </a:ln>
+        </p:spPr>
+        <p:txBody>
+          <a:bodyPr wrap="square" anchor="top" lIns="73152" rIns="73152" tIns="73152" bIns="73152"/>
+          <a:lstStyle/>
+          <a:p>
+            <a:pPr algn="l">
+              <a:spcAft>
+                <a:spcPts val="0"/>
+              </a:spcAft>
+            </a:pPr>
+            <a:r>
+              <a:rPr lang="es-MX" sz="1350">
+                <a:solidFill>
+                  <a:srgbClr val="12345A"/>
+                </a:solidFill>
+                <a:latin typeface="Aptos"/>
+              </a:rPr>
+              <a:t>Un demo ejecutivo: 20 contratos entran por OBS, la IA extrae obligaciones y el tablero prioriza riesgo financiero y cumplimiento en minutos.</a:t>
+            </a:r>
+            <a:endParaRPr lang="es-MX" sz="1350"/>
+          </a:p>
+        </p:txBody>
+      </p:sp>
+      <p:sp>
+        <p:nvSpPr>
+          <p:cNvPr id="7" name="Metric contratos procesados"/>
+          <p:cNvSpPr txBox="1"/>
+          <p:nvPr/>
+        </p:nvSpPr>
+        <p:spPr>
+          <a:xfrm>
+            <a:off x="658368" y="2057400"/>
+            <a:ext cx="2057400" cy="868680"/>
+          </a:xfrm>
+          <a:prstGeom prst="roundRect">
+            <a:avLst/>
+          </a:prstGeom>
+          <a:solidFill>
+            <a:srgbClr val="E8F2FF"/>
+          </a:solidFill>
+          <a:ln w="9525">
+            <a:solidFill>
+              <a:srgbClr val="D7E3F0"/>
+            </a:solidFill>
+          </a:ln>
+        </p:spPr>
+        <p:txBody>
+          <a:bodyPr wrap="square" anchor="mid" lIns="73152" rIns="73152" tIns="73152" bIns="73152"/>
           <a:lstStyle/>
           <a:p>
             <a:pPr algn="ctr">
-              <a:defRPr sz="900" b="0">
-                <a:solidFill>
-                  <a:srgbClr val="999999"/>
-                </a:solidFill>
-                <a:latin typeface="Calibri"/>
-              </a:defRPr>
-            </a:pPr>
-            <a:r>
-              <a:t>Workshop Huawei Cloud × Salinas  |  Mayo 8, 2026  |  México Century Plaza</a:t>
-            </a:r>
-          </a:p>
-        </p:txBody>
-      </p:sp>
-      <p:sp>
-        <p:nvSpPr>
-          <p:cNvPr id="9" name="TextBox 8"/>
+              <a:spcAft>
+                <a:spcPts val="0"/>
+              </a:spcAft>
+            </a:pPr>
+            <a:r>
+              <a:rPr lang="es-MX" sz="2300" b="1">
+                <a:solidFill>
+                  <a:srgbClr val="2B6CB0"/>
+                </a:solidFill>
+                <a:latin typeface="Aptos"/>
+              </a:rPr>
+              <a:t>20</a:t>
+            </a:r>
+            <a:endParaRPr lang="es-MX" sz="2300"/>
+          </a:p>
+          <a:p>
+            <a:pPr algn="ctr">
+              <a:spcAft>
+                <a:spcPts val="0"/>
+              </a:spcAft>
+            </a:pPr>
+            <a:r>
+              <a:rPr lang="es-MX" sz="860">
+                <a:solidFill>
+                  <a:srgbClr val="0B1728"/>
+                </a:solidFill>
+                <a:latin typeface="Aptos"/>
+              </a:rPr>
+              <a:t>contratos procesados</a:t>
+            </a:r>
+            <a:endParaRPr lang="es-MX" sz="860"/>
+          </a:p>
+        </p:txBody>
+      </p:sp>
+      <p:sp>
+        <p:nvSpPr>
+          <p:cNvPr id="8" name="Metric exposición MXN"/>
           <p:cNvSpPr txBox="1"/>
           <p:nvPr/>
         </p:nvSpPr>
         <p:spPr>
           <a:xfrm>
-            <a:off x="11094415" y="6510528"/>
-            <a:ext cx="731520" cy="320040"/>
+            <a:off x="2971800" y="2057400"/>
+            <a:ext cx="2240280" cy="868680"/>
+          </a:xfrm>
+          <a:prstGeom prst="roundRect">
+            <a:avLst/>
+          </a:prstGeom>
+          <a:solidFill>
+            <a:srgbClr val="FFF3D6"/>
+          </a:solidFill>
+          <a:ln w="9525">
+            <a:solidFill>
+              <a:srgbClr val="D7E3F0"/>
+            </a:solidFill>
+          </a:ln>
+        </p:spPr>
+        <p:txBody>
+          <a:bodyPr wrap="square" anchor="mid" lIns="73152" rIns="73152" tIns="73152" bIns="73152"/>
+          <a:lstStyle/>
+          <a:p>
+            <a:pPr algn="ctr">
+              <a:spcAft>
+                <a:spcPts val="0"/>
+              </a:spcAft>
+            </a:pPr>
+            <a:r>
+              <a:rPr lang="es-MX" sz="2300" b="1">
+                <a:solidFill>
+                  <a:srgbClr val="F5A623"/>
+                </a:solidFill>
+                <a:latin typeface="Aptos"/>
+              </a:rPr>
+              <a:t>$133M</a:t>
+            </a:r>
+            <a:endParaRPr lang="es-MX" sz="2300"/>
+          </a:p>
+          <a:p>
+            <a:pPr algn="ctr">
+              <a:spcAft>
+                <a:spcPts val="0"/>
+              </a:spcAft>
+            </a:pPr>
+            <a:r>
+              <a:rPr lang="es-MX" sz="860">
+                <a:solidFill>
+                  <a:srgbClr val="0B1728"/>
+                </a:solidFill>
+                <a:latin typeface="Aptos"/>
+              </a:rPr>
+              <a:t>exposición MXN</a:t>
+            </a:r>
+            <a:endParaRPr lang="es-MX" sz="860"/>
+          </a:p>
+        </p:txBody>
+      </p:sp>
+      <p:sp>
+        <p:nvSpPr>
+          <p:cNvPr id="9" name="Metric proveedores escalables"/>
+          <p:cNvSpPr txBox="1"/>
+          <p:nvPr/>
+        </p:nvSpPr>
+        <p:spPr>
+          <a:xfrm>
+            <a:off x="5468112" y="2057400"/>
+            <a:ext cx="2148840" cy="868680"/>
+          </a:xfrm>
+          <a:prstGeom prst="roundRect">
+            <a:avLst/>
+          </a:prstGeom>
+          <a:solidFill>
+            <a:srgbClr val="E9F8F0"/>
+          </a:solidFill>
+          <a:ln w="9525">
+            <a:solidFill>
+              <a:srgbClr val="D7E3F0"/>
+            </a:solidFill>
+          </a:ln>
+        </p:spPr>
+        <p:txBody>
+          <a:bodyPr wrap="square" anchor="mid" lIns="73152" rIns="73152" tIns="73152" bIns="73152"/>
+          <a:lstStyle/>
+          <a:p>
+            <a:pPr algn="ctr">
+              <a:spcAft>
+                <a:spcPts val="0"/>
+              </a:spcAft>
+            </a:pPr>
+            <a:r>
+              <a:rPr lang="es-MX" sz="2300" b="1">
+                <a:solidFill>
+                  <a:srgbClr val="22A06B"/>
+                </a:solidFill>
+                <a:latin typeface="Aptos"/>
+              </a:rPr>
+              <a:t>2,300</a:t>
+            </a:r>
+            <a:endParaRPr lang="es-MX" sz="2300"/>
+          </a:p>
+          <a:p>
+            <a:pPr algn="ctr">
+              <a:spcAft>
+                <a:spcPts val="0"/>
+              </a:spcAft>
+            </a:pPr>
+            <a:r>
+              <a:rPr lang="es-MX" sz="860">
+                <a:solidFill>
+                  <a:srgbClr val="0B1728"/>
+                </a:solidFill>
+                <a:latin typeface="Aptos"/>
+              </a:rPr>
+              <a:t>proveedores escalables</a:t>
+            </a:r>
+            <a:endParaRPr lang="es-MX" sz="860"/>
+          </a:p>
+        </p:txBody>
+      </p:sp>
+      <p:sp>
+        <p:nvSpPr>
+          <p:cNvPr id="10" name="Metric niveles de riesgo"/>
+          <p:cNvSpPr txBox="1"/>
+          <p:nvPr/>
+        </p:nvSpPr>
+        <p:spPr>
+          <a:xfrm>
+            <a:off x="7882128" y="2057400"/>
+            <a:ext cx="2103120" cy="868680"/>
+          </a:xfrm>
+          <a:prstGeom prst="roundRect">
+            <a:avLst/>
+          </a:prstGeom>
+          <a:solidFill>
+            <a:srgbClr val="FDECEC"/>
+          </a:solidFill>
+          <a:ln w="9525">
+            <a:solidFill>
+              <a:srgbClr val="D7E3F0"/>
+            </a:solidFill>
+          </a:ln>
+        </p:spPr>
+        <p:txBody>
+          <a:bodyPr wrap="square" anchor="mid" lIns="73152" rIns="73152" tIns="73152" bIns="73152"/>
+          <a:lstStyle/>
+          <a:p>
+            <a:pPr algn="ctr">
+              <a:spcAft>
+                <a:spcPts val="0"/>
+              </a:spcAft>
+            </a:pPr>
+            <a:r>
+              <a:rPr lang="es-MX" sz="2300" b="1">
+                <a:solidFill>
+                  <a:srgbClr val="D64545"/>
+                </a:solidFill>
+                <a:latin typeface="Aptos"/>
+              </a:rPr>
+              <a:t>4</a:t>
+            </a:r>
+            <a:endParaRPr lang="es-MX" sz="2300"/>
+          </a:p>
+          <a:p>
+            <a:pPr algn="ctr">
+              <a:spcAft>
+                <a:spcPts val="0"/>
+              </a:spcAft>
+            </a:pPr>
+            <a:r>
+              <a:rPr lang="es-MX" sz="860">
+                <a:solidFill>
+                  <a:srgbClr val="0B1728"/>
+                </a:solidFill>
+                <a:latin typeface="Aptos"/>
+              </a:rPr>
+              <a:t>niveles de riesgo</a:t>
+            </a:r>
+            <a:endParaRPr lang="es-MX" sz="860"/>
+          </a:p>
+        </p:txBody>
+      </p:sp>
+      <p:sp>
+        <p:nvSpPr>
+          <p:cNvPr id="11" name="Text"/>
+          <p:cNvSpPr txBox="1"/>
+          <p:nvPr/>
+        </p:nvSpPr>
+        <p:spPr>
+          <a:xfrm>
+            <a:off x="658368" y="3401568"/>
+            <a:ext cx="1965960" cy="658368"/>
+          </a:xfrm>
+          <a:prstGeom prst="roundRect">
+            <a:avLst/>
+          </a:prstGeom>
+          <a:solidFill>
+            <a:srgbClr val="FFFFFF"/>
+          </a:solidFill>
+          <a:ln w="10160">
+            <a:solidFill>
+              <a:srgbClr val="D7E3F0"/>
+            </a:solidFill>
+          </a:ln>
+        </p:spPr>
+        <p:txBody>
+          <a:bodyPr wrap="square" anchor="mid" lIns="73152" rIns="73152" tIns="73152" bIns="73152"/>
+          <a:lstStyle/>
+          <a:p>
+            <a:pPr algn="ctr">
+              <a:spcAft>
+                <a:spcPts val="0"/>
+              </a:spcAft>
+            </a:pPr>
+            <a:r>
+              <a:rPr lang="es-MX" sz="1100" b="1">
+                <a:solidFill>
+                  <a:srgbClr val="2B6CB0"/>
+                </a:solidFill>
+                <a:latin typeface="Aptos"/>
+              </a:rPr>
+              <a:t>1. Ingesta</a:t>
+            </a:r>
+            <a:endParaRPr lang="es-MX" sz="1100"/>
+          </a:p>
+          <a:p>
+            <a:pPr algn="ctr">
+              <a:spcAft>
+                <a:spcPts val="0"/>
+              </a:spcAft>
+            </a:pPr>
+            <a:r>
+              <a:rPr lang="es-MX" sz="780">
+                <a:solidFill>
+                  <a:srgbClr val="64748B"/>
+                </a:solidFill>
+                <a:latin typeface="Aptos"/>
+              </a:rPr>
+              <a:t>Contratos PDF + metadata</a:t>
+            </a:r>
+            <a:endParaRPr lang="es-MX" sz="780"/>
+          </a:p>
+        </p:txBody>
+      </p:sp>
+      <p:sp>
+        <p:nvSpPr>
+          <p:cNvPr id="12" name="Arrow"/>
+          <p:cNvSpPr/>
+          <p:nvPr/>
+        </p:nvSpPr>
+        <p:spPr>
+          <a:xfrm>
+            <a:off x="2724912" y="3657600"/>
+            <a:ext cx="320040" cy="164592"/>
+          </a:xfrm>
+          <a:prstGeom prst="rightArrow">
+            <a:avLst/>
+          </a:prstGeom>
+          <a:solidFill>
+            <a:srgbClr val="1FB6C9"/>
+          </a:solidFill>
+          <a:ln>
+            <a:noFill/>
+          </a:ln>
+        </p:spPr>
+        <p:txBody>
+          <a:bodyPr/>
+          <a:lstStyle/>
+          <a:p/>
+        </p:txBody>
+      </p:sp>
+      <p:sp>
+        <p:nvSpPr>
+          <p:cNvPr id="13" name="Text"/>
+          <p:cNvSpPr txBox="1"/>
+          <p:nvPr/>
+        </p:nvSpPr>
+        <p:spPr>
+          <a:xfrm>
+            <a:off x="3154680" y="3401568"/>
+            <a:ext cx="1965960" cy="658368"/>
+          </a:xfrm>
+          <a:prstGeom prst="roundRect">
+            <a:avLst/>
+          </a:prstGeom>
+          <a:solidFill>
+            <a:srgbClr val="FFFFFF"/>
+          </a:solidFill>
+          <a:ln w="10160">
+            <a:solidFill>
+              <a:srgbClr val="D7E3F0"/>
+            </a:solidFill>
+          </a:ln>
+        </p:spPr>
+        <p:txBody>
+          <a:bodyPr wrap="square" anchor="mid" lIns="73152" rIns="73152" tIns="73152" bIns="73152"/>
+          <a:lstStyle/>
+          <a:p>
+            <a:pPr algn="ctr">
+              <a:spcAft>
+                <a:spcPts val="0"/>
+              </a:spcAft>
+            </a:pPr>
+            <a:r>
+              <a:rPr lang="es-MX" sz="1100" b="1">
+                <a:solidFill>
+                  <a:srgbClr val="2B6CB0"/>
+                </a:solidFill>
+                <a:latin typeface="Aptos"/>
+              </a:rPr>
+              <a:t>2. Extracción</a:t>
+            </a:r>
+            <a:endParaRPr lang="es-MX" sz="1100"/>
+          </a:p>
+          <a:p>
+            <a:pPr algn="ctr">
+              <a:spcAft>
+                <a:spcPts val="0"/>
+              </a:spcAft>
+            </a:pPr>
+            <a:r>
+              <a:rPr lang="es-MX" sz="780">
+                <a:solidFill>
+                  <a:srgbClr val="64748B"/>
+                </a:solidFill>
+                <a:latin typeface="Aptos"/>
+              </a:rPr>
+              <a:t>OCR, parsing y cláusulas</a:t>
+            </a:r>
+            <a:endParaRPr lang="es-MX" sz="780"/>
+          </a:p>
+        </p:txBody>
+      </p:sp>
+      <p:sp>
+        <p:nvSpPr>
+          <p:cNvPr id="14" name="Arrow"/>
+          <p:cNvSpPr/>
+          <p:nvPr/>
+        </p:nvSpPr>
+        <p:spPr>
+          <a:xfrm>
+            <a:off x="5230368" y="3657600"/>
+            <a:ext cx="320040" cy="164592"/>
+          </a:xfrm>
+          <a:prstGeom prst="rightArrow">
+            <a:avLst/>
+          </a:prstGeom>
+          <a:solidFill>
+            <a:srgbClr val="1FB6C9"/>
+          </a:solidFill>
+          <a:ln>
+            <a:noFill/>
+          </a:ln>
+        </p:spPr>
+        <p:txBody>
+          <a:bodyPr/>
+          <a:lstStyle/>
+          <a:p/>
+        </p:txBody>
+      </p:sp>
+      <p:sp>
+        <p:nvSpPr>
+          <p:cNvPr id="15" name="Text"/>
+          <p:cNvSpPr txBox="1"/>
+          <p:nvPr/>
+        </p:nvSpPr>
+        <p:spPr>
+          <a:xfrm>
+            <a:off x="5650992" y="3401568"/>
+            <a:ext cx="1965960" cy="658368"/>
+          </a:xfrm>
+          <a:prstGeom prst="roundRect">
+            <a:avLst/>
+          </a:prstGeom>
+          <a:solidFill>
+            <a:srgbClr val="FFFFFF"/>
+          </a:solidFill>
+          <a:ln w="10160">
+            <a:solidFill>
+              <a:srgbClr val="D7E3F0"/>
+            </a:solidFill>
+          </a:ln>
+        </p:spPr>
+        <p:txBody>
+          <a:bodyPr wrap="square" anchor="mid" lIns="73152" rIns="73152" tIns="73152" bIns="73152"/>
+          <a:lstStyle/>
+          <a:p>
+            <a:pPr algn="ctr">
+              <a:spcAft>
+                <a:spcPts val="0"/>
+              </a:spcAft>
+            </a:pPr>
+            <a:r>
+              <a:rPr lang="es-MX" sz="1100" b="1">
+                <a:solidFill>
+                  <a:srgbClr val="2B6CB0"/>
+                </a:solidFill>
+                <a:latin typeface="Aptos"/>
+              </a:rPr>
+              <a:t>3. Análisis IA</a:t>
+            </a:r>
+            <a:endParaRPr lang="es-MX" sz="1100"/>
+          </a:p>
+          <a:p>
+            <a:pPr algn="ctr">
+              <a:spcAft>
+                <a:spcPts val="0"/>
+              </a:spcAft>
+            </a:pPr>
+            <a:r>
+              <a:rPr lang="es-MX" sz="780">
+                <a:solidFill>
+                  <a:srgbClr val="64748B"/>
+                </a:solidFill>
+                <a:latin typeface="Aptos"/>
+              </a:rPr>
+              <a:t>DeepSeek + scoring 0-10</a:t>
+            </a:r>
+            <a:endParaRPr lang="es-MX" sz="780"/>
+          </a:p>
+        </p:txBody>
+      </p:sp>
+      <p:sp>
+        <p:nvSpPr>
+          <p:cNvPr id="16" name="Arrow"/>
+          <p:cNvSpPr/>
+          <p:nvPr/>
+        </p:nvSpPr>
+        <p:spPr>
+          <a:xfrm>
+            <a:off x="7726680" y="3657600"/>
+            <a:ext cx="320040" cy="164592"/>
+          </a:xfrm>
+          <a:prstGeom prst="rightArrow">
+            <a:avLst/>
+          </a:prstGeom>
+          <a:solidFill>
+            <a:srgbClr val="1FB6C9"/>
+          </a:solidFill>
+          <a:ln>
+            <a:noFill/>
+          </a:ln>
+        </p:spPr>
+        <p:txBody>
+          <a:bodyPr/>
+          <a:lstStyle/>
+          <a:p/>
+        </p:txBody>
+      </p:sp>
+      <p:sp>
+        <p:nvSpPr>
+          <p:cNvPr id="17" name="Text"/>
+          <p:cNvSpPr txBox="1"/>
+          <p:nvPr/>
+        </p:nvSpPr>
+        <p:spPr>
+          <a:xfrm>
+            <a:off x="8138160" y="3401568"/>
+            <a:ext cx="2103120" cy="658368"/>
+          </a:xfrm>
+          <a:prstGeom prst="roundRect">
+            <a:avLst/>
+          </a:prstGeom>
+          <a:solidFill>
+            <a:srgbClr val="FFFFFF"/>
+          </a:solidFill>
+          <a:ln w="10160">
+            <a:solidFill>
+              <a:srgbClr val="D7E3F0"/>
+            </a:solidFill>
+          </a:ln>
+        </p:spPr>
+        <p:txBody>
+          <a:bodyPr wrap="square" anchor="mid" lIns="73152" rIns="73152" tIns="73152" bIns="73152"/>
+          <a:lstStyle/>
+          <a:p>
+            <a:pPr algn="ctr">
+              <a:spcAft>
+                <a:spcPts val="0"/>
+              </a:spcAft>
+            </a:pPr>
+            <a:r>
+              <a:rPr lang="es-MX" sz="1100" b="1">
+                <a:solidFill>
+                  <a:srgbClr val="2B6CB0"/>
+                </a:solidFill>
+                <a:latin typeface="Aptos"/>
+              </a:rPr>
+              <a:t>4. Gobierno</a:t>
+            </a:r>
+            <a:endParaRPr lang="es-MX" sz="1100"/>
+          </a:p>
+          <a:p>
+            <a:pPr algn="ctr">
+              <a:spcAft>
+                <a:spcPts val="0"/>
+              </a:spcAft>
+            </a:pPr>
+            <a:r>
+              <a:rPr lang="es-MX" sz="780">
+                <a:solidFill>
+                  <a:srgbClr val="64748B"/>
+                </a:solidFill>
+                <a:latin typeface="Aptos"/>
+              </a:rPr>
+              <a:t>DWS, DLI, DataArts</a:t>
+            </a:r>
+            <a:endParaRPr lang="es-MX" sz="780"/>
+          </a:p>
+        </p:txBody>
+      </p:sp>
+      <p:sp>
+        <p:nvSpPr>
+          <p:cNvPr id="18" name="Text"/>
+          <p:cNvSpPr txBox="1"/>
+          <p:nvPr/>
+        </p:nvSpPr>
+        <p:spPr>
+          <a:xfrm>
+            <a:off x="658368" y="4773168"/>
+            <a:ext cx="9326880" cy="594360"/>
+          </a:xfrm>
+          <a:prstGeom prst="roundRect">
+            <a:avLst/>
+          </a:prstGeom>
+          <a:solidFill>
+            <a:srgbClr val="08233F"/>
+          </a:solidFill>
+          <a:ln>
+            <a:noFill/>
+          </a:ln>
+        </p:spPr>
+        <p:txBody>
+          <a:bodyPr wrap="square" anchor="mid" lIns="73152" rIns="73152" tIns="73152" bIns="73152"/>
+          <a:lstStyle/>
+          <a:p>
+            <a:pPr algn="ctr">
+              <a:spcAft>
+                <a:spcPts val="0"/>
+              </a:spcAft>
+            </a:pPr>
+            <a:r>
+              <a:rPr lang="es-MX" sz="1300">
+                <a:solidFill>
+                  <a:srgbClr val="FFFFFF"/>
+                </a:solidFill>
+                <a:latin typeface="Aptos"/>
+              </a:rPr>
+              <a:t>Narrativa para la sesión: mostrar valor de negocio primero, después explicar cómo Huawei Cloud sostiene el flujo gobernado.</a:t>
+            </a:r>
+            <a:endParaRPr lang="es-MX" sz="1300"/>
+          </a:p>
+        </p:txBody>
+      </p:sp>
+      <p:sp>
+        <p:nvSpPr>
+          <p:cNvPr id="19" name="Footer"/>
+          <p:cNvSpPr txBox="1"/>
+          <p:nvPr/>
+        </p:nvSpPr>
+        <p:spPr>
+          <a:xfrm>
+            <a:off x="502920" y="6446520"/>
+            <a:ext cx="9875520" cy="228600"/>
           </a:xfrm>
           <a:prstGeom prst="rect">
             <a:avLst/>
           </a:prstGeom>
           <a:noFill/>
-        </p:spPr>
-        <p:txBody>
-          <a:bodyPr wrap="square">
-            <a:spAutoFit/>
-          </a:bodyPr>
+          <a:ln>
+            <a:noFill/>
+          </a:ln>
+        </p:spPr>
+        <p:txBody>
+          <a:bodyPr wrap="square" anchor="mid" lIns="73152" rIns="73152" tIns="73152" bIns="73152"/>
+          <a:lstStyle/>
+          <a:p>
+            <a:pPr algn="l">
+              <a:spcAft>
+                <a:spcPts val="0"/>
+              </a:spcAft>
+            </a:pPr>
+            <a:r>
+              <a:rPr lang="es-MX" sz="750">
+                <a:solidFill>
+                  <a:srgbClr val="64748B"/>
+                </a:solidFill>
+                <a:latin typeface="Aptos"/>
+              </a:rPr>
+              <a:t>Workshop Huawei Cloud x Salinas | Mayo 8, 2026 | México Century Plaza</a:t>
+            </a:r>
+            <a:endParaRPr lang="es-MX" sz="750"/>
+          </a:p>
+        </p:txBody>
+      </p:sp>
+      <p:sp>
+        <p:nvSpPr>
+          <p:cNvPr id="20" name="Page"/>
+          <p:cNvSpPr txBox="1"/>
+          <p:nvPr/>
+        </p:nvSpPr>
+        <p:spPr>
+          <a:xfrm>
+            <a:off x="11064240" y="6446520"/>
+            <a:ext cx="594360" cy="228600"/>
+          </a:xfrm>
+          <a:prstGeom prst="rect">
+            <a:avLst/>
+          </a:prstGeom>
+          <a:noFill/>
+          <a:ln>
+            <a:noFill/>
+          </a:ln>
+        </p:spPr>
+        <p:txBody>
+          <a:bodyPr wrap="square" anchor="mid" lIns="73152" rIns="73152" tIns="73152" bIns="73152"/>
           <a:lstStyle/>
           <a:p>
             <a:pPr algn="r">
-              <a:defRPr sz="900" b="0">
-                <a:solidFill>
-                  <a:srgbClr val="555555"/>
-                </a:solidFill>
-                <a:latin typeface="Calibri"/>
-              </a:defRPr>
-            </a:pPr>
-            <a:r>
+              <a:spcAft>
+                <a:spcPts val="0"/>
+              </a:spcAft>
+            </a:pPr>
+            <a:r>
+              <a:rPr lang="es-MX" sz="750">
+                <a:solidFill>
+                  <a:srgbClr val="64748B"/>
+                </a:solidFill>
+                <a:latin typeface="Aptos"/>
+              </a:rPr>
               <a:t>1 / 5</a:t>
             </a:r>
+            <a:endParaRPr lang="es-MX" sz="750"/>
           </a:p>
         </p:txBody>
       </p:sp>
@@ -3406,317 +3987,1069 @@
 </file>
 
 <file path=ppt/slides/slide2.xml><?xml version="1.0" encoding="utf-8"?>
-<p:sld xmlns:a="http://schemas.openxmlformats.org/drawingml/2006/main" xmlns:p="http://schemas.openxmlformats.org/presentationml/2006/main" xmlns:r="http://schemas.openxmlformats.org/officeDocument/2006/relationships">
+<p:sld xmlns:a="http://schemas.openxmlformats.org/drawingml/2006/main" xmlns:r="http://schemas.openxmlformats.org/officeDocument/2006/relationships" xmlns:p="http://schemas.openxmlformats.org/presentationml/2006/main">
   <p:cSld>
-    <p:bg>
-      <p:bgPr>
-        <a:solidFill>
-          <a:srgbClr val="0A0A0A"/>
-        </a:solidFill>
-        <a:effectLst/>
-      </p:bgPr>
-    </p:bg>
     <p:spTree>
       <p:nvGrpSpPr>
         <p:cNvPr id="1" name=""/>
         <p:cNvGrpSpPr/>
         <p:nvPr/>
       </p:nvGrpSpPr>
-      <p:grpSpPr/>
-      <p:sp>
-        <p:nvSpPr>
-          <p:cNvPr id="2" name="Rectangle 1"/>
+      <p:grpSpPr>
+        <a:xfrm>
+          <a:off x="0" y="0"/>
+          <a:ext cx="12192000" cy="6858000"/>
+          <a:chOff x="0" y="0"/>
+          <a:chExt cx="12192000" cy="6858000"/>
+        </a:xfrm>
+      </p:grpSpPr>
+      <p:sp>
+        <p:nvSpPr>
+          <p:cNvPr id="2" name="Block"/>
           <p:cNvSpPr/>
           <p:nvPr/>
         </p:nvSpPr>
         <p:spPr>
           <a:xfrm>
             <a:off x="0" y="0"/>
-            <a:ext cx="12191695" cy="54864"/>
+            <a:ext cx="12191695" cy="6858000"/>
           </a:xfrm>
           <a:prstGeom prst="rect">
             <a:avLst/>
           </a:prstGeom>
           <a:solidFill>
-            <a:srgbClr val="E4002B"/>
+            <a:srgbClr val="F7FAFC"/>
           </a:solidFill>
           <a:ln>
             <a:noFill/>
           </a:ln>
         </p:spPr>
-        <p:style>
-          <a:lnRef idx="1">
-            <a:schemeClr val="accent1"/>
-          </a:lnRef>
-          <a:fillRef idx="3">
-            <a:schemeClr val="accent1"/>
-          </a:fillRef>
-          <a:effectRef idx="2">
-            <a:schemeClr val="accent1"/>
-          </a:effectRef>
-          <a:fontRef idx="minor">
-            <a:schemeClr val="lt1"/>
-          </a:fontRef>
-        </p:style>
-        <p:txBody>
-          <a:bodyPr rtlCol="0" anchor="ctr"/>
-          <a:lstStyle/>
-          <a:p>
-            <a:pPr algn="ctr"/>
-          </a:p>
-        </p:txBody>
-      </p:sp>
-      <p:sp>
-        <p:nvSpPr>
-          <p:cNvPr id="3" name="TextBox 2"/>
-          <p:cNvSpPr txBox="1"/>
-          <p:nvPr/>
-        </p:nvSpPr>
-        <p:spPr>
-          <a:xfrm>
-            <a:off x="457200" y="274320"/>
-            <a:ext cx="9144000" cy="548640"/>
+        <p:txBody>
+          <a:bodyPr/>
+          <a:lstStyle/>
+          <a:p/>
+        </p:txBody>
+      </p:sp>
+      <p:sp>
+        <p:nvSpPr>
+          <p:cNvPr id="3" name="Block"/>
+          <p:cNvSpPr/>
+          <p:nvPr/>
+        </p:nvSpPr>
+        <p:spPr>
+          <a:xfrm>
+            <a:off x="0" y="0"/>
+            <a:ext cx="201168" cy="6858000"/>
           </a:xfrm>
           <a:prstGeom prst="rect">
             <a:avLst/>
           </a:prstGeom>
-          <a:noFill/>
-        </p:spPr>
-        <p:txBody>
-          <a:bodyPr wrap="square">
-            <a:spAutoFit/>
-          </a:bodyPr>
-          <a:lstStyle/>
-          <a:p>
-            <a:pPr algn="l">
-              <a:defRPr sz="2800" b="1">
-                <a:solidFill>
-                  <a:srgbClr val="FFFFFF"/>
-                </a:solidFill>
-                <a:latin typeface="Calibri"/>
-              </a:defRPr>
-            </a:pPr>
-            <a:r>
-              <a:t>Pipeline: Contract → Risk → Dashboard</a:t>
-            </a:r>
-          </a:p>
-        </p:txBody>
-      </p:sp>
-      <p:sp>
-        <p:nvSpPr>
-          <p:cNvPr id="4" name="TextBox 3"/>
-          <p:cNvSpPr txBox="1"/>
-          <p:nvPr/>
-        </p:nvSpPr>
-        <p:spPr>
-          <a:xfrm>
-            <a:off x="457200" y="822960"/>
-            <a:ext cx="9144000" cy="365760"/>
-          </a:xfrm>
-          <a:prstGeom prst="rect">
-            <a:avLst/>
-          </a:prstGeom>
-          <a:noFill/>
-        </p:spPr>
-        <p:txBody>
-          <a:bodyPr wrap="square">
-            <a:spAutoFit/>
-          </a:bodyPr>
-          <a:lstStyle/>
-          <a:p>
-            <a:pPr algn="l">
-              <a:defRPr sz="1400" b="0">
-                <a:solidFill>
-                  <a:srgbClr val="34D399"/>
-                </a:solidFill>
-                <a:latin typeface="Calibri"/>
-              </a:defRPr>
-            </a:pPr>
-            <a:r>
-              <a:t>De 2 semanas de análisis manual → 8 minutos automáticos con alertas CNBV</a:t>
-            </a:r>
-          </a:p>
-        </p:txBody>
-      </p:sp>
-      <p:sp>
-        <p:nvSpPr>
-          <p:cNvPr id="5" name="Rectangle 4"/>
-          <p:cNvSpPr/>
-          <p:nvPr/>
-        </p:nvSpPr>
-        <p:spPr>
-          <a:xfrm>
-            <a:off x="457200" y="1188720"/>
-            <a:ext cx="2286000" cy="36576"/>
-          </a:xfrm>
-          <a:prstGeom prst="rect">
-            <a:avLst/>
-          </a:prstGeom>
-          <a:solidFill>
-            <a:srgbClr val="34D399"/>
+          <a:solidFill>
+            <a:srgbClr val="2B6CB0"/>
           </a:solidFill>
           <a:ln>
             <a:noFill/>
           </a:ln>
         </p:spPr>
-        <p:style>
-          <a:lnRef idx="1">
-            <a:schemeClr val="accent1"/>
-          </a:lnRef>
-          <a:fillRef idx="3">
-            <a:schemeClr val="accent1"/>
-          </a:fillRef>
-          <a:effectRef idx="2">
-            <a:schemeClr val="accent1"/>
-          </a:effectRef>
-          <a:fontRef idx="minor">
-            <a:schemeClr val="lt1"/>
-          </a:fontRef>
-        </p:style>
-        <p:txBody>
-          <a:bodyPr rtlCol="0" anchor="ctr"/>
-          <a:lstStyle/>
-          <a:p>
-            <a:pPr algn="ctr"/>
-          </a:p>
-        </p:txBody>
-      </p:sp>
-      <p:pic>
-        <p:nvPicPr>
-          <p:cNvPr id="6" name="Picture 5" descr="ayco-pipeline-diagram.png"/>
-          <p:cNvPicPr>
-            <a:picLocks noChangeAspect="1"/>
-          </p:cNvPicPr>
-          <p:nvPr/>
-        </p:nvPicPr>
-        <p:blipFill>
-          <a:blip r:embed="rId2"/>
-          <a:stretch>
-            <a:fillRect/>
-          </a:stretch>
-        </p:blipFill>
-        <p:spPr>
-          <a:xfrm>
-            <a:off x="457200" y="1371600"/>
-            <a:ext cx="11277295" cy="4846320"/>
+        <p:txBody>
+          <a:bodyPr/>
+          <a:lstStyle/>
+          <a:p/>
+        </p:txBody>
+      </p:sp>
+      <p:sp>
+        <p:nvSpPr>
+          <p:cNvPr id="4" name="Kicker"/>
+          <p:cNvSpPr txBox="1"/>
+          <p:nvPr/>
+        </p:nvSpPr>
+        <p:spPr>
+          <a:xfrm>
+            <a:off x="502920" y="256032"/>
+            <a:ext cx="4572000" cy="256032"/>
           </a:xfrm>
           <a:prstGeom prst="rect">
             <a:avLst/>
           </a:prstGeom>
-        </p:spPr>
-      </p:pic>
-      <p:sp>
-        <p:nvSpPr>
-          <p:cNvPr id="7" name="Rectangle 6"/>
-          <p:cNvSpPr/>
-          <p:nvPr/>
-        </p:nvSpPr>
-        <p:spPr>
-          <a:xfrm>
-            <a:off x="0" y="6492240"/>
-            <a:ext cx="12191695" cy="54864"/>
-          </a:xfrm>
-          <a:prstGeom prst="rect">
-            <a:avLst/>
-          </a:prstGeom>
-          <a:solidFill>
-            <a:srgbClr val="1A1A1A"/>
-          </a:solidFill>
+          <a:noFill/>
           <a:ln>
             <a:noFill/>
           </a:ln>
         </p:spPr>
-        <p:style>
-          <a:lnRef idx="1">
-            <a:schemeClr val="accent1"/>
-          </a:lnRef>
-          <a:fillRef idx="3">
-            <a:schemeClr val="accent1"/>
-          </a:fillRef>
-          <a:effectRef idx="2">
-            <a:schemeClr val="accent1"/>
-          </a:effectRef>
-          <a:fontRef idx="minor">
-            <a:schemeClr val="lt1"/>
-          </a:fontRef>
-        </p:style>
-        <p:txBody>
-          <a:bodyPr rtlCol="0" anchor="ctr"/>
-          <a:lstStyle/>
-          <a:p>
-            <a:pPr algn="ctr"/>
-          </a:p>
-        </p:txBody>
-      </p:sp>
-      <p:sp>
-        <p:nvSpPr>
-          <p:cNvPr id="8" name="TextBox 7"/>
+        <p:txBody>
+          <a:bodyPr wrap="square" anchor="mid" lIns="73152" rIns="73152" tIns="73152" bIns="73152"/>
+          <a:lstStyle/>
+          <a:p>
+            <a:pPr algn="l">
+              <a:spcAft>
+                <a:spcPts val="0"/>
+              </a:spcAft>
+            </a:pPr>
+            <a:r>
+              <a:rPr lang="es-MX" sz="850" b="1">
+                <a:solidFill>
+                  <a:srgbClr val="1FB6C9"/>
+                </a:solidFill>
+                <a:latin typeface="Aptos"/>
+              </a:rPr>
+              <a:t>ARQUITECTURA EJECUTABLE EN LA-NORTH-2</a:t>
+            </a:r>
+            <a:endParaRPr lang="es-MX" sz="850"/>
+          </a:p>
+        </p:txBody>
+      </p:sp>
+      <p:sp>
+        <p:nvSpPr>
+          <p:cNvPr id="5" name="Title"/>
           <p:cNvSpPr txBox="1"/>
           <p:nvPr/>
         </p:nvSpPr>
         <p:spPr>
           <a:xfrm>
-            <a:off x="457200" y="6510528"/>
-            <a:ext cx="11277295" cy="320040"/>
+            <a:off x="502920" y="502920"/>
+            <a:ext cx="7955280" cy="566928"/>
           </a:xfrm>
           <a:prstGeom prst="rect">
             <a:avLst/>
           </a:prstGeom>
           <a:noFill/>
-        </p:spPr>
-        <p:txBody>
-          <a:bodyPr wrap="square">
-            <a:spAutoFit/>
-          </a:bodyPr>
+          <a:ln>
+            <a:noFill/>
+          </a:ln>
+        </p:spPr>
+        <p:txBody>
+          <a:bodyPr wrap="square" anchor="mid" lIns="73152" rIns="73152" tIns="73152" bIns="73152"/>
+          <a:lstStyle/>
+          <a:p>
+            <a:pPr algn="l">
+              <a:spcAft>
+                <a:spcPts val="0"/>
+              </a:spcAft>
+            </a:pPr>
+            <a:r>
+              <a:rPr lang="es-MX" sz="2500" b="1">
+                <a:solidFill>
+                  <a:srgbClr val="0B1728"/>
+                </a:solidFill>
+                <a:latin typeface="Aptos"/>
+              </a:rPr>
+              <a:t>Ruta del demo en vivo</a:t>
+            </a:r>
+            <a:endParaRPr lang="es-MX" sz="2500"/>
+          </a:p>
+        </p:txBody>
+      </p:sp>
+      <p:sp>
+        <p:nvSpPr>
+          <p:cNvPr id="6" name="Contratos"/>
+          <p:cNvSpPr txBox="1"/>
+          <p:nvPr/>
+        </p:nvSpPr>
+        <p:spPr>
+          <a:xfrm>
+            <a:off x="502920" y="1828800"/>
+            <a:ext cx="1225296" cy="960120"/>
+          </a:xfrm>
+          <a:prstGeom prst="roundRect">
+            <a:avLst/>
+          </a:prstGeom>
+          <a:solidFill>
+            <a:srgbClr val="FFFFFF"/>
+          </a:solidFill>
+          <a:ln w="10160">
+            <a:solidFill>
+              <a:srgbClr val="D7E3F0"/>
+            </a:solidFill>
+          </a:ln>
+        </p:spPr>
+        <p:txBody>
+          <a:bodyPr wrap="square" anchor="mid" lIns="73152" rIns="73152" tIns="73152" bIns="73152"/>
           <a:lstStyle/>
           <a:p>
             <a:pPr algn="ctr">
-              <a:defRPr sz="900" b="0">
-                <a:solidFill>
-                  <a:srgbClr val="999999"/>
-                </a:solidFill>
-                <a:latin typeface="Calibri"/>
-              </a:defRPr>
-            </a:pPr>
-            <a:r>
-              <a:t>Workshop Huawei Cloud × Salinas  |  Mayo 8, 2026  |  México Century Plaza</a:t>
-            </a:r>
-          </a:p>
-        </p:txBody>
-      </p:sp>
-      <p:sp>
-        <p:nvSpPr>
-          <p:cNvPr id="9" name="TextBox 8"/>
+              <a:spcAft>
+                <a:spcPts val="0"/>
+              </a:spcAft>
+            </a:pPr>
+            <a:r>
+              <a:rPr lang="es-MX" sz="1200" b="1">
+                <a:solidFill>
+                  <a:srgbClr val="2B6CB0"/>
+                </a:solidFill>
+                <a:latin typeface="Aptos"/>
+              </a:rPr>
+              <a:t>Contratos</a:t>
+            </a:r>
+            <a:endParaRPr lang="es-MX" sz="1200"/>
+          </a:p>
+          <a:p>
+            <a:pPr algn="ctr">
+              <a:spcAft>
+                <a:spcPts val="0"/>
+              </a:spcAft>
+            </a:pPr>
+            <a:r>
+              <a:rPr lang="es-MX" sz="780">
+                <a:solidFill>
+                  <a:srgbClr val="64748B"/>
+                </a:solidFill>
+                <a:latin typeface="Aptos"/>
+              </a:rPr>
+              <a:t>20 PDFs
++ metadata</a:t>
+            </a:r>
+            <a:endParaRPr lang="es-MX" sz="780"/>
+          </a:p>
+        </p:txBody>
+      </p:sp>
+      <p:sp>
+        <p:nvSpPr>
+          <p:cNvPr id="7" name="Arrow"/>
+          <p:cNvSpPr/>
+          <p:nvPr/>
+        </p:nvSpPr>
+        <p:spPr>
+          <a:xfrm>
+            <a:off x="1764792" y="2221992"/>
+            <a:ext cx="219456" cy="164592"/>
+          </a:xfrm>
+          <a:prstGeom prst="rightArrow">
+            <a:avLst/>
+          </a:prstGeom>
+          <a:solidFill>
+            <a:srgbClr val="1FB6C9"/>
+          </a:solidFill>
+          <a:ln>
+            <a:noFill/>
+          </a:ln>
+        </p:spPr>
+        <p:txBody>
+          <a:bodyPr/>
+          <a:lstStyle/>
+          <a:p/>
+        </p:txBody>
+      </p:sp>
+      <p:sp>
+        <p:nvSpPr>
+          <p:cNvPr id="8" name="OBS"/>
           <p:cNvSpPr txBox="1"/>
           <p:nvPr/>
         </p:nvSpPr>
         <p:spPr>
           <a:xfrm>
-            <a:off x="11094415" y="6510528"/>
-            <a:ext cx="731520" cy="320040"/>
+            <a:off x="1993392" y="1828800"/>
+            <a:ext cx="1225296" cy="960120"/>
+          </a:xfrm>
+          <a:prstGeom prst="roundRect">
+            <a:avLst/>
+          </a:prstGeom>
+          <a:solidFill>
+            <a:srgbClr val="FFFFFF"/>
+          </a:solidFill>
+          <a:ln w="10160">
+            <a:solidFill>
+              <a:srgbClr val="D7E3F0"/>
+            </a:solidFill>
+          </a:ln>
+        </p:spPr>
+        <p:txBody>
+          <a:bodyPr wrap="square" anchor="mid" lIns="73152" rIns="73152" tIns="73152" bIns="73152"/>
+          <a:lstStyle/>
+          <a:p>
+            <a:pPr algn="ctr">
+              <a:spcAft>
+                <a:spcPts val="0"/>
+              </a:spcAft>
+            </a:pPr>
+            <a:r>
+              <a:rPr lang="es-MX" sz="1200" b="1">
+                <a:solidFill>
+                  <a:srgbClr val="2B6CB0"/>
+                </a:solidFill>
+                <a:latin typeface="Aptos"/>
+              </a:rPr>
+              <a:t>OBS</a:t>
+            </a:r>
+            <a:endParaRPr lang="es-MX" sz="1200"/>
+          </a:p>
+          <a:p>
+            <a:pPr algn="ctr">
+              <a:spcAft>
+                <a:spcPts val="0"/>
+              </a:spcAft>
+            </a:pPr>
+            <a:r>
+              <a:rPr lang="es-MX" sz="780">
+                <a:solidFill>
+                  <a:srgbClr val="64748B"/>
+                </a:solidFill>
+                <a:latin typeface="Aptos"/>
+              </a:rPr>
+              <a:t>raw / processed
+/ results</a:t>
+            </a:r>
+            <a:endParaRPr lang="es-MX" sz="780"/>
+          </a:p>
+        </p:txBody>
+      </p:sp>
+      <p:sp>
+        <p:nvSpPr>
+          <p:cNvPr id="9" name="Arrow"/>
+          <p:cNvSpPr/>
+          <p:nvPr/>
+        </p:nvSpPr>
+        <p:spPr>
+          <a:xfrm>
+            <a:off x="3255264" y="2221992"/>
+            <a:ext cx="219456" cy="164592"/>
+          </a:xfrm>
+          <a:prstGeom prst="rightArrow">
+            <a:avLst/>
+          </a:prstGeom>
+          <a:solidFill>
+            <a:srgbClr val="1FB6C9"/>
+          </a:solidFill>
+          <a:ln>
+            <a:noFill/>
+          </a:ln>
+        </p:spPr>
+        <p:txBody>
+          <a:bodyPr/>
+          <a:lstStyle/>
+          <a:p/>
+        </p:txBody>
+      </p:sp>
+      <p:sp>
+        <p:nvSpPr>
+          <p:cNvPr id="10" name="FunctionGraph"/>
+          <p:cNvSpPr txBox="1"/>
+          <p:nvPr/>
+        </p:nvSpPr>
+        <p:spPr>
+          <a:xfrm>
+            <a:off x="3493008" y="1828800"/>
+            <a:ext cx="1225296" cy="960120"/>
+          </a:xfrm>
+          <a:prstGeom prst="roundRect">
+            <a:avLst/>
+          </a:prstGeom>
+          <a:solidFill>
+            <a:srgbClr val="FFFFFF"/>
+          </a:solidFill>
+          <a:ln w="10160">
+            <a:solidFill>
+              <a:srgbClr val="D7E3F0"/>
+            </a:solidFill>
+          </a:ln>
+        </p:spPr>
+        <p:txBody>
+          <a:bodyPr wrap="square" anchor="mid" lIns="73152" rIns="73152" tIns="73152" bIns="73152"/>
+          <a:lstStyle/>
+          <a:p>
+            <a:pPr algn="ctr">
+              <a:spcAft>
+                <a:spcPts val="0"/>
+              </a:spcAft>
+            </a:pPr>
+            <a:r>
+              <a:rPr lang="es-MX" sz="1200" b="1">
+                <a:solidFill>
+                  <a:srgbClr val="2B6CB0"/>
+                </a:solidFill>
+                <a:latin typeface="Aptos"/>
+              </a:rPr>
+              <a:t>FunctionGraph</a:t>
+            </a:r>
+            <a:endParaRPr lang="es-MX" sz="1200"/>
+          </a:p>
+          <a:p>
+            <a:pPr algn="ctr">
+              <a:spcAft>
+                <a:spcPts val="0"/>
+              </a:spcAft>
+            </a:pPr>
+            <a:r>
+              <a:rPr lang="es-MX" sz="780">
+                <a:solidFill>
+                  <a:srgbClr val="64748B"/>
+                </a:solidFill>
+                <a:latin typeface="Aptos"/>
+              </a:rPr>
+              <a:t>OCR, parse,
+LLM inference</a:t>
+            </a:r>
+            <a:endParaRPr lang="es-MX" sz="780"/>
+          </a:p>
+        </p:txBody>
+      </p:sp>
+      <p:sp>
+        <p:nvSpPr>
+          <p:cNvPr id="11" name="Arrow"/>
+          <p:cNvSpPr/>
+          <p:nvPr/>
+        </p:nvSpPr>
+        <p:spPr>
+          <a:xfrm>
+            <a:off x="4754880" y="2221992"/>
+            <a:ext cx="219456" cy="164592"/>
+          </a:xfrm>
+          <a:prstGeom prst="rightArrow">
+            <a:avLst/>
+          </a:prstGeom>
+          <a:solidFill>
+            <a:srgbClr val="1FB6C9"/>
+          </a:solidFill>
+          <a:ln>
+            <a:noFill/>
+          </a:ln>
+        </p:spPr>
+        <p:txBody>
+          <a:bodyPr/>
+          <a:lstStyle/>
+          <a:p/>
+        </p:txBody>
+      </p:sp>
+      <p:sp>
+        <p:nvSpPr>
+          <p:cNvPr id="12" name="DeepSeek"/>
+          <p:cNvSpPr txBox="1"/>
+          <p:nvPr/>
+        </p:nvSpPr>
+        <p:spPr>
+          <a:xfrm>
+            <a:off x="4992624" y="1828800"/>
+            <a:ext cx="1225296" cy="960120"/>
+          </a:xfrm>
+          <a:prstGeom prst="roundRect">
+            <a:avLst/>
+          </a:prstGeom>
+          <a:solidFill>
+            <a:srgbClr val="FFFFFF"/>
+          </a:solidFill>
+          <a:ln w="10160">
+            <a:solidFill>
+              <a:srgbClr val="D7E3F0"/>
+            </a:solidFill>
+          </a:ln>
+        </p:spPr>
+        <p:txBody>
+          <a:bodyPr wrap="square" anchor="mid" lIns="73152" rIns="73152" tIns="73152" bIns="73152"/>
+          <a:lstStyle/>
+          <a:p>
+            <a:pPr algn="ctr">
+              <a:spcAft>
+                <a:spcPts val="0"/>
+              </a:spcAft>
+            </a:pPr>
+            <a:r>
+              <a:rPr lang="es-MX" sz="1200" b="1">
+                <a:solidFill>
+                  <a:srgbClr val="2B6CB0"/>
+                </a:solidFill>
+                <a:latin typeface="Aptos"/>
+              </a:rPr>
+              <a:t>DeepSeek</a:t>
+            </a:r>
+            <a:endParaRPr lang="es-MX" sz="1200"/>
+          </a:p>
+          <a:p>
+            <a:pPr algn="ctr">
+              <a:spcAft>
+                <a:spcPts val="0"/>
+              </a:spcAft>
+            </a:pPr>
+            <a:r>
+              <a:rPr lang="es-MX" sz="780">
+                <a:solidFill>
+                  <a:srgbClr val="64748B"/>
+                </a:solidFill>
+                <a:latin typeface="Aptos"/>
+              </a:rPr>
+              <a:t>riesgo y
+razones</a:t>
+            </a:r>
+            <a:endParaRPr lang="es-MX" sz="780"/>
+          </a:p>
+        </p:txBody>
+      </p:sp>
+      <p:sp>
+        <p:nvSpPr>
+          <p:cNvPr id="13" name="Arrow"/>
+          <p:cNvSpPr/>
+          <p:nvPr/>
+        </p:nvSpPr>
+        <p:spPr>
+          <a:xfrm>
+            <a:off x="6254496" y="2221992"/>
+            <a:ext cx="219456" cy="164592"/>
+          </a:xfrm>
+          <a:prstGeom prst="rightArrow">
+            <a:avLst/>
+          </a:prstGeom>
+          <a:solidFill>
+            <a:srgbClr val="1FB6C9"/>
+          </a:solidFill>
+          <a:ln>
+            <a:noFill/>
+          </a:ln>
+        </p:spPr>
+        <p:txBody>
+          <a:bodyPr/>
+          <a:lstStyle/>
+          <a:p/>
+        </p:txBody>
+      </p:sp>
+      <p:sp>
+        <p:nvSpPr>
+          <p:cNvPr id="14" name="DWS + DLI"/>
+          <p:cNvSpPr txBox="1"/>
+          <p:nvPr/>
+        </p:nvSpPr>
+        <p:spPr>
+          <a:xfrm>
+            <a:off x="6492240" y="1828800"/>
+            <a:ext cx="1225296" cy="960120"/>
+          </a:xfrm>
+          <a:prstGeom prst="roundRect">
+            <a:avLst/>
+          </a:prstGeom>
+          <a:solidFill>
+            <a:srgbClr val="FFFFFF"/>
+          </a:solidFill>
+          <a:ln w="10160">
+            <a:solidFill>
+              <a:srgbClr val="D7E3F0"/>
+            </a:solidFill>
+          </a:ln>
+        </p:spPr>
+        <p:txBody>
+          <a:bodyPr wrap="square" anchor="mid" lIns="73152" rIns="73152" tIns="73152" bIns="73152"/>
+          <a:lstStyle/>
+          <a:p>
+            <a:pPr algn="ctr">
+              <a:spcAft>
+                <a:spcPts val="0"/>
+              </a:spcAft>
+            </a:pPr>
+            <a:r>
+              <a:rPr lang="es-MX" sz="1200" b="1">
+                <a:solidFill>
+                  <a:srgbClr val="2B6CB0"/>
+                </a:solidFill>
+                <a:latin typeface="Aptos"/>
+              </a:rPr>
+              <a:t>DWS + DLI</a:t>
+            </a:r>
+            <a:endParaRPr lang="es-MX" sz="1200"/>
+          </a:p>
+          <a:p>
+            <a:pPr algn="ctr">
+              <a:spcAft>
+                <a:spcPts val="0"/>
+              </a:spcAft>
+            </a:pPr>
+            <a:r>
+              <a:rPr lang="es-MX" sz="780">
+                <a:solidFill>
+                  <a:srgbClr val="64748B"/>
+                </a:solidFill>
+                <a:latin typeface="Aptos"/>
+              </a:rPr>
+              <a:t>tablas, SQL,
+analytics</a:t>
+            </a:r>
+            <a:endParaRPr lang="es-MX" sz="780"/>
+          </a:p>
+        </p:txBody>
+      </p:sp>
+      <p:sp>
+        <p:nvSpPr>
+          <p:cNvPr id="15" name="Arrow"/>
+          <p:cNvSpPr/>
+          <p:nvPr/>
+        </p:nvSpPr>
+        <p:spPr>
+          <a:xfrm>
+            <a:off x="7754112" y="2221992"/>
+            <a:ext cx="219456" cy="164592"/>
+          </a:xfrm>
+          <a:prstGeom prst="rightArrow">
+            <a:avLst/>
+          </a:prstGeom>
+          <a:solidFill>
+            <a:srgbClr val="1FB6C9"/>
+          </a:solidFill>
+          <a:ln>
+            <a:noFill/>
+          </a:ln>
+        </p:spPr>
+        <p:txBody>
+          <a:bodyPr/>
+          <a:lstStyle/>
+          <a:p/>
+        </p:txBody>
+      </p:sp>
+      <p:sp>
+        <p:nvSpPr>
+          <p:cNvPr id="16" name="DataArts"/>
+          <p:cNvSpPr txBox="1"/>
+          <p:nvPr/>
+        </p:nvSpPr>
+        <p:spPr>
+          <a:xfrm>
+            <a:off x="7991856" y="1828800"/>
+            <a:ext cx="1225296" cy="960120"/>
+          </a:xfrm>
+          <a:prstGeom prst="roundRect">
+            <a:avLst/>
+          </a:prstGeom>
+          <a:solidFill>
+            <a:srgbClr val="FFFFFF"/>
+          </a:solidFill>
+          <a:ln w="10160">
+            <a:solidFill>
+              <a:srgbClr val="D7E3F0"/>
+            </a:solidFill>
+          </a:ln>
+        </p:spPr>
+        <p:txBody>
+          <a:bodyPr wrap="square" anchor="mid" lIns="73152" rIns="73152" tIns="73152" bIns="73152"/>
+          <a:lstStyle/>
+          <a:p>
+            <a:pPr algn="ctr">
+              <a:spcAft>
+                <a:spcPts val="0"/>
+              </a:spcAft>
+            </a:pPr>
+            <a:r>
+              <a:rPr lang="es-MX" sz="1200" b="1">
+                <a:solidFill>
+                  <a:srgbClr val="22A06B"/>
+                </a:solidFill>
+                <a:latin typeface="Aptos"/>
+              </a:rPr>
+              <a:t>DataArts</a:t>
+            </a:r>
+            <a:endParaRPr lang="es-MX" sz="1200"/>
+          </a:p>
+          <a:p>
+            <a:pPr algn="ctr">
+              <a:spcAft>
+                <a:spcPts val="0"/>
+              </a:spcAft>
+            </a:pPr>
+            <a:r>
+              <a:rPr lang="es-MX" sz="780">
+                <a:solidFill>
+                  <a:srgbClr val="64748B"/>
+                </a:solidFill>
+                <a:latin typeface="Aptos"/>
+              </a:rPr>
+              <a:t>catálogo, linaje,
+políticas</a:t>
+            </a:r>
+            <a:endParaRPr lang="es-MX" sz="780"/>
+          </a:p>
+        </p:txBody>
+      </p:sp>
+      <p:sp>
+        <p:nvSpPr>
+          <p:cNvPr id="17" name="Arrow"/>
+          <p:cNvSpPr/>
+          <p:nvPr/>
+        </p:nvSpPr>
+        <p:spPr>
+          <a:xfrm>
+            <a:off x="9253728" y="2221992"/>
+            <a:ext cx="219456" cy="164592"/>
+          </a:xfrm>
+          <a:prstGeom prst="rightArrow">
+            <a:avLst/>
+          </a:prstGeom>
+          <a:solidFill>
+            <a:srgbClr val="1FB6C9"/>
+          </a:solidFill>
+          <a:ln>
+            <a:noFill/>
+          </a:ln>
+        </p:spPr>
+        <p:txBody>
+          <a:bodyPr/>
+          <a:lstStyle/>
+          <a:p/>
+        </p:txBody>
+      </p:sp>
+      <p:sp>
+        <p:nvSpPr>
+          <p:cNvPr id="18" name="Dify + Web"/>
+          <p:cNvSpPr txBox="1"/>
+          <p:nvPr/>
+        </p:nvSpPr>
+        <p:spPr>
+          <a:xfrm>
+            <a:off x="9491472" y="1828800"/>
+            <a:ext cx="1225296" cy="960120"/>
+          </a:xfrm>
+          <a:prstGeom prst="roundRect">
+            <a:avLst/>
+          </a:prstGeom>
+          <a:solidFill>
+            <a:srgbClr val="FFFFFF"/>
+          </a:solidFill>
+          <a:ln w="10160">
+            <a:solidFill>
+              <a:srgbClr val="D7E3F0"/>
+            </a:solidFill>
+          </a:ln>
+        </p:spPr>
+        <p:txBody>
+          <a:bodyPr wrap="square" anchor="mid" lIns="73152" rIns="73152" tIns="73152" bIns="73152"/>
+          <a:lstStyle/>
+          <a:p>
+            <a:pPr algn="ctr">
+              <a:spcAft>
+                <a:spcPts val="0"/>
+              </a:spcAft>
+            </a:pPr>
+            <a:r>
+              <a:rPr lang="es-MX" sz="1200" b="1">
+                <a:solidFill>
+                  <a:srgbClr val="22A06B"/>
+                </a:solidFill>
+                <a:latin typeface="Aptos"/>
+              </a:rPr>
+              <a:t>Dify + Web</a:t>
+            </a:r>
+            <a:endParaRPr lang="es-MX" sz="1200"/>
+          </a:p>
+          <a:p>
+            <a:pPr algn="ctr">
+              <a:spcAft>
+                <a:spcPts val="0"/>
+              </a:spcAft>
+            </a:pPr>
+            <a:r>
+              <a:rPr lang="es-MX" sz="780">
+                <a:solidFill>
+                  <a:srgbClr val="64748B"/>
+                </a:solidFill>
+                <a:latin typeface="Aptos"/>
+              </a:rPr>
+              <a:t>chatbot y
+tablero</a:t>
+            </a:r>
+            <a:endParaRPr lang="es-MX" sz="780"/>
+          </a:p>
+        </p:txBody>
+      </p:sp>
+      <p:sp>
+        <p:nvSpPr>
+          <p:cNvPr id="19" name="Text"/>
+          <p:cNvSpPr txBox="1"/>
+          <p:nvPr/>
+        </p:nvSpPr>
+        <p:spPr>
+          <a:xfrm>
+            <a:off x="658368" y="3310128"/>
+            <a:ext cx="2926080" cy="914400"/>
+          </a:xfrm>
+          <a:prstGeom prst="roundRect">
+            <a:avLst/>
+          </a:prstGeom>
+          <a:solidFill>
+            <a:srgbClr val="08233F"/>
+          </a:solidFill>
+          <a:ln>
+            <a:noFill/>
+          </a:ln>
+        </p:spPr>
+        <p:txBody>
+          <a:bodyPr wrap="square" anchor="top" lIns="73152" rIns="73152" tIns="73152" bIns="73152"/>
+          <a:lstStyle/>
+          <a:p>
+            <a:pPr algn="l">
+              <a:spcAft>
+                <a:spcPts val="0"/>
+              </a:spcAft>
+            </a:pPr>
+            <a:r>
+              <a:rPr lang="es-MX" sz="1200" b="1">
+                <a:solidFill>
+                  <a:srgbClr val="FFFFFF"/>
+                </a:solidFill>
+                <a:latin typeface="Aptos"/>
+              </a:rPr>
+              <a:t>Demo path</a:t>
+            </a:r>
+            <a:endParaRPr lang="es-MX" sz="1200"/>
+          </a:p>
+          <a:p>
+            <a:pPr algn="l">
+              <a:spcAft>
+                <a:spcPts val="0"/>
+              </a:spcAft>
+            </a:pPr>
+            <a:r>
+              <a:rPr lang="es-MX" sz="860">
+                <a:solidFill>
+                  <a:srgbClr val="FFFFFF"/>
+                </a:solidFill>
+                <a:latin typeface="Aptos"/>
+              </a:rPr>
+              <a:t>Upload -&gt; processing logs -&gt; DWS query -&gt; DataArts lineage -&gt; Dify Q&amp;A -&gt; Streamlit KPIs</a:t>
+            </a:r>
+            <a:endParaRPr lang="es-MX" sz="860"/>
+          </a:p>
+        </p:txBody>
+      </p:sp>
+      <p:sp>
+        <p:nvSpPr>
+          <p:cNvPr id="20" name="Text"/>
+          <p:cNvSpPr txBox="1"/>
+          <p:nvPr/>
+        </p:nvSpPr>
+        <p:spPr>
+          <a:xfrm>
+            <a:off x="3822192" y="3310128"/>
+            <a:ext cx="2788920" cy="914400"/>
+          </a:xfrm>
+          <a:prstGeom prst="roundRect">
+            <a:avLst/>
+          </a:prstGeom>
+          <a:solidFill>
+            <a:srgbClr val="FFFFFF"/>
+          </a:solidFill>
+          <a:ln w="10160">
+            <a:solidFill>
+              <a:srgbClr val="D7E3F0"/>
+            </a:solidFill>
+          </a:ln>
+        </p:spPr>
+        <p:txBody>
+          <a:bodyPr wrap="square" anchor="top" lIns="73152" rIns="73152" tIns="73152" bIns="73152"/>
+          <a:lstStyle/>
+          <a:p>
+            <a:pPr algn="l">
+              <a:spcAft>
+                <a:spcPts val="0"/>
+              </a:spcAft>
+            </a:pPr>
+            <a:r>
+              <a:rPr lang="es-MX" sz="1200" b="1">
+                <a:solidFill>
+                  <a:srgbClr val="0B1728"/>
+                </a:solidFill>
+                <a:latin typeface="Aptos"/>
+              </a:rPr>
+              <a:t>Lo que AYCO ve</a:t>
+            </a:r>
+            <a:endParaRPr lang="es-MX" sz="1200"/>
+          </a:p>
+          <a:p>
+            <a:pPr algn="l">
+              <a:spcAft>
+                <a:spcPts val="0"/>
+              </a:spcAft>
+            </a:pPr>
+            <a:r>
+              <a:rPr lang="es-MX" sz="860">
+                <a:solidFill>
+                  <a:srgbClr val="64748B"/>
+                </a:solidFill>
+                <a:latin typeface="Aptos"/>
+              </a:rPr>
+              <a:t>Top critical contracts, exposure by risk tier, vendor concentration and explainable clauses.</a:t>
+            </a:r>
+            <a:endParaRPr lang="es-MX" sz="860"/>
+          </a:p>
+        </p:txBody>
+      </p:sp>
+      <p:sp>
+        <p:nvSpPr>
+          <p:cNvPr id="21" name="Text"/>
+          <p:cNvSpPr txBox="1"/>
+          <p:nvPr/>
+        </p:nvSpPr>
+        <p:spPr>
+          <a:xfrm>
+            <a:off x="6839712" y="3310128"/>
+            <a:ext cx="2788920" cy="914400"/>
+          </a:xfrm>
+          <a:prstGeom prst="roundRect">
+            <a:avLst/>
+          </a:prstGeom>
+          <a:solidFill>
+            <a:srgbClr val="FFFFFF"/>
+          </a:solidFill>
+          <a:ln w="10160">
+            <a:solidFill>
+              <a:srgbClr val="D7E3F0"/>
+            </a:solidFill>
+          </a:ln>
+        </p:spPr>
+        <p:txBody>
+          <a:bodyPr wrap="square" anchor="top" lIns="73152" rIns="73152" tIns="73152" bIns="73152"/>
+          <a:lstStyle/>
+          <a:p>
+            <a:pPr algn="l">
+              <a:spcAft>
+                <a:spcPts val="0"/>
+              </a:spcAft>
+            </a:pPr>
+            <a:r>
+              <a:rPr lang="es-MX" sz="1200" b="1">
+                <a:solidFill>
+                  <a:srgbClr val="0B1728"/>
+                </a:solidFill>
+                <a:latin typeface="Aptos"/>
+              </a:rPr>
+              <a:t>Lo que TI valida</a:t>
+            </a:r>
+            <a:endParaRPr lang="es-MX" sz="1200"/>
+          </a:p>
+          <a:p>
+            <a:pPr algn="l">
+              <a:spcAft>
+                <a:spcPts val="0"/>
+              </a:spcAft>
+            </a:pPr>
+            <a:r>
+              <a:rPr lang="es-MX" sz="860">
+                <a:solidFill>
+                  <a:srgbClr val="64748B"/>
+                </a:solidFill>
+                <a:latin typeface="Aptos"/>
+              </a:rPr>
+              <a:t>Compute isolation, secrets outside git, OBS/KMS/DWS/DLI services and observable LLM traces.</a:t>
+            </a:r>
+            <a:endParaRPr lang="es-MX" sz="860"/>
+          </a:p>
+        </p:txBody>
+      </p:sp>
+      <p:sp>
+        <p:nvSpPr>
+          <p:cNvPr id="22" name="Text"/>
+          <p:cNvSpPr txBox="1"/>
+          <p:nvPr/>
+        </p:nvSpPr>
+        <p:spPr>
+          <a:xfrm>
+            <a:off x="658368" y="4754880"/>
+            <a:ext cx="9144000" cy="502920"/>
+          </a:xfrm>
+          <a:prstGeom prst="roundRect">
+            <a:avLst/>
+          </a:prstGeom>
+          <a:solidFill>
+            <a:srgbClr val="EAF6FA"/>
+          </a:solidFill>
+          <a:ln w="10160">
+            <a:solidFill>
+              <a:srgbClr val="BFEAF2"/>
+            </a:solidFill>
+          </a:ln>
+        </p:spPr>
+        <p:txBody>
+          <a:bodyPr wrap="square" anchor="mid" lIns="73152" rIns="73152" tIns="73152" bIns="73152"/>
+          <a:lstStyle/>
+          <a:p>
+            <a:pPr algn="ctr">
+              <a:spcAft>
+                <a:spcPts val="0"/>
+              </a:spcAft>
+            </a:pPr>
+            <a:r>
+              <a:rPr lang="es-MX" sz="1200">
+                <a:solidFill>
+                  <a:srgbClr val="12345A"/>
+                </a:solidFill>
+                <a:latin typeface="Aptos"/>
+              </a:rPr>
+              <a:t>El diagrama debe vender continuidad: del documento original hasta decisiones de riesgo, no una lista de servicios.</a:t>
+            </a:r>
+            <a:endParaRPr lang="es-MX" sz="1200"/>
+          </a:p>
+        </p:txBody>
+      </p:sp>
+      <p:sp>
+        <p:nvSpPr>
+          <p:cNvPr id="23" name="Footer"/>
+          <p:cNvSpPr txBox="1"/>
+          <p:nvPr/>
+        </p:nvSpPr>
+        <p:spPr>
+          <a:xfrm>
+            <a:off x="502920" y="6446520"/>
+            <a:ext cx="9875520" cy="228600"/>
           </a:xfrm>
           <a:prstGeom prst="rect">
             <a:avLst/>
           </a:prstGeom>
           <a:noFill/>
-        </p:spPr>
-        <p:txBody>
-          <a:bodyPr wrap="square">
-            <a:spAutoFit/>
-          </a:bodyPr>
+          <a:ln>
+            <a:noFill/>
+          </a:ln>
+        </p:spPr>
+        <p:txBody>
+          <a:bodyPr wrap="square" anchor="mid" lIns="73152" rIns="73152" tIns="73152" bIns="73152"/>
+          <a:lstStyle/>
+          <a:p>
+            <a:pPr algn="l">
+              <a:spcAft>
+                <a:spcPts val="0"/>
+              </a:spcAft>
+            </a:pPr>
+            <a:r>
+              <a:rPr lang="es-MX" sz="750">
+                <a:solidFill>
+                  <a:srgbClr val="64748B"/>
+                </a:solidFill>
+                <a:latin typeface="Aptos"/>
+              </a:rPr>
+              <a:t>Workshop Huawei Cloud x Salinas | Mayo 8, 2026 | México Century Plaza</a:t>
+            </a:r>
+            <a:endParaRPr lang="es-MX" sz="750"/>
+          </a:p>
+        </p:txBody>
+      </p:sp>
+      <p:sp>
+        <p:nvSpPr>
+          <p:cNvPr id="24" name="Page"/>
+          <p:cNvSpPr txBox="1"/>
+          <p:nvPr/>
+        </p:nvSpPr>
+        <p:spPr>
+          <a:xfrm>
+            <a:off x="11064240" y="6446520"/>
+            <a:ext cx="594360" cy="228600"/>
+          </a:xfrm>
+          <a:prstGeom prst="rect">
+            <a:avLst/>
+          </a:prstGeom>
+          <a:noFill/>
+          <a:ln>
+            <a:noFill/>
+          </a:ln>
+        </p:spPr>
+        <p:txBody>
+          <a:bodyPr wrap="square" anchor="mid" lIns="73152" rIns="73152" tIns="73152" bIns="73152"/>
           <a:lstStyle/>
           <a:p>
             <a:pPr algn="r">
-              <a:defRPr sz="900" b="0">
-                <a:solidFill>
-                  <a:srgbClr val="555555"/>
-                </a:solidFill>
-                <a:latin typeface="Calibri"/>
-              </a:defRPr>
-            </a:pPr>
-            <a:r>
+              <a:spcAft>
+                <a:spcPts val="0"/>
+              </a:spcAft>
+            </a:pPr>
+            <a:r>
+              <a:rPr lang="es-MX" sz="750">
+                <a:solidFill>
+                  <a:srgbClr val="64748B"/>
+                </a:solidFill>
+                <a:latin typeface="Aptos"/>
+              </a:rPr>
               <a:t>2 / 5</a:t>
             </a:r>
+            <a:endParaRPr lang="es-MX" sz="750"/>
           </a:p>
         </p:txBody>
       </p:sp>
@@ -3729,725 +5062,1174 @@
 </file>
 
 <file path=ppt/slides/slide3.xml><?xml version="1.0" encoding="utf-8"?>
-<p:sld xmlns:a="http://schemas.openxmlformats.org/drawingml/2006/main" xmlns:p="http://schemas.openxmlformats.org/presentationml/2006/main" xmlns:r="http://schemas.openxmlformats.org/officeDocument/2006/relationships">
+<p:sld xmlns:a="http://schemas.openxmlformats.org/drawingml/2006/main" xmlns:r="http://schemas.openxmlformats.org/officeDocument/2006/relationships" xmlns:p="http://schemas.openxmlformats.org/presentationml/2006/main">
   <p:cSld>
-    <p:bg>
-      <p:bgPr>
-        <a:solidFill>
-          <a:srgbClr val="0A0A0A"/>
-        </a:solidFill>
-        <a:effectLst/>
-      </p:bgPr>
-    </p:bg>
     <p:spTree>
       <p:nvGrpSpPr>
         <p:cNvPr id="1" name=""/>
         <p:cNvGrpSpPr/>
         <p:nvPr/>
       </p:nvGrpSpPr>
-      <p:grpSpPr/>
-      <p:sp>
-        <p:nvSpPr>
-          <p:cNvPr id="2" name="Rectangle 1"/>
+      <p:grpSpPr>
+        <a:xfrm>
+          <a:off x="0" y="0"/>
+          <a:ext cx="12192000" cy="6858000"/>
+          <a:chOff x="0" y="0"/>
+          <a:chExt cx="12192000" cy="6858000"/>
+        </a:xfrm>
+      </p:grpSpPr>
+      <p:sp>
+        <p:nvSpPr>
+          <p:cNvPr id="2" name="Block"/>
           <p:cNvSpPr/>
           <p:nvPr/>
         </p:nvSpPr>
         <p:spPr>
           <a:xfrm>
             <a:off x="0" y="0"/>
-            <a:ext cx="12191695" cy="54864"/>
+            <a:ext cx="12191695" cy="6858000"/>
           </a:xfrm>
           <a:prstGeom prst="rect">
             <a:avLst/>
           </a:prstGeom>
           <a:solidFill>
-            <a:srgbClr val="E4002B"/>
+            <a:srgbClr val="F7FAFC"/>
           </a:solidFill>
           <a:ln>
             <a:noFill/>
           </a:ln>
         </p:spPr>
-        <p:style>
-          <a:lnRef idx="1">
-            <a:schemeClr val="accent1"/>
-          </a:lnRef>
-          <a:fillRef idx="3">
-            <a:schemeClr val="accent1"/>
-          </a:fillRef>
-          <a:effectRef idx="2">
-            <a:schemeClr val="accent1"/>
-          </a:effectRef>
-          <a:fontRef idx="minor">
-            <a:schemeClr val="lt1"/>
-          </a:fontRef>
-        </p:style>
-        <p:txBody>
-          <a:bodyPr rtlCol="0" anchor="ctr"/>
-          <a:lstStyle/>
-          <a:p>
-            <a:pPr algn="ctr"/>
-          </a:p>
-        </p:txBody>
-      </p:sp>
-      <p:sp>
-        <p:nvSpPr>
-          <p:cNvPr id="3" name="TextBox 2"/>
-          <p:cNvSpPr txBox="1"/>
-          <p:nvPr/>
-        </p:nvSpPr>
-        <p:spPr>
-          <a:xfrm>
-            <a:off x="457200" y="274320"/>
-            <a:ext cx="9144000" cy="548640"/>
+        <p:txBody>
+          <a:bodyPr/>
+          <a:lstStyle/>
+          <a:p/>
+        </p:txBody>
+      </p:sp>
+      <p:sp>
+        <p:nvSpPr>
+          <p:cNvPr id="3" name="Block"/>
+          <p:cNvSpPr/>
+          <p:nvPr/>
+        </p:nvSpPr>
+        <p:spPr>
+          <a:xfrm>
+            <a:off x="0" y="0"/>
+            <a:ext cx="201168" cy="6858000"/>
           </a:xfrm>
           <a:prstGeom prst="rect">
             <a:avLst/>
           </a:prstGeom>
-          <a:noFill/>
-        </p:spPr>
-        <p:txBody>
-          <a:bodyPr wrap="square">
-            <a:spAutoFit/>
-          </a:bodyPr>
-          <a:lstStyle/>
-          <a:p>
-            <a:pPr algn="l">
-              <a:defRPr sz="2800" b="1">
-                <a:solidFill>
-                  <a:srgbClr val="FFFFFF"/>
-                </a:solidFill>
-                <a:latin typeface="Calibri"/>
-              </a:defRPr>
-            </a:pPr>
-            <a:r>
-              <a:t>Contract AI + Dify Chatbot</a:t>
-            </a:r>
-          </a:p>
-        </p:txBody>
-      </p:sp>
-      <p:sp>
-        <p:nvSpPr>
-          <p:cNvPr id="4" name="TextBox 3"/>
-          <p:cNvSpPr txBox="1"/>
-          <p:nvPr/>
-        </p:nvSpPr>
-        <p:spPr>
-          <a:xfrm>
-            <a:off x="457200" y="822960"/>
-            <a:ext cx="9144000" cy="365760"/>
-          </a:xfrm>
-          <a:prstGeom prst="rect">
-            <a:avLst/>
-          </a:prstGeom>
-          <a:noFill/>
-        </p:spPr>
-        <p:txBody>
-          <a:bodyPr wrap="square">
-            <a:spAutoFit/>
-          </a:bodyPr>
-          <a:lstStyle/>
-          <a:p>
-            <a:pPr algn="l">
-              <a:defRPr sz="1400" b="0">
-                <a:solidFill>
-                  <a:srgbClr val="A78BFA"/>
-                </a:solidFill>
-                <a:latin typeface="Calibri"/>
-              </a:defRPr>
-            </a:pPr>
-            <a:r>
-              <a:t>De revisión manual de contratos → chatbot AI que responde en segundos</a:t>
-            </a:r>
-          </a:p>
-        </p:txBody>
-      </p:sp>
-      <p:sp>
-        <p:nvSpPr>
-          <p:cNvPr id="5" name="Rectangle 4"/>
-          <p:cNvSpPr/>
-          <p:nvPr/>
-        </p:nvSpPr>
-        <p:spPr>
-          <a:xfrm>
-            <a:off x="457200" y="1188720"/>
-            <a:ext cx="2286000" cy="36576"/>
-          </a:xfrm>
-          <a:prstGeom prst="rect">
-            <a:avLst/>
-          </a:prstGeom>
-          <a:solidFill>
-            <a:srgbClr val="A78BFA"/>
+          <a:solidFill>
+            <a:srgbClr val="22A06B"/>
           </a:solidFill>
           <a:ln>
             <a:noFill/>
           </a:ln>
         </p:spPr>
-        <p:style>
-          <a:lnRef idx="1">
-            <a:schemeClr val="accent1"/>
-          </a:lnRef>
-          <a:fillRef idx="3">
-            <a:schemeClr val="accent1"/>
-          </a:fillRef>
-          <a:effectRef idx="2">
-            <a:schemeClr val="accent1"/>
-          </a:effectRef>
-          <a:fontRef idx="minor">
-            <a:schemeClr val="lt1"/>
-          </a:fontRef>
-        </p:style>
-        <p:txBody>
-          <a:bodyPr rtlCol="0" anchor="ctr"/>
-          <a:lstStyle/>
-          <a:p>
-            <a:pPr algn="ctr"/>
-          </a:p>
-        </p:txBody>
-      </p:sp>
-      <p:sp>
-        <p:nvSpPr>
-          <p:cNvPr id="6" name="Rounded Rectangle 5"/>
-          <p:cNvSpPr/>
-          <p:nvPr/>
-        </p:nvSpPr>
-        <p:spPr>
-          <a:xfrm>
-            <a:off x="457200" y="1463040"/>
-            <a:ext cx="3474720" cy="2194560"/>
-          </a:xfrm>
-          <a:prstGeom prst="roundRect">
-            <a:avLst/>
-          </a:prstGeom>
-          <a:solidFill>
-            <a:srgbClr val="1A1A1A"/>
-          </a:solidFill>
-          <a:ln w="12700">
-            <a:solidFill>
-              <a:srgbClr val="E4002B"/>
-            </a:solidFill>
-          </a:ln>
-        </p:spPr>
-        <p:style>
-          <a:lnRef idx="1">
-            <a:schemeClr val="accent1"/>
-          </a:lnRef>
-          <a:fillRef idx="3">
-            <a:schemeClr val="accent1"/>
-          </a:fillRef>
-          <a:effectRef idx="2">
-            <a:schemeClr val="accent1"/>
-          </a:effectRef>
-          <a:fontRef idx="minor">
-            <a:schemeClr val="lt1"/>
-          </a:fontRef>
-        </p:style>
-        <p:txBody>
-          <a:bodyPr rtlCol="0" anchor="ctr" wrap="square" lIns="182880" tIns="91440"/>
-          <a:lstStyle/>
-          <a:p>
-            <a:pPr algn="ctr">
-              <a:defRPr sz="1400" b="1">
-                <a:solidFill>
-                  <a:srgbClr val="FFFFFF"/>
-                </a:solidFill>
-                <a:latin typeface="Calibri"/>
-              </a:defRPr>
-            </a:pPr>
-            <a:r>
-              <a:t>1. UPLOAD</a:t>
-            </a:r>
-          </a:p>
-          <a:p>
-            <a:pPr>
-              <a:defRPr sz="1100">
-                <a:solidFill>
-                  <a:srgbClr val="999999"/>
-                </a:solidFill>
-                <a:latin typeface="Calibri"/>
-              </a:defRPr>
-            </a:pPr>
-            <a:r>
-              <a:t>20 contracts</a:t>
-            </a:r>
-            <a:br/>
-            <a:r>
-              <a:t>Raw storage</a:t>
-            </a:r>
-          </a:p>
-        </p:txBody>
-      </p:sp>
-      <p:sp>
-        <p:nvSpPr>
-          <p:cNvPr id="7" name="Rounded Rectangle 6"/>
-          <p:cNvSpPr/>
-          <p:nvPr/>
-        </p:nvSpPr>
-        <p:spPr>
-          <a:xfrm>
-            <a:off x="4297680" y="1463040"/>
-            <a:ext cx="3474720" cy="2194560"/>
-          </a:xfrm>
-          <a:prstGeom prst="roundRect">
-            <a:avLst/>
-          </a:prstGeom>
-          <a:solidFill>
-            <a:srgbClr val="1A1A1A"/>
-          </a:solidFill>
-          <a:ln w="12700">
-            <a:solidFill>
-              <a:srgbClr val="34D399"/>
-            </a:solidFill>
-          </a:ln>
-        </p:spPr>
-        <p:style>
-          <a:lnRef idx="1">
-            <a:schemeClr val="accent1"/>
-          </a:lnRef>
-          <a:fillRef idx="3">
-            <a:schemeClr val="accent1"/>
-          </a:fillRef>
-          <a:effectRef idx="2">
-            <a:schemeClr val="accent1"/>
-          </a:effectRef>
-          <a:fontRef idx="minor">
-            <a:schemeClr val="lt1"/>
-          </a:fontRef>
-        </p:style>
-        <p:txBody>
-          <a:bodyPr rtlCol="0" anchor="ctr" wrap="square" lIns="182880" tIns="91440"/>
-          <a:lstStyle/>
-          <a:p>
-            <a:pPr algn="ctr">
-              <a:defRPr sz="1400" b="1">
-                <a:solidFill>
-                  <a:srgbClr val="FFFFFF"/>
-                </a:solidFill>
-                <a:latin typeface="Calibri"/>
-              </a:defRPr>
-            </a:pPr>
-            <a:r>
-              <a:t>2. OCR</a:t>
-            </a:r>
-          </a:p>
-          <a:p>
-            <a:pPr>
-              <a:defRPr sz="1100">
-                <a:solidFill>
-                  <a:srgbClr val="999999"/>
-                </a:solidFill>
-                <a:latin typeface="Calibri"/>
-              </a:defRPr>
-            </a:pPr>
-            <a:r>
-              <a:t>Extract text</a:t>
-            </a:r>
-            <a:br/>
-            <a:r>
-              <a:t>~4,500 chars</a:t>
-            </a:r>
-          </a:p>
-        </p:txBody>
-      </p:sp>
-      <p:sp>
-        <p:nvSpPr>
-          <p:cNvPr id="8" name="Rounded Rectangle 7"/>
-          <p:cNvSpPr/>
-          <p:nvPr/>
-        </p:nvSpPr>
-        <p:spPr>
-          <a:xfrm>
-            <a:off x="8138160" y="1463040"/>
-            <a:ext cx="3474720" cy="2194560"/>
-          </a:xfrm>
-          <a:prstGeom prst="roundRect">
-            <a:avLst/>
-          </a:prstGeom>
-          <a:solidFill>
-            <a:srgbClr val="1A1A1A"/>
-          </a:solidFill>
-          <a:ln w="12700">
-            <a:solidFill>
-              <a:srgbClr val="34D399"/>
-            </a:solidFill>
-          </a:ln>
-        </p:spPr>
-        <p:style>
-          <a:lnRef idx="1">
-            <a:schemeClr val="accent1"/>
-          </a:lnRef>
-          <a:fillRef idx="3">
-            <a:schemeClr val="accent1"/>
-          </a:fillRef>
-          <a:effectRef idx="2">
-            <a:schemeClr val="accent1"/>
-          </a:effectRef>
-          <a:fontRef idx="minor">
-            <a:schemeClr val="lt1"/>
-          </a:fontRef>
-        </p:style>
-        <p:txBody>
-          <a:bodyPr rtlCol="0" anchor="ctr" wrap="square" lIns="182880" tIns="91440"/>
-          <a:lstStyle/>
-          <a:p>
-            <a:pPr algn="ctr">
-              <a:defRPr sz="1400" b="1">
-                <a:solidFill>
-                  <a:srgbClr val="FFFFFF"/>
-                </a:solidFill>
-                <a:latin typeface="Calibri"/>
-              </a:defRPr>
-            </a:pPr>
-            <a:r>
-              <a:t>3. PARSE</a:t>
-            </a:r>
-          </a:p>
-          <a:p>
-            <a:pPr>
-              <a:defRPr sz="1100">
-                <a:solidFill>
-                  <a:srgbClr val="999999"/>
-                </a:solidFill>
-                <a:latin typeface="Calibri"/>
-              </a:defRPr>
-            </a:pPr>
-            <a:r>
-              <a:t>Regex extraction</a:t>
-            </a:r>
-            <a:br/>
-            <a:r>
-              <a:t>Structured data</a:t>
-            </a:r>
-          </a:p>
-        </p:txBody>
-      </p:sp>
-      <p:sp>
-        <p:nvSpPr>
-          <p:cNvPr id="9" name="Rounded Rectangle 8"/>
-          <p:cNvSpPr/>
-          <p:nvPr/>
-        </p:nvSpPr>
-        <p:spPr>
-          <a:xfrm>
-            <a:off x="457200" y="3931920"/>
-            <a:ext cx="3474720" cy="2194560"/>
-          </a:xfrm>
-          <a:prstGeom prst="roundRect">
-            <a:avLst/>
-          </a:prstGeom>
-          <a:solidFill>
-            <a:srgbClr val="1A1A1A"/>
-          </a:solidFill>
-          <a:ln w="12700">
-            <a:solidFill>
-              <a:srgbClr val="A78BFA"/>
-            </a:solidFill>
-          </a:ln>
-        </p:spPr>
-        <p:style>
-          <a:lnRef idx="1">
-            <a:schemeClr val="accent1"/>
-          </a:lnRef>
-          <a:fillRef idx="3">
-            <a:schemeClr val="accent1"/>
-          </a:fillRef>
-          <a:effectRef idx="2">
-            <a:schemeClr val="accent1"/>
-          </a:effectRef>
-          <a:fontRef idx="minor">
-            <a:schemeClr val="lt1"/>
-          </a:fontRef>
-        </p:style>
-        <p:txBody>
-          <a:bodyPr rtlCol="0" anchor="ctr" wrap="square" lIns="182880" tIns="91440"/>
-          <a:lstStyle/>
-          <a:p>
-            <a:pPr algn="ctr">
-              <a:defRPr sz="1400" b="1">
-                <a:solidFill>
-                  <a:srgbClr val="FFFFFF"/>
-                </a:solidFill>
-                <a:latin typeface="Calibri"/>
-              </a:defRPr>
-            </a:pPr>
-            <a:r>
-              <a:t>4. AI ANALYSIS</a:t>
-            </a:r>
-          </a:p>
-          <a:p>
-            <a:pPr>
-              <a:defRPr sz="1100">
-                <a:solidFill>
-                  <a:srgbClr val="999999"/>
-                </a:solidFill>
-                <a:latin typeface="Calibri"/>
-              </a:defRPr>
-            </a:pPr>
-            <a:r>
-              <a:t>Risk scoring 0-10</a:t>
-            </a:r>
-            <a:br/>
-            <a:r>
-              <a:t>JSON response</a:t>
-            </a:r>
-          </a:p>
-        </p:txBody>
-      </p:sp>
-      <p:sp>
-        <p:nvSpPr>
-          <p:cNvPr id="10" name="Rounded Rectangle 9"/>
-          <p:cNvSpPr/>
-          <p:nvPr/>
-        </p:nvSpPr>
-        <p:spPr>
-          <a:xfrm>
-            <a:off x="4297680" y="3931920"/>
-            <a:ext cx="3474720" cy="2194560"/>
-          </a:xfrm>
-          <a:prstGeom prst="roundRect">
-            <a:avLst/>
-          </a:prstGeom>
-          <a:solidFill>
-            <a:srgbClr val="1A1A1A"/>
-          </a:solidFill>
-          <a:ln w="12700">
-            <a:solidFill>
-              <a:srgbClr val="22D3EE"/>
-            </a:solidFill>
-          </a:ln>
-        </p:spPr>
-        <p:style>
-          <a:lnRef idx="1">
-            <a:schemeClr val="accent1"/>
-          </a:lnRef>
-          <a:fillRef idx="3">
-            <a:schemeClr val="accent1"/>
-          </a:fillRef>
-          <a:effectRef idx="2">
-            <a:schemeClr val="accent1"/>
-          </a:effectRef>
-          <a:fontRef idx="minor">
-            <a:schemeClr val="lt1"/>
-          </a:fontRef>
-        </p:style>
-        <p:txBody>
-          <a:bodyPr rtlCol="0" anchor="ctr" wrap="square" lIns="182880" tIns="91440"/>
-          <a:lstStyle/>
-          <a:p>
-            <a:pPr algn="ctr">
-              <a:defRPr sz="1400" b="1">
-                <a:solidFill>
-                  <a:srgbClr val="FFFFFF"/>
-                </a:solidFill>
-                <a:latin typeface="Calibri"/>
-              </a:defRPr>
-            </a:pPr>
-            <a:r>
-              <a:t>5. CHATBOT</a:t>
-            </a:r>
-          </a:p>
-          <a:p>
-            <a:pPr>
-              <a:defRPr sz="1100">
-                <a:solidFill>
-                  <a:srgbClr val="999999"/>
-                </a:solidFill>
-                <a:latin typeface="Calibri"/>
-              </a:defRPr>
-            </a:pPr>
-            <a:r>
-              <a:t>Semantic search</a:t>
-            </a:r>
-            <a:br/>
-            <a:r>
-              <a:t>Natural language Q&amp;A</a:t>
-            </a:r>
-          </a:p>
-        </p:txBody>
-      </p:sp>
-      <p:sp>
-        <p:nvSpPr>
-          <p:cNvPr id="11" name="Rounded Rectangle 10"/>
-          <p:cNvSpPr/>
-          <p:nvPr/>
-        </p:nvSpPr>
-        <p:spPr>
-          <a:xfrm>
-            <a:off x="8138160" y="3931920"/>
-            <a:ext cx="3474720" cy="2194560"/>
-          </a:xfrm>
-          <a:prstGeom prst="roundRect">
-            <a:avLst/>
-          </a:prstGeom>
-          <a:solidFill>
-            <a:srgbClr val="1A1A1A"/>
-          </a:solidFill>
-          <a:ln w="12700">
-            <a:solidFill>
-              <a:srgbClr val="22D3EE"/>
-            </a:solidFill>
-          </a:ln>
-        </p:spPr>
-        <p:style>
-          <a:lnRef idx="1">
-            <a:schemeClr val="accent1"/>
-          </a:lnRef>
-          <a:fillRef idx="3">
-            <a:schemeClr val="accent1"/>
-          </a:fillRef>
-          <a:effectRef idx="2">
-            <a:schemeClr val="accent1"/>
-          </a:effectRef>
-          <a:fontRef idx="minor">
-            <a:schemeClr val="lt1"/>
-          </a:fontRef>
-        </p:style>
-        <p:txBody>
-          <a:bodyPr rtlCol="0" anchor="ctr" wrap="square" lIns="182880" tIns="91440"/>
-          <a:lstStyle/>
-          <a:p>
-            <a:pPr algn="ctr">
-              <a:defRPr sz="1400" b="1">
-                <a:solidFill>
-                  <a:srgbClr val="FFFFFF"/>
-                </a:solidFill>
-                <a:latin typeface="Calibri"/>
-              </a:defRPr>
-            </a:pPr>
-            <a:r>
-              <a:t>6. DASHBOARD</a:t>
-            </a:r>
-          </a:p>
-          <a:p>
-            <a:pPr>
-              <a:defRPr sz="1100">
-                <a:solidFill>
-                  <a:srgbClr val="999999"/>
-                </a:solidFill>
-                <a:latin typeface="Calibri"/>
-              </a:defRPr>
-            </a:pPr>
-            <a:r>
-              <a:t>Risk visualization</a:t>
-            </a:r>
-            <a:br/>
-            <a:r>
-              <a:t>KPIs + charts</a:t>
-            </a:r>
-          </a:p>
-        </p:txBody>
-      </p:sp>
-      <p:sp>
-        <p:nvSpPr>
-          <p:cNvPr id="12" name="Rectangle 11"/>
-          <p:cNvSpPr/>
-          <p:nvPr/>
-        </p:nvSpPr>
-        <p:spPr>
-          <a:xfrm>
-            <a:off x="0" y="6492240"/>
-            <a:ext cx="12191695" cy="54864"/>
+        <p:txBody>
+          <a:bodyPr/>
+          <a:lstStyle/>
+          <a:p/>
+        </p:txBody>
+      </p:sp>
+      <p:sp>
+        <p:nvSpPr>
+          <p:cNvPr id="4" name="Kicker"/>
+          <p:cNvSpPr txBox="1"/>
+          <p:nvPr/>
+        </p:nvSpPr>
+        <p:spPr>
+          <a:xfrm>
+            <a:off x="502920" y="256032"/>
+            <a:ext cx="4572000" cy="256032"/>
           </a:xfrm>
           <a:prstGeom prst="rect">
             <a:avLst/>
           </a:prstGeom>
-          <a:solidFill>
-            <a:srgbClr val="1A1A1A"/>
-          </a:solidFill>
+          <a:noFill/>
           <a:ln>
             <a:noFill/>
           </a:ln>
         </p:spPr>
-        <p:style>
-          <a:lnRef idx="1">
-            <a:schemeClr val="accent1"/>
-          </a:lnRef>
-          <a:fillRef idx="3">
-            <a:schemeClr val="accent1"/>
-          </a:fillRef>
-          <a:effectRef idx="2">
-            <a:schemeClr val="accent1"/>
-          </a:effectRef>
-          <a:fontRef idx="minor">
-            <a:schemeClr val="lt1"/>
-          </a:fontRef>
-        </p:style>
-        <p:txBody>
-          <a:bodyPr rtlCol="0" anchor="ctr"/>
-          <a:lstStyle/>
-          <a:p>
-            <a:pPr algn="ctr"/>
-          </a:p>
-        </p:txBody>
-      </p:sp>
-      <p:sp>
-        <p:nvSpPr>
-          <p:cNvPr id="13" name="TextBox 12"/>
+        <p:txBody>
+          <a:bodyPr wrap="square" anchor="mid" lIns="73152" rIns="73152" tIns="73152" bIns="73152"/>
+          <a:lstStyle/>
+          <a:p>
+            <a:pPr algn="l">
+              <a:spcAft>
+                <a:spcPts val="0"/>
+              </a:spcAft>
+            </a:pPr>
+            <a:r>
+              <a:rPr lang="es-MX" sz="850" b="1">
+                <a:solidFill>
+                  <a:srgbClr val="1FB6C9"/>
+                </a:solidFill>
+                <a:latin typeface="Aptos"/>
+              </a:rPr>
+              <a:t>RESULTADO QUE DEBE VERSE DURANTE LA DEMO</a:t>
+            </a:r>
+            <a:endParaRPr lang="es-MX" sz="850"/>
+          </a:p>
+        </p:txBody>
+      </p:sp>
+      <p:sp>
+        <p:nvSpPr>
+          <p:cNvPr id="5" name="Title"/>
           <p:cNvSpPr txBox="1"/>
           <p:nvPr/>
         </p:nvSpPr>
         <p:spPr>
           <a:xfrm>
-            <a:off x="457200" y="6510528"/>
-            <a:ext cx="11277295" cy="320040"/>
+            <a:off x="502920" y="502920"/>
+            <a:ext cx="7955280" cy="566928"/>
           </a:xfrm>
           <a:prstGeom prst="rect">
             <a:avLst/>
           </a:prstGeom>
           <a:noFill/>
-        </p:spPr>
-        <p:txBody>
-          <a:bodyPr wrap="square">
-            <a:spAutoFit/>
-          </a:bodyPr>
+          <a:ln>
+            <a:noFill/>
+          </a:ln>
+        </p:spPr>
+        <p:txBody>
+          <a:bodyPr wrap="square" anchor="mid" lIns="73152" rIns="73152" tIns="73152" bIns="73152"/>
+          <a:lstStyle/>
+          <a:p>
+            <a:pPr algn="l">
+              <a:spcAft>
+                <a:spcPts val="0"/>
+              </a:spcAft>
+            </a:pPr>
+            <a:r>
+              <a:rPr lang="es-MX" sz="2500" b="1">
+                <a:solidFill>
+                  <a:srgbClr val="0B1728"/>
+                </a:solidFill>
+                <a:latin typeface="Aptos"/>
+              </a:rPr>
+              <a:t>Prueba con 20 contratos</a:t>
+            </a:r>
+            <a:endParaRPr lang="es-MX" sz="2500"/>
+          </a:p>
+        </p:txBody>
+      </p:sp>
+      <p:sp>
+        <p:nvSpPr>
+          <p:cNvPr id="6" name="Text"/>
+          <p:cNvSpPr txBox="1"/>
+          <p:nvPr/>
+        </p:nvSpPr>
+        <p:spPr>
+          <a:xfrm>
+            <a:off x="658368" y="1298448"/>
+            <a:ext cx="2971800" cy="1078992"/>
+          </a:xfrm>
+          <a:prstGeom prst="roundRect">
+            <a:avLst/>
+          </a:prstGeom>
+          <a:solidFill>
+            <a:srgbClr val="FFFFFF"/>
+          </a:solidFill>
+          <a:ln w="10160">
+            <a:solidFill>
+              <a:srgbClr val="D7E3F0"/>
+            </a:solidFill>
+          </a:ln>
+        </p:spPr>
+        <p:txBody>
+          <a:bodyPr wrap="square" anchor="mid" lIns="73152" rIns="73152" tIns="73152" bIns="73152"/>
           <a:lstStyle/>
           <a:p>
             <a:pPr algn="ctr">
-              <a:defRPr sz="900" b="0">
-                <a:solidFill>
-                  <a:srgbClr val="999999"/>
-                </a:solidFill>
-                <a:latin typeface="Calibri"/>
-              </a:defRPr>
-            </a:pPr>
-            <a:r>
-              <a:t>Workshop Huawei Cloud × Salinas  |  Mayo 8, 2026  |  México Century Plaza</a:t>
-            </a:r>
-          </a:p>
-        </p:txBody>
-      </p:sp>
-      <p:sp>
-        <p:nvSpPr>
-          <p:cNvPr id="14" name="TextBox 13"/>
+              <a:spcAft>
+                <a:spcPts val="0"/>
+              </a:spcAft>
+            </a:pPr>
+            <a:r>
+              <a:rPr lang="es-MX" sz="3000" b="1">
+                <a:solidFill>
+                  <a:srgbClr val="F5A623"/>
+                </a:solidFill>
+                <a:latin typeface="Aptos"/>
+              </a:rPr>
+              <a:t>$133.1M</a:t>
+            </a:r>
+            <a:endParaRPr lang="es-MX" sz="3000"/>
+          </a:p>
+          <a:p>
+            <a:pPr algn="ctr">
+              <a:spcAft>
+                <a:spcPts val="0"/>
+              </a:spcAft>
+            </a:pPr>
+            <a:r>
+              <a:rPr lang="es-MX" sz="950">
+                <a:solidFill>
+                  <a:srgbClr val="0B1728"/>
+                </a:solidFill>
+                <a:latin typeface="Aptos"/>
+              </a:rPr>
+              <a:t>MXN detectados en exposición contractual</a:t>
+            </a:r>
+            <a:endParaRPr lang="es-MX" sz="950"/>
+          </a:p>
+        </p:txBody>
+      </p:sp>
+      <p:sp>
+        <p:nvSpPr>
+          <p:cNvPr id="7" name="Text"/>
           <p:cNvSpPr txBox="1"/>
           <p:nvPr/>
         </p:nvSpPr>
         <p:spPr>
           <a:xfrm>
-            <a:off x="11094415" y="6510528"/>
-            <a:ext cx="731520" cy="320040"/>
+            <a:off x="3822192" y="1298448"/>
+            <a:ext cx="2971800" cy="1078992"/>
+          </a:xfrm>
+          <a:prstGeom prst="roundRect">
+            <a:avLst/>
+          </a:prstGeom>
+          <a:solidFill>
+            <a:srgbClr val="FFFFFF"/>
+          </a:solidFill>
+          <a:ln w="10160">
+            <a:solidFill>
+              <a:srgbClr val="D7E3F0"/>
+            </a:solidFill>
+          </a:ln>
+        </p:spPr>
+        <p:txBody>
+          <a:bodyPr wrap="square" anchor="mid" lIns="73152" rIns="73152" tIns="73152" bIns="73152"/>
+          <a:lstStyle/>
+          <a:p>
+            <a:pPr algn="ctr">
+              <a:spcAft>
+                <a:spcPts val="0"/>
+              </a:spcAft>
+            </a:pPr>
+            <a:r>
+              <a:rPr lang="es-MX" sz="3000" b="1">
+                <a:solidFill>
+                  <a:srgbClr val="D64545"/>
+                </a:solidFill>
+                <a:latin typeface="Aptos"/>
+              </a:rPr>
+              <a:t>1 crítico</a:t>
+            </a:r>
+            <a:endParaRPr lang="es-MX" sz="3000"/>
+          </a:p>
+          <a:p>
+            <a:pPr algn="ctr">
+              <a:spcAft>
+                <a:spcPts val="0"/>
+              </a:spcAft>
+            </a:pPr>
+            <a:r>
+              <a:rPr lang="es-MX" sz="950">
+                <a:solidFill>
+                  <a:srgbClr val="0B1728"/>
+                </a:solidFill>
+                <a:latin typeface="Aptos"/>
+              </a:rPr>
+              <a:t>$12.5M MXN que dispara conversación ejecutiva</a:t>
+            </a:r>
+            <a:endParaRPr lang="es-MX" sz="950"/>
+          </a:p>
+        </p:txBody>
+      </p:sp>
+      <p:sp>
+        <p:nvSpPr>
+          <p:cNvPr id="8" name="Text"/>
+          <p:cNvSpPr txBox="1"/>
+          <p:nvPr/>
+        </p:nvSpPr>
+        <p:spPr>
+          <a:xfrm>
+            <a:off x="6995160" y="1298448"/>
+            <a:ext cx="2971800" cy="1078992"/>
+          </a:xfrm>
+          <a:prstGeom prst="roundRect">
+            <a:avLst/>
+          </a:prstGeom>
+          <a:solidFill>
+            <a:srgbClr val="FFFFFF"/>
+          </a:solidFill>
+          <a:ln w="10160">
+            <a:solidFill>
+              <a:srgbClr val="D7E3F0"/>
+            </a:solidFill>
+          </a:ln>
+        </p:spPr>
+        <p:txBody>
+          <a:bodyPr wrap="square" anchor="mid" lIns="73152" rIns="73152" tIns="73152" bIns="73152"/>
+          <a:lstStyle/>
+          <a:p>
+            <a:pPr algn="ctr">
+              <a:spcAft>
+                <a:spcPts val="0"/>
+              </a:spcAft>
+            </a:pPr>
+            <a:r>
+              <a:rPr lang="es-MX" sz="3000" b="1">
+                <a:solidFill>
+                  <a:srgbClr val="A8324A"/>
+                </a:solidFill>
+                <a:latin typeface="Aptos"/>
+              </a:rPr>
+              <a:t>10 altos</a:t>
+            </a:r>
+            <a:endParaRPr lang="es-MX" sz="3000"/>
+          </a:p>
+          <a:p>
+            <a:pPr algn="ctr">
+              <a:spcAft>
+                <a:spcPts val="0"/>
+              </a:spcAft>
+            </a:pPr>
+            <a:r>
+              <a:rPr lang="es-MX" sz="950">
+                <a:solidFill>
+                  <a:srgbClr val="0B1728"/>
+                </a:solidFill>
+                <a:latin typeface="Aptos"/>
+              </a:rPr>
+              <a:t>$96.0M MXN para priorizar revisión</a:t>
+            </a:r>
+            <a:endParaRPr lang="es-MX" sz="950"/>
+          </a:p>
+        </p:txBody>
+      </p:sp>
+      <p:sp>
+        <p:nvSpPr>
+          <p:cNvPr id="9" name="Text"/>
+          <p:cNvSpPr txBox="1"/>
+          <p:nvPr/>
+        </p:nvSpPr>
+        <p:spPr>
+          <a:xfrm>
+            <a:off x="749808" y="2971800"/>
+            <a:ext cx="1097280" cy="256032"/>
           </a:xfrm>
           <a:prstGeom prst="rect">
             <a:avLst/>
           </a:prstGeom>
           <a:noFill/>
-        </p:spPr>
-        <p:txBody>
-          <a:bodyPr wrap="square">
-            <a:spAutoFit/>
-          </a:bodyPr>
+          <a:ln>
+            <a:noFill/>
+          </a:ln>
+        </p:spPr>
+        <p:txBody>
+          <a:bodyPr wrap="square" anchor="mid" lIns="73152" rIns="73152" tIns="73152" bIns="73152"/>
+          <a:lstStyle/>
+          <a:p>
+            <a:pPr algn="l">
+              <a:spcAft>
+                <a:spcPts val="0"/>
+              </a:spcAft>
+            </a:pPr>
+            <a:r>
+              <a:rPr lang="es-MX" sz="900" b="1">
+                <a:solidFill>
+                  <a:srgbClr val="0B1728"/>
+                </a:solidFill>
+                <a:latin typeface="Aptos"/>
+              </a:rPr>
+              <a:t>Bajo</a:t>
+            </a:r>
+            <a:endParaRPr lang="es-MX" sz="900"/>
+          </a:p>
+        </p:txBody>
+      </p:sp>
+      <p:sp>
+        <p:nvSpPr>
+          <p:cNvPr id="10" name="Block"/>
+          <p:cNvSpPr/>
+          <p:nvPr/>
+        </p:nvSpPr>
+        <p:spPr>
+          <a:xfrm>
+            <a:off x="1874520" y="3035808"/>
+            <a:ext cx="4572000" cy="109728"/>
+          </a:xfrm>
+          <a:prstGeom prst="rect">
+            <a:avLst/>
+          </a:prstGeom>
+          <a:solidFill>
+            <a:srgbClr val="DCE7F3"/>
+          </a:solidFill>
+          <a:ln>
+            <a:noFill/>
+          </a:ln>
+        </p:spPr>
+        <p:txBody>
+          <a:bodyPr/>
+          <a:lstStyle/>
+          <a:p/>
+        </p:txBody>
+      </p:sp>
+      <p:sp>
+        <p:nvSpPr>
+          <p:cNvPr id="11" name="Block"/>
+          <p:cNvSpPr/>
+          <p:nvPr/>
+        </p:nvSpPr>
+        <p:spPr>
+          <a:xfrm>
+            <a:off x="1874520" y="3035808"/>
+            <a:ext cx="2743200" cy="109728"/>
+          </a:xfrm>
+          <a:prstGeom prst="rect">
+            <a:avLst/>
+          </a:prstGeom>
+          <a:solidFill>
+            <a:srgbClr val="22A06B"/>
+          </a:solidFill>
+          <a:ln>
+            <a:noFill/>
+          </a:ln>
+        </p:spPr>
+        <p:txBody>
+          <a:bodyPr/>
+          <a:lstStyle/>
+          <a:p/>
+        </p:txBody>
+      </p:sp>
+      <p:sp>
+        <p:nvSpPr>
+          <p:cNvPr id="12" name="Text"/>
+          <p:cNvSpPr txBox="1"/>
+          <p:nvPr/>
+        </p:nvSpPr>
+        <p:spPr>
+          <a:xfrm>
+            <a:off x="6629400" y="2971800"/>
+            <a:ext cx="1097280" cy="256032"/>
+          </a:xfrm>
+          <a:prstGeom prst="rect">
+            <a:avLst/>
+          </a:prstGeom>
+          <a:noFill/>
+          <a:ln>
+            <a:noFill/>
+          </a:ln>
+        </p:spPr>
+        <p:txBody>
+          <a:bodyPr wrap="square" anchor="mid" lIns="73152" rIns="73152" tIns="73152" bIns="73152"/>
+          <a:lstStyle/>
+          <a:p>
+            <a:pPr algn="l">
+              <a:spcAft>
+                <a:spcPts val="0"/>
+              </a:spcAft>
+            </a:pPr>
+            <a:r>
+              <a:rPr lang="es-MX" sz="860">
+                <a:solidFill>
+                  <a:srgbClr val="64748B"/>
+                </a:solidFill>
+                <a:latin typeface="Aptos"/>
+              </a:rPr>
+              <a:t>6 contratos</a:t>
+            </a:r>
+            <a:endParaRPr lang="es-MX" sz="860"/>
+          </a:p>
+        </p:txBody>
+      </p:sp>
+      <p:sp>
+        <p:nvSpPr>
+          <p:cNvPr id="13" name="Text"/>
+          <p:cNvSpPr txBox="1"/>
+          <p:nvPr/>
+        </p:nvSpPr>
+        <p:spPr>
+          <a:xfrm>
+            <a:off x="7909560" y="2971800"/>
+            <a:ext cx="1143000" cy="256032"/>
+          </a:xfrm>
+          <a:prstGeom prst="rect">
+            <a:avLst/>
+          </a:prstGeom>
+          <a:noFill/>
+          <a:ln>
+            <a:noFill/>
+          </a:ln>
+        </p:spPr>
+        <p:txBody>
+          <a:bodyPr wrap="square" anchor="mid" lIns="73152" rIns="73152" tIns="73152" bIns="73152"/>
           <a:lstStyle/>
           <a:p>
             <a:pPr algn="r">
-              <a:defRPr sz="900" b="0">
-                <a:solidFill>
-                  <a:srgbClr val="555555"/>
-                </a:solidFill>
-                <a:latin typeface="Calibri"/>
-              </a:defRPr>
-            </a:pPr>
-            <a:r>
+              <a:spcAft>
+                <a:spcPts val="0"/>
+              </a:spcAft>
+            </a:pPr>
+            <a:r>
+              <a:rPr lang="es-MX" sz="860" b="1">
+                <a:solidFill>
+                  <a:srgbClr val="22A06B"/>
+                </a:solidFill>
+                <a:latin typeface="Aptos"/>
+              </a:rPr>
+              <a:t>$5.96M</a:t>
+            </a:r>
+            <a:endParaRPr lang="es-MX" sz="860"/>
+          </a:p>
+        </p:txBody>
+      </p:sp>
+      <p:sp>
+        <p:nvSpPr>
+          <p:cNvPr id="14" name="Text"/>
+          <p:cNvSpPr txBox="1"/>
+          <p:nvPr/>
+        </p:nvSpPr>
+        <p:spPr>
+          <a:xfrm>
+            <a:off x="749808" y="3474720"/>
+            <a:ext cx="1097280" cy="256032"/>
+          </a:xfrm>
+          <a:prstGeom prst="rect">
+            <a:avLst/>
+          </a:prstGeom>
+          <a:noFill/>
+          <a:ln>
+            <a:noFill/>
+          </a:ln>
+        </p:spPr>
+        <p:txBody>
+          <a:bodyPr wrap="square" anchor="mid" lIns="73152" rIns="73152" tIns="73152" bIns="73152"/>
+          <a:lstStyle/>
+          <a:p>
+            <a:pPr algn="l">
+              <a:spcAft>
+                <a:spcPts val="0"/>
+              </a:spcAft>
+            </a:pPr>
+            <a:r>
+              <a:rPr lang="es-MX" sz="900" b="1">
+                <a:solidFill>
+                  <a:srgbClr val="0B1728"/>
+                </a:solidFill>
+                <a:latin typeface="Aptos"/>
+              </a:rPr>
+              <a:t>Medio</a:t>
+            </a:r>
+            <a:endParaRPr lang="es-MX" sz="900"/>
+          </a:p>
+        </p:txBody>
+      </p:sp>
+      <p:sp>
+        <p:nvSpPr>
+          <p:cNvPr id="15" name="Block"/>
+          <p:cNvSpPr/>
+          <p:nvPr/>
+        </p:nvSpPr>
+        <p:spPr>
+          <a:xfrm>
+            <a:off x="1874520" y="3538728"/>
+            <a:ext cx="4572000" cy="109728"/>
+          </a:xfrm>
+          <a:prstGeom prst="rect">
+            <a:avLst/>
+          </a:prstGeom>
+          <a:solidFill>
+            <a:srgbClr val="DCE7F3"/>
+          </a:solidFill>
+          <a:ln>
+            <a:noFill/>
+          </a:ln>
+        </p:spPr>
+        <p:txBody>
+          <a:bodyPr/>
+          <a:lstStyle/>
+          <a:p/>
+        </p:txBody>
+      </p:sp>
+      <p:sp>
+        <p:nvSpPr>
+          <p:cNvPr id="16" name="Block"/>
+          <p:cNvSpPr/>
+          <p:nvPr/>
+        </p:nvSpPr>
+        <p:spPr>
+          <a:xfrm>
+            <a:off x="1874520" y="3538728"/>
+            <a:ext cx="1371600" cy="109728"/>
+          </a:xfrm>
+          <a:prstGeom prst="rect">
+            <a:avLst/>
+          </a:prstGeom>
+          <a:solidFill>
+            <a:srgbClr val="F5A623"/>
+          </a:solidFill>
+          <a:ln>
+            <a:noFill/>
+          </a:ln>
+        </p:spPr>
+        <p:txBody>
+          <a:bodyPr/>
+          <a:lstStyle/>
+          <a:p/>
+        </p:txBody>
+      </p:sp>
+      <p:sp>
+        <p:nvSpPr>
+          <p:cNvPr id="17" name="Text"/>
+          <p:cNvSpPr txBox="1"/>
+          <p:nvPr/>
+        </p:nvSpPr>
+        <p:spPr>
+          <a:xfrm>
+            <a:off x="6629400" y="3474720"/>
+            <a:ext cx="1097280" cy="256032"/>
+          </a:xfrm>
+          <a:prstGeom prst="rect">
+            <a:avLst/>
+          </a:prstGeom>
+          <a:noFill/>
+          <a:ln>
+            <a:noFill/>
+          </a:ln>
+        </p:spPr>
+        <p:txBody>
+          <a:bodyPr wrap="square" anchor="mid" lIns="73152" rIns="73152" tIns="73152" bIns="73152"/>
+          <a:lstStyle/>
+          <a:p>
+            <a:pPr algn="l">
+              <a:spcAft>
+                <a:spcPts val="0"/>
+              </a:spcAft>
+            </a:pPr>
+            <a:r>
+              <a:rPr lang="es-MX" sz="860">
+                <a:solidFill>
+                  <a:srgbClr val="64748B"/>
+                </a:solidFill>
+                <a:latin typeface="Aptos"/>
+              </a:rPr>
+              <a:t>3 contratos</a:t>
+            </a:r>
+            <a:endParaRPr lang="es-MX" sz="860"/>
+          </a:p>
+        </p:txBody>
+      </p:sp>
+      <p:sp>
+        <p:nvSpPr>
+          <p:cNvPr id="18" name="Text"/>
+          <p:cNvSpPr txBox="1"/>
+          <p:nvPr/>
+        </p:nvSpPr>
+        <p:spPr>
+          <a:xfrm>
+            <a:off x="7909560" y="3474720"/>
+            <a:ext cx="1143000" cy="256032"/>
+          </a:xfrm>
+          <a:prstGeom prst="rect">
+            <a:avLst/>
+          </a:prstGeom>
+          <a:noFill/>
+          <a:ln>
+            <a:noFill/>
+          </a:ln>
+        </p:spPr>
+        <p:txBody>
+          <a:bodyPr wrap="square" anchor="mid" lIns="73152" rIns="73152" tIns="73152" bIns="73152"/>
+          <a:lstStyle/>
+          <a:p>
+            <a:pPr algn="r">
+              <a:spcAft>
+                <a:spcPts val="0"/>
+              </a:spcAft>
+            </a:pPr>
+            <a:r>
+              <a:rPr lang="es-MX" sz="860" b="1">
+                <a:solidFill>
+                  <a:srgbClr val="F5A623"/>
+                </a:solidFill>
+                <a:latin typeface="Aptos"/>
+              </a:rPr>
+              <a:t>$18.67M</a:t>
+            </a:r>
+            <a:endParaRPr lang="es-MX" sz="860"/>
+          </a:p>
+        </p:txBody>
+      </p:sp>
+      <p:sp>
+        <p:nvSpPr>
+          <p:cNvPr id="19" name="Text"/>
+          <p:cNvSpPr txBox="1"/>
+          <p:nvPr/>
+        </p:nvSpPr>
+        <p:spPr>
+          <a:xfrm>
+            <a:off x="749808" y="3977640"/>
+            <a:ext cx="1097280" cy="256032"/>
+          </a:xfrm>
+          <a:prstGeom prst="rect">
+            <a:avLst/>
+          </a:prstGeom>
+          <a:noFill/>
+          <a:ln>
+            <a:noFill/>
+          </a:ln>
+        </p:spPr>
+        <p:txBody>
+          <a:bodyPr wrap="square" anchor="mid" lIns="73152" rIns="73152" tIns="73152" bIns="73152"/>
+          <a:lstStyle/>
+          <a:p>
+            <a:pPr algn="l">
+              <a:spcAft>
+                <a:spcPts val="0"/>
+              </a:spcAft>
+            </a:pPr>
+            <a:r>
+              <a:rPr lang="es-MX" sz="900" b="1">
+                <a:solidFill>
+                  <a:srgbClr val="0B1728"/>
+                </a:solidFill>
+                <a:latin typeface="Aptos"/>
+              </a:rPr>
+              <a:t>Alto</a:t>
+            </a:r>
+            <a:endParaRPr lang="es-MX" sz="900"/>
+          </a:p>
+        </p:txBody>
+      </p:sp>
+      <p:sp>
+        <p:nvSpPr>
+          <p:cNvPr id="20" name="Block"/>
+          <p:cNvSpPr/>
+          <p:nvPr/>
+        </p:nvSpPr>
+        <p:spPr>
+          <a:xfrm>
+            <a:off x="1874520" y="4041648"/>
+            <a:ext cx="4572000" cy="109728"/>
+          </a:xfrm>
+          <a:prstGeom prst="rect">
+            <a:avLst/>
+          </a:prstGeom>
+          <a:solidFill>
+            <a:srgbClr val="DCE7F3"/>
+          </a:solidFill>
+          <a:ln>
+            <a:noFill/>
+          </a:ln>
+        </p:spPr>
+        <p:txBody>
+          <a:bodyPr/>
+          <a:lstStyle/>
+          <a:p/>
+        </p:txBody>
+      </p:sp>
+      <p:sp>
+        <p:nvSpPr>
+          <p:cNvPr id="21" name="Block"/>
+          <p:cNvSpPr/>
+          <p:nvPr/>
+        </p:nvSpPr>
+        <p:spPr>
+          <a:xfrm>
+            <a:off x="1874520" y="4041648"/>
+            <a:ext cx="4572000" cy="109728"/>
+          </a:xfrm>
+          <a:prstGeom prst="rect">
+            <a:avLst/>
+          </a:prstGeom>
+          <a:solidFill>
+            <a:srgbClr val="A8324A"/>
+          </a:solidFill>
+          <a:ln>
+            <a:noFill/>
+          </a:ln>
+        </p:spPr>
+        <p:txBody>
+          <a:bodyPr/>
+          <a:lstStyle/>
+          <a:p/>
+        </p:txBody>
+      </p:sp>
+      <p:sp>
+        <p:nvSpPr>
+          <p:cNvPr id="22" name="Text"/>
+          <p:cNvSpPr txBox="1"/>
+          <p:nvPr/>
+        </p:nvSpPr>
+        <p:spPr>
+          <a:xfrm>
+            <a:off x="6629400" y="3977640"/>
+            <a:ext cx="1097280" cy="256032"/>
+          </a:xfrm>
+          <a:prstGeom prst="rect">
+            <a:avLst/>
+          </a:prstGeom>
+          <a:noFill/>
+          <a:ln>
+            <a:noFill/>
+          </a:ln>
+        </p:spPr>
+        <p:txBody>
+          <a:bodyPr wrap="square" anchor="mid" lIns="73152" rIns="73152" tIns="73152" bIns="73152"/>
+          <a:lstStyle/>
+          <a:p>
+            <a:pPr algn="l">
+              <a:spcAft>
+                <a:spcPts val="0"/>
+              </a:spcAft>
+            </a:pPr>
+            <a:r>
+              <a:rPr lang="es-MX" sz="860">
+                <a:solidFill>
+                  <a:srgbClr val="64748B"/>
+                </a:solidFill>
+                <a:latin typeface="Aptos"/>
+              </a:rPr>
+              <a:t>10 contratos</a:t>
+            </a:r>
+            <a:endParaRPr lang="es-MX" sz="860"/>
+          </a:p>
+        </p:txBody>
+      </p:sp>
+      <p:sp>
+        <p:nvSpPr>
+          <p:cNvPr id="23" name="Text"/>
+          <p:cNvSpPr txBox="1"/>
+          <p:nvPr/>
+        </p:nvSpPr>
+        <p:spPr>
+          <a:xfrm>
+            <a:off x="7909560" y="3977640"/>
+            <a:ext cx="1143000" cy="256032"/>
+          </a:xfrm>
+          <a:prstGeom prst="rect">
+            <a:avLst/>
+          </a:prstGeom>
+          <a:noFill/>
+          <a:ln>
+            <a:noFill/>
+          </a:ln>
+        </p:spPr>
+        <p:txBody>
+          <a:bodyPr wrap="square" anchor="mid" lIns="73152" rIns="73152" tIns="73152" bIns="73152"/>
+          <a:lstStyle/>
+          <a:p>
+            <a:pPr algn="r">
+              <a:spcAft>
+                <a:spcPts val="0"/>
+              </a:spcAft>
+            </a:pPr>
+            <a:r>
+              <a:rPr lang="es-MX" sz="860" b="1">
+                <a:solidFill>
+                  <a:srgbClr val="A8324A"/>
+                </a:solidFill>
+                <a:latin typeface="Aptos"/>
+              </a:rPr>
+              <a:t>$96.00M</a:t>
+            </a:r>
+            <a:endParaRPr lang="es-MX" sz="860"/>
+          </a:p>
+        </p:txBody>
+      </p:sp>
+      <p:sp>
+        <p:nvSpPr>
+          <p:cNvPr id="24" name="Text"/>
+          <p:cNvSpPr txBox="1"/>
+          <p:nvPr/>
+        </p:nvSpPr>
+        <p:spPr>
+          <a:xfrm>
+            <a:off x="749808" y="4480560"/>
+            <a:ext cx="1097280" cy="256032"/>
+          </a:xfrm>
+          <a:prstGeom prst="rect">
+            <a:avLst/>
+          </a:prstGeom>
+          <a:noFill/>
+          <a:ln>
+            <a:noFill/>
+          </a:ln>
+        </p:spPr>
+        <p:txBody>
+          <a:bodyPr wrap="square" anchor="mid" lIns="73152" rIns="73152" tIns="73152" bIns="73152"/>
+          <a:lstStyle/>
+          <a:p>
+            <a:pPr algn="l">
+              <a:spcAft>
+                <a:spcPts val="0"/>
+              </a:spcAft>
+            </a:pPr>
+            <a:r>
+              <a:rPr lang="es-MX" sz="900" b="1">
+                <a:solidFill>
+                  <a:srgbClr val="0B1728"/>
+                </a:solidFill>
+                <a:latin typeface="Aptos"/>
+              </a:rPr>
+              <a:t>Crítico</a:t>
+            </a:r>
+            <a:endParaRPr lang="es-MX" sz="900"/>
+          </a:p>
+        </p:txBody>
+      </p:sp>
+      <p:sp>
+        <p:nvSpPr>
+          <p:cNvPr id="25" name="Block"/>
+          <p:cNvSpPr/>
+          <p:nvPr/>
+        </p:nvSpPr>
+        <p:spPr>
+          <a:xfrm>
+            <a:off x="1874520" y="4544568"/>
+            <a:ext cx="4572000" cy="109728"/>
+          </a:xfrm>
+          <a:prstGeom prst="rect">
+            <a:avLst/>
+          </a:prstGeom>
+          <a:solidFill>
+            <a:srgbClr val="DCE7F3"/>
+          </a:solidFill>
+          <a:ln>
+            <a:noFill/>
+          </a:ln>
+        </p:spPr>
+        <p:txBody>
+          <a:bodyPr/>
+          <a:lstStyle/>
+          <a:p/>
+        </p:txBody>
+      </p:sp>
+      <p:sp>
+        <p:nvSpPr>
+          <p:cNvPr id="26" name="Block"/>
+          <p:cNvSpPr/>
+          <p:nvPr/>
+        </p:nvSpPr>
+        <p:spPr>
+          <a:xfrm>
+            <a:off x="1874520" y="4544568"/>
+            <a:ext cx="457200" cy="109728"/>
+          </a:xfrm>
+          <a:prstGeom prst="rect">
+            <a:avLst/>
+          </a:prstGeom>
+          <a:solidFill>
+            <a:srgbClr val="D64545"/>
+          </a:solidFill>
+          <a:ln>
+            <a:noFill/>
+          </a:ln>
+        </p:spPr>
+        <p:txBody>
+          <a:bodyPr/>
+          <a:lstStyle/>
+          <a:p/>
+        </p:txBody>
+      </p:sp>
+      <p:sp>
+        <p:nvSpPr>
+          <p:cNvPr id="27" name="Text"/>
+          <p:cNvSpPr txBox="1"/>
+          <p:nvPr/>
+        </p:nvSpPr>
+        <p:spPr>
+          <a:xfrm>
+            <a:off x="6629400" y="4480560"/>
+            <a:ext cx="1097280" cy="256032"/>
+          </a:xfrm>
+          <a:prstGeom prst="rect">
+            <a:avLst/>
+          </a:prstGeom>
+          <a:noFill/>
+          <a:ln>
+            <a:noFill/>
+          </a:ln>
+        </p:spPr>
+        <p:txBody>
+          <a:bodyPr wrap="square" anchor="mid" lIns="73152" rIns="73152" tIns="73152" bIns="73152"/>
+          <a:lstStyle/>
+          <a:p>
+            <a:pPr algn="l">
+              <a:spcAft>
+                <a:spcPts val="0"/>
+              </a:spcAft>
+            </a:pPr>
+            <a:r>
+              <a:rPr lang="es-MX" sz="860">
+                <a:solidFill>
+                  <a:srgbClr val="64748B"/>
+                </a:solidFill>
+                <a:latin typeface="Aptos"/>
+              </a:rPr>
+              <a:t>1 contrato</a:t>
+            </a:r>
+            <a:endParaRPr lang="es-MX" sz="860"/>
+          </a:p>
+        </p:txBody>
+      </p:sp>
+      <p:sp>
+        <p:nvSpPr>
+          <p:cNvPr id="28" name="Text"/>
+          <p:cNvSpPr txBox="1"/>
+          <p:nvPr/>
+        </p:nvSpPr>
+        <p:spPr>
+          <a:xfrm>
+            <a:off x="7909560" y="4480560"/>
+            <a:ext cx="1143000" cy="256032"/>
+          </a:xfrm>
+          <a:prstGeom prst="rect">
+            <a:avLst/>
+          </a:prstGeom>
+          <a:noFill/>
+          <a:ln>
+            <a:noFill/>
+          </a:ln>
+        </p:spPr>
+        <p:txBody>
+          <a:bodyPr wrap="square" anchor="mid" lIns="73152" rIns="73152" tIns="73152" bIns="73152"/>
+          <a:lstStyle/>
+          <a:p>
+            <a:pPr algn="r">
+              <a:spcAft>
+                <a:spcPts val="0"/>
+              </a:spcAft>
+            </a:pPr>
+            <a:r>
+              <a:rPr lang="es-MX" sz="860" b="1">
+                <a:solidFill>
+                  <a:srgbClr val="D64545"/>
+                </a:solidFill>
+                <a:latin typeface="Aptos"/>
+              </a:rPr>
+              <a:t>$12.50M</a:t>
+            </a:r>
+            <a:endParaRPr lang="es-MX" sz="860"/>
+          </a:p>
+        </p:txBody>
+      </p:sp>
+      <p:sp>
+        <p:nvSpPr>
+          <p:cNvPr id="29" name="Text"/>
+          <p:cNvSpPr txBox="1"/>
+          <p:nvPr/>
+        </p:nvSpPr>
+        <p:spPr>
+          <a:xfrm>
+            <a:off x="658368" y="4983480"/>
+            <a:ext cx="9326880" cy="566928"/>
+          </a:xfrm>
+          <a:prstGeom prst="roundRect">
+            <a:avLst/>
+          </a:prstGeom>
+          <a:solidFill>
+            <a:srgbClr val="08233F"/>
+          </a:solidFill>
+          <a:ln>
+            <a:noFill/>
+          </a:ln>
+        </p:spPr>
+        <p:txBody>
+          <a:bodyPr wrap="square" anchor="mid" lIns="73152" rIns="73152" tIns="73152" bIns="73152"/>
+          <a:lstStyle/>
+          <a:p>
+            <a:pPr algn="ctr">
+              <a:spcAft>
+                <a:spcPts val="0"/>
+              </a:spcAft>
+            </a:pPr>
+            <a:r>
+              <a:rPr lang="es-MX" sz="1250">
+                <a:solidFill>
+                  <a:srgbClr val="FFFFFF"/>
+                </a:solidFill>
+                <a:latin typeface="Aptos"/>
+              </a:rPr>
+              <a:t>Slide de prueba: debe coincidir con los datos generados por el demo y abrir la puerta a preguntas reales de cartera, proveedor y obligación.</a:t>
+            </a:r>
+            <a:endParaRPr lang="es-MX" sz="1250"/>
+          </a:p>
+        </p:txBody>
+      </p:sp>
+      <p:sp>
+        <p:nvSpPr>
+          <p:cNvPr id="30" name="Footer"/>
+          <p:cNvSpPr txBox="1"/>
+          <p:nvPr/>
+        </p:nvSpPr>
+        <p:spPr>
+          <a:xfrm>
+            <a:off x="502920" y="6446520"/>
+            <a:ext cx="9875520" cy="228600"/>
+          </a:xfrm>
+          <a:prstGeom prst="rect">
+            <a:avLst/>
+          </a:prstGeom>
+          <a:noFill/>
+          <a:ln>
+            <a:noFill/>
+          </a:ln>
+        </p:spPr>
+        <p:txBody>
+          <a:bodyPr wrap="square" anchor="mid" lIns="73152" rIns="73152" tIns="73152" bIns="73152"/>
+          <a:lstStyle/>
+          <a:p>
+            <a:pPr algn="l">
+              <a:spcAft>
+                <a:spcPts val="0"/>
+              </a:spcAft>
+            </a:pPr>
+            <a:r>
+              <a:rPr lang="es-MX" sz="750">
+                <a:solidFill>
+                  <a:srgbClr val="64748B"/>
+                </a:solidFill>
+                <a:latin typeface="Aptos"/>
+              </a:rPr>
+              <a:t>Workshop Huawei Cloud x Salinas | Mayo 8, 2026 | México Century Plaza</a:t>
+            </a:r>
+            <a:endParaRPr lang="es-MX" sz="750"/>
+          </a:p>
+        </p:txBody>
+      </p:sp>
+      <p:sp>
+        <p:nvSpPr>
+          <p:cNvPr id="31" name="Page"/>
+          <p:cNvSpPr txBox="1"/>
+          <p:nvPr/>
+        </p:nvSpPr>
+        <p:spPr>
+          <a:xfrm>
+            <a:off x="11064240" y="6446520"/>
+            <a:ext cx="594360" cy="228600"/>
+          </a:xfrm>
+          <a:prstGeom prst="rect">
+            <a:avLst/>
+          </a:prstGeom>
+          <a:noFill/>
+          <a:ln>
+            <a:noFill/>
+          </a:ln>
+        </p:spPr>
+        <p:txBody>
+          <a:bodyPr wrap="square" anchor="mid" lIns="73152" rIns="73152" tIns="73152" bIns="73152"/>
+          <a:lstStyle/>
+          <a:p>
+            <a:pPr algn="r">
+              <a:spcAft>
+                <a:spcPts val="0"/>
+              </a:spcAft>
+            </a:pPr>
+            <a:r>
+              <a:rPr lang="es-MX" sz="750">
+                <a:solidFill>
+                  <a:srgbClr val="64748B"/>
+                </a:solidFill>
+                <a:latin typeface="Aptos"/>
+              </a:rPr>
               <a:t>3 / 5</a:t>
             </a:r>
+            <a:endParaRPr lang="es-MX" sz="750"/>
           </a:p>
         </p:txBody>
       </p:sp>
@@ -4460,717 +6242,906 @@
 </file>
 
 <file path=ppt/slides/slide4.xml><?xml version="1.0" encoding="utf-8"?>
-<p:sld xmlns:a="http://schemas.openxmlformats.org/drawingml/2006/main" xmlns:p="http://schemas.openxmlformats.org/presentationml/2006/main" xmlns:r="http://schemas.openxmlformats.org/officeDocument/2006/relationships">
+<p:sld xmlns:a="http://schemas.openxmlformats.org/drawingml/2006/main" xmlns:r="http://schemas.openxmlformats.org/officeDocument/2006/relationships" xmlns:p="http://schemas.openxmlformats.org/presentationml/2006/main">
   <p:cSld>
-    <p:bg>
-      <p:bgPr>
-        <a:solidFill>
-          <a:srgbClr val="0A0A0A"/>
-        </a:solidFill>
-        <a:effectLst/>
-      </p:bgPr>
-    </p:bg>
     <p:spTree>
       <p:nvGrpSpPr>
         <p:cNvPr id="1" name=""/>
         <p:cNvGrpSpPr/>
         <p:nvPr/>
       </p:nvGrpSpPr>
-      <p:grpSpPr/>
-      <p:sp>
-        <p:nvSpPr>
-          <p:cNvPr id="2" name="Rectangle 1"/>
+      <p:grpSpPr>
+        <a:xfrm>
+          <a:off x="0" y="0"/>
+          <a:ext cx="12192000" cy="6858000"/>
+          <a:chOff x="0" y="0"/>
+          <a:chExt cx="12192000" cy="6858000"/>
+        </a:xfrm>
+      </p:grpSpPr>
+      <p:sp>
+        <p:nvSpPr>
+          <p:cNvPr id="2" name="Block"/>
           <p:cNvSpPr/>
           <p:nvPr/>
         </p:nvSpPr>
         <p:spPr>
           <a:xfrm>
             <a:off x="0" y="0"/>
-            <a:ext cx="12191695" cy="54864"/>
+            <a:ext cx="12191695" cy="6858000"/>
           </a:xfrm>
           <a:prstGeom prst="rect">
             <a:avLst/>
           </a:prstGeom>
           <a:solidFill>
-            <a:srgbClr val="E4002B"/>
+            <a:srgbClr val="F7FAFC"/>
           </a:solidFill>
           <a:ln>
             <a:noFill/>
           </a:ln>
         </p:spPr>
-        <p:style>
-          <a:lnRef idx="1">
-            <a:schemeClr val="accent1"/>
-          </a:lnRef>
-          <a:fillRef idx="3">
-            <a:schemeClr val="accent1"/>
-          </a:fillRef>
-          <a:effectRef idx="2">
-            <a:schemeClr val="accent1"/>
-          </a:effectRef>
-          <a:fontRef idx="minor">
-            <a:schemeClr val="lt1"/>
-          </a:fontRef>
-        </p:style>
-        <p:txBody>
-          <a:bodyPr rtlCol="0" anchor="ctr"/>
-          <a:lstStyle/>
-          <a:p>
-            <a:pPr algn="ctr"/>
-          </a:p>
-        </p:txBody>
-      </p:sp>
-      <p:sp>
-        <p:nvSpPr>
-          <p:cNvPr id="3" name="TextBox 2"/>
-          <p:cNvSpPr txBox="1"/>
-          <p:nvPr/>
-        </p:nvSpPr>
-        <p:spPr>
-          <a:xfrm>
-            <a:off x="457200" y="274320"/>
-            <a:ext cx="9144000" cy="548640"/>
+        <p:txBody>
+          <a:bodyPr/>
+          <a:lstStyle/>
+          <a:p/>
+        </p:txBody>
+      </p:sp>
+      <p:sp>
+        <p:nvSpPr>
+          <p:cNvPr id="3" name="Block"/>
+          <p:cNvSpPr/>
+          <p:nvPr/>
+        </p:nvSpPr>
+        <p:spPr>
+          <a:xfrm>
+            <a:off x="0" y="0"/>
+            <a:ext cx="201168" cy="6858000"/>
           </a:xfrm>
           <a:prstGeom prst="rect">
             <a:avLst/>
           </a:prstGeom>
-          <a:noFill/>
-        </p:spPr>
-        <p:txBody>
-          <a:bodyPr wrap="square">
-            <a:spAutoFit/>
-          </a:bodyPr>
-          <a:lstStyle/>
-          <a:p>
-            <a:pPr algn="l">
-              <a:defRPr sz="2800" b="1">
-                <a:solidFill>
-                  <a:srgbClr val="FFFFFF"/>
-                </a:solidFill>
-                <a:latin typeface="Calibri"/>
-              </a:defRPr>
-            </a:pPr>
-            <a:r>
-              <a:t>Data Governance &amp; CNBV Compliance</a:t>
-            </a:r>
-          </a:p>
-        </p:txBody>
-      </p:sp>
-      <p:sp>
-        <p:nvSpPr>
-          <p:cNvPr id="4" name="TextBox 3"/>
-          <p:cNvSpPr txBox="1"/>
-          <p:nvPr/>
-        </p:nvSpPr>
-        <p:spPr>
-          <a:xfrm>
-            <a:off x="457200" y="822960"/>
-            <a:ext cx="9144000" cy="365760"/>
-          </a:xfrm>
-          <a:prstGeom prst="rect">
-            <a:avLst/>
-          </a:prstGeom>
-          <a:noFill/>
-        </p:spPr>
-        <p:txBody>
-          <a:bodyPr wrap="square">
-            <a:spAutoFit/>
-          </a:bodyPr>
-          <a:lstStyle/>
-          <a:p>
-            <a:pPr algn="l">
-              <a:defRPr sz="1400" b="0">
-                <a:solidFill>
-                  <a:srgbClr val="FF9800"/>
-                </a:solidFill>
-                <a:latin typeface="Calibri"/>
-              </a:defRPr>
-            </a:pPr>
-            <a:r>
-              <a:t>DataArts Studio: Catalog, Lineage, Security, ETL, DataService</a:t>
-            </a:r>
-          </a:p>
-        </p:txBody>
-      </p:sp>
-      <p:sp>
-        <p:nvSpPr>
-          <p:cNvPr id="5" name="Rectangle 4"/>
-          <p:cNvSpPr/>
-          <p:nvPr/>
-        </p:nvSpPr>
-        <p:spPr>
-          <a:xfrm>
-            <a:off x="457200" y="1188720"/>
-            <a:ext cx="2286000" cy="36576"/>
-          </a:xfrm>
-          <a:prstGeom prst="rect">
-            <a:avLst/>
-          </a:prstGeom>
-          <a:solidFill>
-            <a:srgbClr val="FF9800"/>
+          <a:solidFill>
+            <a:srgbClr val="F5A623"/>
           </a:solidFill>
           <a:ln>
             <a:noFill/>
           </a:ln>
         </p:spPr>
-        <p:style>
-          <a:lnRef idx="1">
-            <a:schemeClr val="accent1"/>
-          </a:lnRef>
-          <a:fillRef idx="3">
-            <a:schemeClr val="accent1"/>
-          </a:fillRef>
-          <a:effectRef idx="2">
-            <a:schemeClr val="accent1"/>
-          </a:effectRef>
-          <a:fontRef idx="minor">
-            <a:schemeClr val="lt1"/>
-          </a:fontRef>
-        </p:style>
-        <p:txBody>
-          <a:bodyPr rtlCol="0" anchor="ctr"/>
-          <a:lstStyle/>
-          <a:p>
-            <a:pPr algn="ctr"/>
-          </a:p>
-        </p:txBody>
-      </p:sp>
-      <p:sp>
-        <p:nvSpPr>
-          <p:cNvPr id="6" name="Rounded Rectangle 5"/>
-          <p:cNvSpPr/>
-          <p:nvPr/>
-        </p:nvSpPr>
-        <p:spPr>
-          <a:xfrm>
-            <a:off x="457200" y="1463040"/>
-            <a:ext cx="3474720" cy="2194560"/>
-          </a:xfrm>
-          <a:prstGeom prst="roundRect">
-            <a:avLst/>
-          </a:prstGeom>
-          <a:solidFill>
-            <a:srgbClr val="1A1A1A"/>
-          </a:solidFill>
-          <a:ln w="12700">
-            <a:solidFill>
-              <a:srgbClr val="FF9800"/>
-            </a:solidFill>
-          </a:ln>
-        </p:spPr>
-        <p:style>
-          <a:lnRef idx="1">
-            <a:schemeClr val="accent1"/>
-          </a:lnRef>
-          <a:fillRef idx="3">
-            <a:schemeClr val="accent1"/>
-          </a:fillRef>
-          <a:effectRef idx="2">
-            <a:schemeClr val="accent1"/>
-          </a:effectRef>
-          <a:fontRef idx="minor">
-            <a:schemeClr val="lt1"/>
-          </a:fontRef>
-        </p:style>
-        <p:txBody>
-          <a:bodyPr rtlCol="0" anchor="ctr" wrap="square" lIns="182880" tIns="91440"/>
-          <a:lstStyle/>
-          <a:p>
-            <a:pPr algn="ctr">
-              <a:defRPr sz="1400" b="1">
-                <a:solidFill>
-                  <a:srgbClr val="FFFFFF"/>
-                </a:solidFill>
-                <a:latin typeface="Calibri"/>
-              </a:defRPr>
-            </a:pPr>
-            <a:r>
-              <a:t>DataArts Catalog</a:t>
-            </a:r>
-          </a:p>
-          <a:p>
-            <a:pPr>
-              <a:defRPr sz="1100">
-                <a:solidFill>
-                  <a:srgbClr val="999999"/>
-                </a:solidFill>
-                <a:latin typeface="Calibri"/>
-              </a:defRPr>
-            </a:pPr>
-            <a:r>
-              <a:t>Metadata collection</a:t>
-            </a:r>
-            <a:br/>
-            <a:r>
-              <a:t>DWS → Catalog</a:t>
-            </a:r>
-            <a:br/>
-            <a:r>
-              <a:t>Lineage: OBS→FG→DLI→DWS</a:t>
-            </a:r>
-          </a:p>
-        </p:txBody>
-      </p:sp>
-      <p:sp>
-        <p:nvSpPr>
-          <p:cNvPr id="7" name="Rounded Rectangle 6"/>
-          <p:cNvSpPr/>
-          <p:nvPr/>
-        </p:nvSpPr>
-        <p:spPr>
-          <a:xfrm>
-            <a:off x="4297680" y="1463040"/>
-            <a:ext cx="3474720" cy="2194560"/>
-          </a:xfrm>
-          <a:prstGeom prst="roundRect">
-            <a:avLst/>
-          </a:prstGeom>
-          <a:solidFill>
-            <a:srgbClr val="1A1A1A"/>
-          </a:solidFill>
-          <a:ln w="12700">
-            <a:solidFill>
-              <a:srgbClr val="FF9800"/>
-            </a:solidFill>
-          </a:ln>
-        </p:spPr>
-        <p:style>
-          <a:lnRef idx="1">
-            <a:schemeClr val="accent1"/>
-          </a:lnRef>
-          <a:fillRef idx="3">
-            <a:schemeClr val="accent1"/>
-          </a:fillRef>
-          <a:effectRef idx="2">
-            <a:schemeClr val="accent1"/>
-          </a:effectRef>
-          <a:fontRef idx="minor">
-            <a:schemeClr val="lt1"/>
-          </a:fontRef>
-        </p:style>
-        <p:txBody>
-          <a:bodyPr rtlCol="0" anchor="ctr" wrap="square" lIns="182880" tIns="91440"/>
-          <a:lstStyle/>
-          <a:p>
-            <a:pPr algn="ctr">
-              <a:defRPr sz="1400" b="1">
-                <a:solidFill>
-                  <a:srgbClr val="FFFFFF"/>
-                </a:solidFill>
-                <a:latin typeface="Calibri"/>
-              </a:defRPr>
-            </a:pPr>
-            <a:r>
-              <a:t>Architecture</a:t>
-            </a:r>
-          </a:p>
-          <a:p>
-            <a:pPr>
-              <a:defRPr sz="1100">
-                <a:solidFill>
-                  <a:srgbClr val="999999"/>
-                </a:solidFill>
-                <a:latin typeface="Calibri"/>
-              </a:defRPr>
-            </a:pPr>
-            <a:r>
-              <a:t>Subject areas</a:t>
-            </a:r>
-            <a:br/>
-            <a:r>
-              <a:t>Data model design</a:t>
-            </a:r>
-            <a:br/>
-            <a:r>
-              <a:t>Table definitions</a:t>
-            </a:r>
-          </a:p>
-        </p:txBody>
-      </p:sp>
-      <p:sp>
-        <p:nvSpPr>
-          <p:cNvPr id="8" name="Rounded Rectangle 7"/>
-          <p:cNvSpPr/>
-          <p:nvPr/>
-        </p:nvSpPr>
-        <p:spPr>
-          <a:xfrm>
-            <a:off x="8138160" y="1463040"/>
-            <a:ext cx="3474720" cy="2194560"/>
-          </a:xfrm>
-          <a:prstGeom prst="roundRect">
-            <a:avLst/>
-          </a:prstGeom>
-          <a:solidFill>
-            <a:srgbClr val="1A1A1A"/>
-          </a:solidFill>
-          <a:ln w="12700">
-            <a:solidFill>
-              <a:srgbClr val="E4002B"/>
-            </a:solidFill>
-          </a:ln>
-        </p:spPr>
-        <p:style>
-          <a:lnRef idx="1">
-            <a:schemeClr val="accent1"/>
-          </a:lnRef>
-          <a:fillRef idx="3">
-            <a:schemeClr val="accent1"/>
-          </a:fillRef>
-          <a:effectRef idx="2">
-            <a:schemeClr val="accent1"/>
-          </a:effectRef>
-          <a:fontRef idx="minor">
-            <a:schemeClr val="lt1"/>
-          </a:fontRef>
-        </p:style>
-        <p:txBody>
-          <a:bodyPr rtlCol="0" anchor="ctr" wrap="square" lIns="182880" tIns="91440"/>
-          <a:lstStyle/>
-          <a:p>
-            <a:pPr algn="ctr">
-              <a:defRPr sz="1400" b="1">
-                <a:solidFill>
-                  <a:srgbClr val="FFFFFF"/>
-                </a:solidFill>
-                <a:latin typeface="Calibri"/>
-              </a:defRPr>
-            </a:pPr>
-            <a:r>
-              <a:t>Security</a:t>
-            </a:r>
-          </a:p>
-          <a:p>
-            <a:pPr>
-              <a:defRPr sz="1100">
-                <a:solidFill>
-                  <a:srgbClr val="999999"/>
-                </a:solidFill>
-                <a:latin typeface="Calibri"/>
-              </a:defRPr>
-            </a:pPr>
-            <a:r>
-              <a:t>Sensitive field classification</a:t>
-            </a:r>
-            <a:br/>
-            <a:r>
-              <a:t>Dynamic masking</a:t>
-            </a:r>
-            <a:br/>
-            <a:r>
-              <a:t>Data classification</a:t>
-            </a:r>
-          </a:p>
-        </p:txBody>
-      </p:sp>
-      <p:sp>
-        <p:nvSpPr>
-          <p:cNvPr id="9" name="Rounded Rectangle 8"/>
-          <p:cNvSpPr/>
-          <p:nvPr/>
-        </p:nvSpPr>
-        <p:spPr>
-          <a:xfrm>
-            <a:off x="457200" y="3931920"/>
-            <a:ext cx="3474720" cy="2194560"/>
-          </a:xfrm>
-          <a:prstGeom prst="roundRect">
-            <a:avLst/>
-          </a:prstGeom>
-          <a:solidFill>
-            <a:srgbClr val="1A1A1A"/>
-          </a:solidFill>
-          <a:ln w="12700">
-            <a:solidFill>
-              <a:srgbClr val="34D399"/>
-            </a:solidFill>
-          </a:ln>
-        </p:spPr>
-        <p:style>
-          <a:lnRef idx="1">
-            <a:schemeClr val="accent1"/>
-          </a:lnRef>
-          <a:fillRef idx="3">
-            <a:schemeClr val="accent1"/>
-          </a:fillRef>
-          <a:effectRef idx="2">
-            <a:schemeClr val="accent1"/>
-          </a:effectRef>
-          <a:fontRef idx="minor">
-            <a:schemeClr val="lt1"/>
-          </a:fontRef>
-        </p:style>
-        <p:txBody>
-          <a:bodyPr rtlCol="0" anchor="ctr" wrap="square" lIns="182880" tIns="91440"/>
-          <a:lstStyle/>
-          <a:p>
-            <a:pPr algn="ctr">
-              <a:defRPr sz="1400" b="1">
-                <a:solidFill>
-                  <a:srgbClr val="FFFFFF"/>
-                </a:solidFill>
-                <a:latin typeface="Calibri"/>
-              </a:defRPr>
-            </a:pPr>
-            <a:r>
-              <a:t>Factory</a:t>
-            </a:r>
-          </a:p>
-          <a:p>
-            <a:pPr>
-              <a:defRPr sz="1100">
-                <a:solidFill>
-                  <a:srgbClr val="999999"/>
-                </a:solidFill>
-                <a:latin typeface="Calibri"/>
-              </a:defRPr>
-            </a:pPr>
-            <a:r>
-              <a:t>ETL pipeline orchestration</a:t>
-            </a:r>
-            <a:br/>
-            <a:r>
-              <a:t>Scheduling</a:t>
-            </a:r>
-            <a:br/>
-            <a:r>
-              <a:t>Monitoring</a:t>
-            </a:r>
-          </a:p>
-        </p:txBody>
-      </p:sp>
-      <p:sp>
-        <p:nvSpPr>
-          <p:cNvPr id="10" name="Rounded Rectangle 9"/>
-          <p:cNvSpPr/>
-          <p:nvPr/>
-        </p:nvSpPr>
-        <p:spPr>
-          <a:xfrm>
-            <a:off x="4297680" y="3931920"/>
-            <a:ext cx="3474720" cy="2194560"/>
-          </a:xfrm>
-          <a:prstGeom prst="roundRect">
-            <a:avLst/>
-          </a:prstGeom>
-          <a:solidFill>
-            <a:srgbClr val="1A1A1A"/>
-          </a:solidFill>
-          <a:ln w="12700">
-            <a:solidFill>
-              <a:srgbClr val="22D3EE"/>
-            </a:solidFill>
-          </a:ln>
-        </p:spPr>
-        <p:style>
-          <a:lnRef idx="1">
-            <a:schemeClr val="accent1"/>
-          </a:lnRef>
-          <a:fillRef idx="3">
-            <a:schemeClr val="accent1"/>
-          </a:fillRef>
-          <a:effectRef idx="2">
-            <a:schemeClr val="accent1"/>
-          </a:effectRef>
-          <a:fontRef idx="minor">
-            <a:schemeClr val="lt1"/>
-          </a:fontRef>
-        </p:style>
-        <p:txBody>
-          <a:bodyPr rtlCol="0" anchor="ctr" wrap="square" lIns="182880" tIns="91440"/>
-          <a:lstStyle/>
-          <a:p>
-            <a:pPr algn="ctr">
-              <a:defRPr sz="1400" b="1">
-                <a:solidFill>
-                  <a:srgbClr val="FFFFFF"/>
-                </a:solidFill>
-                <a:latin typeface="Calibri"/>
-              </a:defRPr>
-            </a:pPr>
-            <a:r>
-              <a:t>DataService</a:t>
-            </a:r>
-          </a:p>
-          <a:p>
-            <a:pPr>
-              <a:defRPr sz="1100">
-                <a:solidFill>
-                  <a:srgbClr val="999999"/>
-                </a:solidFill>
-                <a:latin typeface="Calibri"/>
-              </a:defRPr>
-            </a:pPr>
-            <a:r>
-              <a:t>REST API endpoints</a:t>
-            </a:r>
-            <a:br/>
-            <a:r>
-              <a:t>GET /risk-results</a:t>
-            </a:r>
-            <a:br/>
-            <a:r>
-              <a:t>Dynamic masking</a:t>
-            </a:r>
-          </a:p>
-        </p:txBody>
-      </p:sp>
-      <p:sp>
-        <p:nvSpPr>
-          <p:cNvPr id="11" name="TextBox 10"/>
+        <p:txBody>
+          <a:bodyPr/>
+          <a:lstStyle/>
+          <a:p/>
+        </p:txBody>
+      </p:sp>
+      <p:sp>
+        <p:nvSpPr>
+          <p:cNvPr id="4" name="Kicker"/>
           <p:cNvSpPr txBox="1"/>
           <p:nvPr/>
         </p:nvSpPr>
         <p:spPr>
           <a:xfrm>
-            <a:off x="457200" y="4389120"/>
-            <a:ext cx="10972800" cy="1371600"/>
+            <a:off x="502920" y="256032"/>
+            <a:ext cx="4572000" cy="256032"/>
           </a:xfrm>
           <a:prstGeom prst="rect">
             <a:avLst/>
           </a:prstGeom>
           <a:noFill/>
-        </p:spPr>
-        <p:txBody>
-          <a:bodyPr wrap="square">
-            <a:spAutoFit/>
-          </a:bodyPr>
-          <a:lstStyle/>
-          <a:p>
-            <a:pPr algn="l">
-              <a:defRPr sz="1200" b="0">
-                <a:solidFill>
-                  <a:srgbClr val="CCCCCC"/>
-                </a:solidFill>
-                <a:latin typeface="Calibri"/>
-              </a:defRPr>
-            </a:pPr>
-            <a:r>
-              <a:t>CNBV Alignment:</a:t>
-            </a:r>
-            <a:br/>
-            <a:r>
-              <a:t>▸ AML controls — Transaction monitoring  ▸ KYC — Vendor onboarding verification</a:t>
-            </a:r>
-            <a:br/>
-            <a:r>
-              <a:t>▸ SAR reporting — Automated suspicious activity flags  ▸ Audit trail — Full lineage tracking</a:t>
-            </a:r>
-          </a:p>
-        </p:txBody>
-      </p:sp>
-      <p:sp>
-        <p:nvSpPr>
-          <p:cNvPr id="12" name="Rectangle 11"/>
-          <p:cNvSpPr/>
-          <p:nvPr/>
-        </p:nvSpPr>
-        <p:spPr>
-          <a:xfrm>
-            <a:off x="0" y="6492240"/>
-            <a:ext cx="12191695" cy="54864"/>
-          </a:xfrm>
-          <a:prstGeom prst="rect">
-            <a:avLst/>
-          </a:prstGeom>
-          <a:solidFill>
-            <a:srgbClr val="1A1A1A"/>
-          </a:solidFill>
           <a:ln>
             <a:noFill/>
           </a:ln>
         </p:spPr>
-        <p:style>
-          <a:lnRef idx="1">
-            <a:schemeClr val="accent1"/>
-          </a:lnRef>
-          <a:fillRef idx="3">
-            <a:schemeClr val="accent1"/>
-          </a:fillRef>
-          <a:effectRef idx="2">
-            <a:schemeClr val="accent1"/>
-          </a:effectRef>
-          <a:fontRef idx="minor">
-            <a:schemeClr val="lt1"/>
-          </a:fontRef>
-        </p:style>
-        <p:txBody>
-          <a:bodyPr rtlCol="0" anchor="ctr"/>
-          <a:lstStyle/>
-          <a:p>
-            <a:pPr algn="ctr"/>
-          </a:p>
-        </p:txBody>
-      </p:sp>
-      <p:sp>
-        <p:nvSpPr>
-          <p:cNvPr id="13" name="TextBox 12"/>
+        <p:txBody>
+          <a:bodyPr wrap="square" anchor="mid" lIns="73152" rIns="73152" tIns="73152" bIns="73152"/>
+          <a:lstStyle/>
+          <a:p>
+            <a:pPr algn="l">
+              <a:spcAft>
+                <a:spcPts val="0"/>
+              </a:spcAft>
+            </a:pPr>
+            <a:r>
+              <a:rPr lang="es-MX" sz="850" b="1">
+                <a:solidFill>
+                  <a:srgbClr val="1FB6C9"/>
+                </a:solidFill>
+                <a:latin typeface="Aptos"/>
+              </a:rPr>
+              <a:t>DATAARTS STUDIO + DWS + DLI</a:t>
+            </a:r>
+            <a:endParaRPr lang="es-MX" sz="850"/>
+          </a:p>
+        </p:txBody>
+      </p:sp>
+      <p:sp>
+        <p:nvSpPr>
+          <p:cNvPr id="5" name="Title"/>
           <p:cNvSpPr txBox="1"/>
           <p:nvPr/>
         </p:nvSpPr>
         <p:spPr>
           <a:xfrm>
-            <a:off x="457200" y="6510528"/>
-            <a:ext cx="11277295" cy="320040"/>
+            <a:off x="502920" y="502920"/>
+            <a:ext cx="7955280" cy="566928"/>
           </a:xfrm>
           <a:prstGeom prst="rect">
             <a:avLst/>
           </a:prstGeom>
           <a:noFill/>
-        </p:spPr>
-        <p:txBody>
-          <a:bodyPr wrap="square">
-            <a:spAutoFit/>
-          </a:bodyPr>
+          <a:ln>
+            <a:noFill/>
+          </a:ln>
+        </p:spPr>
+        <p:txBody>
+          <a:bodyPr wrap="square" anchor="mid" lIns="73152" rIns="73152" tIns="73152" bIns="73152"/>
+          <a:lstStyle/>
+          <a:p>
+            <a:pPr algn="l">
+              <a:spcAft>
+                <a:spcPts val="0"/>
+              </a:spcAft>
+            </a:pPr>
+            <a:r>
+              <a:rPr lang="es-MX" sz="2500" b="1">
+                <a:solidFill>
+                  <a:srgbClr val="0B1728"/>
+                </a:solidFill>
+                <a:latin typeface="Aptos"/>
+              </a:rPr>
+              <a:t>Gobierno de datos como plano de control</a:t>
+            </a:r>
+            <a:endParaRPr lang="es-MX" sz="2500"/>
+          </a:p>
+        </p:txBody>
+      </p:sp>
+      <p:sp>
+        <p:nvSpPr>
+          <p:cNvPr id="6" name="Text"/>
+          <p:cNvSpPr txBox="1"/>
+          <p:nvPr/>
+        </p:nvSpPr>
+        <p:spPr>
+          <a:xfrm>
+            <a:off x="658368" y="1298448"/>
+            <a:ext cx="9235440" cy="384048"/>
+          </a:xfrm>
+          <a:prstGeom prst="rect">
+            <a:avLst/>
+          </a:prstGeom>
+          <a:noFill/>
+          <a:ln>
+            <a:noFill/>
+          </a:ln>
+        </p:spPr>
+        <p:txBody>
+          <a:bodyPr wrap="square" anchor="mid" lIns="73152" rIns="73152" tIns="73152" bIns="73152"/>
+          <a:lstStyle/>
+          <a:p>
+            <a:pPr algn="l">
+              <a:spcAft>
+                <a:spcPts val="0"/>
+              </a:spcAft>
+            </a:pPr>
+            <a:r>
+              <a:rPr lang="es-MX" sz="1220">
+                <a:solidFill>
+                  <a:srgbClr val="12345A"/>
+                </a:solidFill>
+                <a:latin typeface="Aptos"/>
+              </a:rPr>
+              <a:t>DataArts no es decoración: es la capa que permite explicar origen, transformación, consumo y controles sobre campos sensibles.</a:t>
+            </a:r>
+            <a:endParaRPr lang="es-MX" sz="1220"/>
+          </a:p>
+        </p:txBody>
+      </p:sp>
+      <p:sp>
+        <p:nvSpPr>
+          <p:cNvPr id="7" name="Text"/>
+          <p:cNvSpPr txBox="1"/>
+          <p:nvPr/>
+        </p:nvSpPr>
+        <p:spPr>
+          <a:xfrm>
+            <a:off x="658368" y="2084832"/>
+            <a:ext cx="1627632" cy="1115568"/>
+          </a:xfrm>
+          <a:prstGeom prst="roundRect">
+            <a:avLst/>
+          </a:prstGeom>
+          <a:solidFill>
+            <a:srgbClr val="FFFFFF"/>
+          </a:solidFill>
+          <a:ln w="10160">
+            <a:solidFill>
+              <a:srgbClr val="D7E3F0"/>
+            </a:solidFill>
+          </a:ln>
+        </p:spPr>
+        <p:txBody>
+          <a:bodyPr wrap="square" anchor="mid" lIns="73152" rIns="73152" tIns="73152" bIns="73152"/>
           <a:lstStyle/>
           <a:p>
             <a:pPr algn="ctr">
-              <a:defRPr sz="900" b="0">
-                <a:solidFill>
-                  <a:srgbClr val="999999"/>
-                </a:solidFill>
-                <a:latin typeface="Calibri"/>
-              </a:defRPr>
-            </a:pPr>
-            <a:r>
-              <a:t>Workshop Huawei Cloud × Salinas  |  Mayo 8, 2026  |  México Century Plaza</a:t>
-            </a:r>
-          </a:p>
-        </p:txBody>
-      </p:sp>
-      <p:sp>
-        <p:nvSpPr>
-          <p:cNvPr id="14" name="TextBox 13"/>
+              <a:spcAft>
+                <a:spcPts val="0"/>
+              </a:spcAft>
+            </a:pPr>
+            <a:r>
+              <a:rPr lang="es-MX" sz="1200" b="1">
+                <a:solidFill>
+                  <a:srgbClr val="2B6CB0"/>
+                </a:solidFill>
+                <a:latin typeface="Aptos"/>
+              </a:rPr>
+              <a:t>Catálogo</a:t>
+            </a:r>
+            <a:endParaRPr lang="es-MX" sz="1200"/>
+          </a:p>
+          <a:p>
+            <a:pPr algn="ctr">
+              <a:spcAft>
+                <a:spcPts val="0"/>
+              </a:spcAft>
+            </a:pPr>
+            <a:r>
+              <a:rPr lang="es-MX" sz="819">
+                <a:solidFill>
+                  <a:srgbClr val="64748B"/>
+                </a:solidFill>
+                <a:latin typeface="Aptos"/>
+              </a:rPr>
+              <a:t>metadatos de contratos, vendors y resultados</a:t>
+            </a:r>
+            <a:endParaRPr lang="es-MX" sz="819"/>
+          </a:p>
+        </p:txBody>
+      </p:sp>
+      <p:sp>
+        <p:nvSpPr>
+          <p:cNvPr id="8" name="Text"/>
           <p:cNvSpPr txBox="1"/>
           <p:nvPr/>
         </p:nvSpPr>
         <p:spPr>
           <a:xfrm>
-            <a:off x="11094415" y="6510528"/>
-            <a:ext cx="731520" cy="320040"/>
+            <a:off x="2578608" y="2084832"/>
+            <a:ext cx="1627632" cy="1115568"/>
+          </a:xfrm>
+          <a:prstGeom prst="roundRect">
+            <a:avLst/>
+          </a:prstGeom>
+          <a:solidFill>
+            <a:srgbClr val="FFFFFF"/>
+          </a:solidFill>
+          <a:ln w="10160">
+            <a:solidFill>
+              <a:srgbClr val="D7E3F0"/>
+            </a:solidFill>
+          </a:ln>
+        </p:spPr>
+        <p:txBody>
+          <a:bodyPr wrap="square" anchor="mid" lIns="73152" rIns="73152" tIns="73152" bIns="73152"/>
+          <a:lstStyle/>
+          <a:p>
+            <a:pPr algn="ctr">
+              <a:spcAft>
+                <a:spcPts val="0"/>
+              </a:spcAft>
+            </a:pPr>
+            <a:r>
+              <a:rPr lang="es-MX" sz="1200" b="1">
+                <a:solidFill>
+                  <a:srgbClr val="1FB6C9"/>
+                </a:solidFill>
+                <a:latin typeface="Aptos"/>
+              </a:rPr>
+              <a:t>Linaje</a:t>
+            </a:r>
+            <a:endParaRPr lang="es-MX" sz="1200"/>
+          </a:p>
+          <a:p>
+            <a:pPr algn="ctr">
+              <a:spcAft>
+                <a:spcPts val="0"/>
+              </a:spcAft>
+            </a:pPr>
+            <a:r>
+              <a:rPr lang="es-MX" sz="819">
+                <a:solidFill>
+                  <a:srgbClr val="64748B"/>
+                </a:solidFill>
+                <a:latin typeface="Aptos"/>
+              </a:rPr>
+              <a:t>OBS -&gt; FunctionGraph -&gt; DLI -&gt; DWS -&gt; API</a:t>
+            </a:r>
+            <a:endParaRPr lang="es-MX" sz="819"/>
+          </a:p>
+        </p:txBody>
+      </p:sp>
+      <p:sp>
+        <p:nvSpPr>
+          <p:cNvPr id="9" name="Text"/>
+          <p:cNvSpPr txBox="1"/>
+          <p:nvPr/>
+        </p:nvSpPr>
+        <p:spPr>
+          <a:xfrm>
+            <a:off x="4498848" y="2084832"/>
+            <a:ext cx="1627632" cy="1115568"/>
+          </a:xfrm>
+          <a:prstGeom prst="roundRect">
+            <a:avLst/>
+          </a:prstGeom>
+          <a:solidFill>
+            <a:srgbClr val="FFFFFF"/>
+          </a:solidFill>
+          <a:ln w="10160">
+            <a:solidFill>
+              <a:srgbClr val="D7E3F0"/>
+            </a:solidFill>
+          </a:ln>
+        </p:spPr>
+        <p:txBody>
+          <a:bodyPr wrap="square" anchor="mid" lIns="73152" rIns="73152" tIns="73152" bIns="73152"/>
+          <a:lstStyle/>
+          <a:p>
+            <a:pPr algn="ctr">
+              <a:spcAft>
+                <a:spcPts val="0"/>
+              </a:spcAft>
+            </a:pPr>
+            <a:r>
+              <a:rPr lang="es-MX" sz="1200" b="1">
+                <a:solidFill>
+                  <a:srgbClr val="D64545"/>
+                </a:solidFill>
+                <a:latin typeface="Aptos"/>
+              </a:rPr>
+              <a:t>Seguridad</a:t>
+            </a:r>
+            <a:endParaRPr lang="es-MX" sz="1200"/>
+          </a:p>
+          <a:p>
+            <a:pPr algn="ctr">
+              <a:spcAft>
+                <a:spcPts val="0"/>
+              </a:spcAft>
+            </a:pPr>
+            <a:r>
+              <a:rPr lang="es-MX" sz="819">
+                <a:solidFill>
+                  <a:srgbClr val="64748B"/>
+                </a:solidFill>
+                <a:latin typeface="Aptos"/>
+              </a:rPr>
+              <a:t>clasificación, masking y acceso por rol</a:t>
+            </a:r>
+            <a:endParaRPr lang="es-MX" sz="819"/>
+          </a:p>
+        </p:txBody>
+      </p:sp>
+      <p:sp>
+        <p:nvSpPr>
+          <p:cNvPr id="10" name="Text"/>
+          <p:cNvSpPr txBox="1"/>
+          <p:nvPr/>
+        </p:nvSpPr>
+        <p:spPr>
+          <a:xfrm>
+            <a:off x="6419088" y="2084832"/>
+            <a:ext cx="1627632" cy="1115568"/>
+          </a:xfrm>
+          <a:prstGeom prst="roundRect">
+            <a:avLst/>
+          </a:prstGeom>
+          <a:solidFill>
+            <a:srgbClr val="FFFFFF"/>
+          </a:solidFill>
+          <a:ln w="10160">
+            <a:solidFill>
+              <a:srgbClr val="D7E3F0"/>
+            </a:solidFill>
+          </a:ln>
+        </p:spPr>
+        <p:txBody>
+          <a:bodyPr wrap="square" anchor="mid" lIns="73152" rIns="73152" tIns="73152" bIns="73152"/>
+          <a:lstStyle/>
+          <a:p>
+            <a:pPr algn="ctr">
+              <a:spcAft>
+                <a:spcPts val="0"/>
+              </a:spcAft>
+            </a:pPr>
+            <a:r>
+              <a:rPr lang="es-MX" sz="1200" b="1">
+                <a:solidFill>
+                  <a:srgbClr val="F5A623"/>
+                </a:solidFill>
+                <a:latin typeface="Aptos"/>
+              </a:rPr>
+              <a:t>Factory</a:t>
+            </a:r>
+            <a:endParaRPr lang="es-MX" sz="1200"/>
+          </a:p>
+          <a:p>
+            <a:pPr algn="ctr">
+              <a:spcAft>
+                <a:spcPts val="0"/>
+              </a:spcAft>
+            </a:pPr>
+            <a:r>
+              <a:rPr lang="es-MX" sz="819">
+                <a:solidFill>
+                  <a:srgbClr val="64748B"/>
+                </a:solidFill>
+                <a:latin typeface="Aptos"/>
+              </a:rPr>
+              <a:t>orquestación ETL y monitoreo</a:t>
+            </a:r>
+            <a:endParaRPr lang="es-MX" sz="819"/>
+          </a:p>
+        </p:txBody>
+      </p:sp>
+      <p:sp>
+        <p:nvSpPr>
+          <p:cNvPr id="11" name="Text"/>
+          <p:cNvSpPr txBox="1"/>
+          <p:nvPr/>
+        </p:nvSpPr>
+        <p:spPr>
+          <a:xfrm>
+            <a:off x="8339328" y="2084832"/>
+            <a:ext cx="1627632" cy="1115568"/>
+          </a:xfrm>
+          <a:prstGeom prst="roundRect">
+            <a:avLst/>
+          </a:prstGeom>
+          <a:solidFill>
+            <a:srgbClr val="FFFFFF"/>
+          </a:solidFill>
+          <a:ln w="10160">
+            <a:solidFill>
+              <a:srgbClr val="D7E3F0"/>
+            </a:solidFill>
+          </a:ln>
+        </p:spPr>
+        <p:txBody>
+          <a:bodyPr wrap="square" anchor="mid" lIns="73152" rIns="73152" tIns="73152" bIns="73152"/>
+          <a:lstStyle/>
+          <a:p>
+            <a:pPr algn="ctr">
+              <a:spcAft>
+                <a:spcPts val="0"/>
+              </a:spcAft>
+            </a:pPr>
+            <a:r>
+              <a:rPr lang="es-MX" sz="1200" b="1">
+                <a:solidFill>
+                  <a:srgbClr val="22A06B"/>
+                </a:solidFill>
+                <a:latin typeface="Aptos"/>
+              </a:rPr>
+              <a:t>DataService</a:t>
+            </a:r>
+            <a:endParaRPr lang="es-MX" sz="1200"/>
+          </a:p>
+          <a:p>
+            <a:pPr algn="ctr">
+              <a:spcAft>
+                <a:spcPts val="0"/>
+              </a:spcAft>
+            </a:pPr>
+            <a:r>
+              <a:rPr lang="es-MX" sz="819">
+                <a:solidFill>
+                  <a:srgbClr val="64748B"/>
+                </a:solidFill>
+                <a:latin typeface="Aptos"/>
+              </a:rPr>
+              <a:t>endpoints para dashboards y chatbot</a:t>
+            </a:r>
+            <a:endParaRPr lang="es-MX" sz="819"/>
+          </a:p>
+        </p:txBody>
+      </p:sp>
+      <p:sp>
+        <p:nvSpPr>
+          <p:cNvPr id="12" name="Block"/>
+          <p:cNvSpPr/>
+          <p:nvPr/>
+        </p:nvSpPr>
+        <p:spPr>
+          <a:xfrm>
+            <a:off x="1188720" y="3959352"/>
+            <a:ext cx="8138160" cy="201168"/>
           </a:xfrm>
           <a:prstGeom prst="rect">
             <a:avLst/>
           </a:prstGeom>
+          <a:solidFill>
+            <a:srgbClr val="D7E3F0"/>
+          </a:solidFill>
+          <a:ln>
+            <a:noFill/>
+          </a:ln>
+        </p:spPr>
+        <p:txBody>
+          <a:bodyPr/>
+          <a:lstStyle/>
+          <a:p/>
+        </p:txBody>
+      </p:sp>
+      <p:sp>
+        <p:nvSpPr>
+          <p:cNvPr id="13" name="Text"/>
+          <p:cNvSpPr txBox="1"/>
+          <p:nvPr/>
+        </p:nvSpPr>
+        <p:spPr>
+          <a:xfrm>
+            <a:off x="804672" y="4315968"/>
+            <a:ext cx="2011680" cy="566928"/>
+          </a:xfrm>
+          <a:prstGeom prst="roundRect">
+            <a:avLst/>
+          </a:prstGeom>
+          <a:solidFill>
+            <a:srgbClr val="FFFFFF"/>
+          </a:solidFill>
+          <a:ln w="10160">
+            <a:solidFill>
+              <a:srgbClr val="D7E3F0"/>
+            </a:solidFill>
+          </a:ln>
+        </p:spPr>
+        <p:txBody>
+          <a:bodyPr wrap="square" anchor="mid" lIns="73152" rIns="73152" tIns="73152" bIns="73152"/>
+          <a:lstStyle/>
+          <a:p>
+            <a:pPr algn="ctr">
+              <a:spcAft>
+                <a:spcPts val="0"/>
+              </a:spcAft>
+            </a:pPr>
+            <a:r>
+              <a:rPr lang="es-MX" sz="1300" b="1">
+                <a:solidFill>
+                  <a:srgbClr val="2B6CB0"/>
+                </a:solidFill>
+                <a:latin typeface="Aptos"/>
+              </a:rPr>
+              <a:t>OBS</a:t>
+            </a:r>
+            <a:endParaRPr lang="es-MX" sz="1300"/>
+          </a:p>
+          <a:p>
+            <a:pPr algn="ctr">
+              <a:spcAft>
+                <a:spcPts val="0"/>
+              </a:spcAft>
+            </a:pPr>
+            <a:r>
+              <a:rPr lang="es-MX" sz="800">
+                <a:solidFill>
+                  <a:srgbClr val="64748B"/>
+                </a:solidFill>
+                <a:latin typeface="Aptos"/>
+              </a:rPr>
+              <a:t>raw / processed / results</a:t>
+            </a:r>
+            <a:endParaRPr lang="es-MX" sz="800"/>
+          </a:p>
+        </p:txBody>
+      </p:sp>
+      <p:sp>
+        <p:nvSpPr>
+          <p:cNvPr id="14" name="Text"/>
+          <p:cNvSpPr txBox="1"/>
+          <p:nvPr/>
+        </p:nvSpPr>
+        <p:spPr>
+          <a:xfrm>
+            <a:off x="3273552" y="4315968"/>
+            <a:ext cx="2011680" cy="566928"/>
+          </a:xfrm>
+          <a:prstGeom prst="roundRect">
+            <a:avLst/>
+          </a:prstGeom>
+          <a:solidFill>
+            <a:srgbClr val="FFFFFF"/>
+          </a:solidFill>
+          <a:ln w="10160">
+            <a:solidFill>
+              <a:srgbClr val="D7E3F0"/>
+            </a:solidFill>
+          </a:ln>
+        </p:spPr>
+        <p:txBody>
+          <a:bodyPr wrap="square" anchor="mid" lIns="73152" rIns="73152" tIns="73152" bIns="73152"/>
+          <a:lstStyle/>
+          <a:p>
+            <a:pPr algn="ctr">
+              <a:spcAft>
+                <a:spcPts val="0"/>
+              </a:spcAft>
+            </a:pPr>
+            <a:r>
+              <a:rPr lang="es-MX" sz="1300" b="1">
+                <a:solidFill>
+                  <a:srgbClr val="2B6CB0"/>
+                </a:solidFill>
+                <a:latin typeface="Aptos"/>
+              </a:rPr>
+              <a:t>DLI</a:t>
+            </a:r>
+            <a:endParaRPr lang="es-MX" sz="1300"/>
+          </a:p>
+          <a:p>
+            <a:pPr algn="ctr">
+              <a:spcAft>
+                <a:spcPts val="0"/>
+              </a:spcAft>
+            </a:pPr>
+            <a:r>
+              <a:rPr lang="es-MX" sz="800">
+                <a:solidFill>
+                  <a:srgbClr val="64748B"/>
+                </a:solidFill>
+                <a:latin typeface="Aptos"/>
+              </a:rPr>
+              <a:t>serverless SQL + transforms</a:t>
+            </a:r>
+            <a:endParaRPr lang="es-MX" sz="800"/>
+          </a:p>
+        </p:txBody>
+      </p:sp>
+      <p:sp>
+        <p:nvSpPr>
+          <p:cNvPr id="15" name="Text"/>
+          <p:cNvSpPr txBox="1"/>
+          <p:nvPr/>
+        </p:nvSpPr>
+        <p:spPr>
+          <a:xfrm>
+            <a:off x="5742432" y="4315968"/>
+            <a:ext cx="2011680" cy="566928"/>
+          </a:xfrm>
+          <a:prstGeom prst="roundRect">
+            <a:avLst/>
+          </a:prstGeom>
+          <a:solidFill>
+            <a:srgbClr val="FFFFFF"/>
+          </a:solidFill>
+          <a:ln w="10160">
+            <a:solidFill>
+              <a:srgbClr val="D7E3F0"/>
+            </a:solidFill>
+          </a:ln>
+        </p:spPr>
+        <p:txBody>
+          <a:bodyPr wrap="square" anchor="mid" lIns="73152" rIns="73152" tIns="73152" bIns="73152"/>
+          <a:lstStyle/>
+          <a:p>
+            <a:pPr algn="ctr">
+              <a:spcAft>
+                <a:spcPts val="0"/>
+              </a:spcAft>
+            </a:pPr>
+            <a:r>
+              <a:rPr lang="es-MX" sz="1300" b="1">
+                <a:solidFill>
+                  <a:srgbClr val="2B6CB0"/>
+                </a:solidFill>
+                <a:latin typeface="Aptos"/>
+              </a:rPr>
+              <a:t>DWS</a:t>
+            </a:r>
+            <a:endParaRPr lang="es-MX" sz="1300"/>
+          </a:p>
+          <a:p>
+            <a:pPr algn="ctr">
+              <a:spcAft>
+                <a:spcPts val="0"/>
+              </a:spcAft>
+            </a:pPr>
+            <a:r>
+              <a:rPr lang="es-MX" sz="800">
+                <a:solidFill>
+                  <a:srgbClr val="64748B"/>
+                </a:solidFill>
+                <a:latin typeface="Aptos"/>
+              </a:rPr>
+              <a:t>risk marts + analytics</a:t>
+            </a:r>
+            <a:endParaRPr lang="es-MX" sz="800"/>
+          </a:p>
+        </p:txBody>
+      </p:sp>
+      <p:sp>
+        <p:nvSpPr>
+          <p:cNvPr id="16" name="Text"/>
+          <p:cNvSpPr txBox="1"/>
+          <p:nvPr/>
+        </p:nvSpPr>
+        <p:spPr>
+          <a:xfrm>
+            <a:off x="8211312" y="4315968"/>
+            <a:ext cx="2011680" cy="566928"/>
+          </a:xfrm>
+          <a:prstGeom prst="roundRect">
+            <a:avLst/>
+          </a:prstGeom>
+          <a:solidFill>
+            <a:srgbClr val="FFFFFF"/>
+          </a:solidFill>
+          <a:ln w="10160">
+            <a:solidFill>
+              <a:srgbClr val="D7E3F0"/>
+            </a:solidFill>
+          </a:ln>
+        </p:spPr>
+        <p:txBody>
+          <a:bodyPr wrap="square" anchor="mid" lIns="73152" rIns="73152" tIns="73152" bIns="73152"/>
+          <a:lstStyle/>
+          <a:p>
+            <a:pPr algn="ctr">
+              <a:spcAft>
+                <a:spcPts val="0"/>
+              </a:spcAft>
+            </a:pPr>
+            <a:r>
+              <a:rPr lang="es-MX" sz="1300" b="1">
+                <a:solidFill>
+                  <a:srgbClr val="2B6CB0"/>
+                </a:solidFill>
+                <a:latin typeface="Aptos"/>
+              </a:rPr>
+              <a:t>Apps</a:t>
+            </a:r>
+            <a:endParaRPr lang="es-MX" sz="1300"/>
+          </a:p>
+          <a:p>
+            <a:pPr algn="ctr">
+              <a:spcAft>
+                <a:spcPts val="0"/>
+              </a:spcAft>
+            </a:pPr>
+            <a:r>
+              <a:rPr lang="es-MX" sz="800">
+                <a:solidFill>
+                  <a:srgbClr val="64748B"/>
+                </a:solidFill>
+                <a:latin typeface="Aptos"/>
+              </a:rPr>
+              <a:t>Dify chatbot + dashboard</a:t>
+            </a:r>
+            <a:endParaRPr lang="es-MX" sz="800"/>
+          </a:p>
+        </p:txBody>
+      </p:sp>
+      <p:sp>
+        <p:nvSpPr>
+          <p:cNvPr id="17" name="Text"/>
+          <p:cNvSpPr txBox="1"/>
+          <p:nvPr/>
+        </p:nvSpPr>
+        <p:spPr>
+          <a:xfrm>
+            <a:off x="658368" y="5504688"/>
+            <a:ext cx="9326880" cy="384048"/>
+          </a:xfrm>
+          <a:prstGeom prst="roundRect">
+            <a:avLst/>
+          </a:prstGeom>
+          <a:solidFill>
+            <a:srgbClr val="08233F"/>
+          </a:solidFill>
+          <a:ln>
+            <a:noFill/>
+          </a:ln>
+        </p:spPr>
+        <p:txBody>
+          <a:bodyPr wrap="square" anchor="mid" lIns="73152" rIns="73152" tIns="73152" bIns="73152"/>
+          <a:lstStyle/>
+          <a:p>
+            <a:pPr algn="ctr">
+              <a:spcAft>
+                <a:spcPts val="0"/>
+              </a:spcAft>
+            </a:pPr>
+            <a:r>
+              <a:rPr lang="es-MX" sz="1150">
+                <a:solidFill>
+                  <a:srgbClr val="FFFFFF"/>
+                </a:solidFill>
+                <a:latin typeface="Aptos"/>
+              </a:rPr>
+              <a:t>Mensaje para AYCO: el demo puede crecer hacia controles auditables sin cambiar la historia funcional.</a:t>
+            </a:r>
+            <a:endParaRPr lang="es-MX" sz="1150"/>
+          </a:p>
+        </p:txBody>
+      </p:sp>
+      <p:sp>
+        <p:nvSpPr>
+          <p:cNvPr id="18" name="Footer"/>
+          <p:cNvSpPr txBox="1"/>
+          <p:nvPr/>
+        </p:nvSpPr>
+        <p:spPr>
+          <a:xfrm>
+            <a:off x="502920" y="6446520"/>
+            <a:ext cx="9875520" cy="228600"/>
+          </a:xfrm>
+          <a:prstGeom prst="rect">
+            <a:avLst/>
+          </a:prstGeom>
           <a:noFill/>
-        </p:spPr>
-        <p:txBody>
-          <a:bodyPr wrap="square">
-            <a:spAutoFit/>
-          </a:bodyPr>
+          <a:ln>
+            <a:noFill/>
+          </a:ln>
+        </p:spPr>
+        <p:txBody>
+          <a:bodyPr wrap="square" anchor="mid" lIns="73152" rIns="73152" tIns="73152" bIns="73152"/>
+          <a:lstStyle/>
+          <a:p>
+            <a:pPr algn="l">
+              <a:spcAft>
+                <a:spcPts val="0"/>
+              </a:spcAft>
+            </a:pPr>
+            <a:r>
+              <a:rPr lang="es-MX" sz="750">
+                <a:solidFill>
+                  <a:srgbClr val="64748B"/>
+                </a:solidFill>
+                <a:latin typeface="Aptos"/>
+              </a:rPr>
+              <a:t>Workshop Huawei Cloud x Salinas | Mayo 8, 2026 | México Century Plaza</a:t>
+            </a:r>
+            <a:endParaRPr lang="es-MX" sz="750"/>
+          </a:p>
+        </p:txBody>
+      </p:sp>
+      <p:sp>
+        <p:nvSpPr>
+          <p:cNvPr id="19" name="Page"/>
+          <p:cNvSpPr txBox="1"/>
+          <p:nvPr/>
+        </p:nvSpPr>
+        <p:spPr>
+          <a:xfrm>
+            <a:off x="11064240" y="6446520"/>
+            <a:ext cx="594360" cy="228600"/>
+          </a:xfrm>
+          <a:prstGeom prst="rect">
+            <a:avLst/>
+          </a:prstGeom>
+          <a:noFill/>
+          <a:ln>
+            <a:noFill/>
+          </a:ln>
+        </p:spPr>
+        <p:txBody>
+          <a:bodyPr wrap="square" anchor="mid" lIns="73152" rIns="73152" tIns="73152" bIns="73152"/>
           <a:lstStyle/>
           <a:p>
             <a:pPr algn="r">
-              <a:defRPr sz="900" b="0">
-                <a:solidFill>
-                  <a:srgbClr val="555555"/>
-                </a:solidFill>
-                <a:latin typeface="Calibri"/>
-              </a:defRPr>
-            </a:pPr>
-            <a:r>
+              <a:spcAft>
+                <a:spcPts val="0"/>
+              </a:spcAft>
+            </a:pPr>
+            <a:r>
+              <a:rPr lang="es-MX" sz="750">
+                <a:solidFill>
+                  <a:srgbClr val="64748B"/>
+                </a:solidFill>
+                <a:latin typeface="Aptos"/>
+              </a:rPr>
               <a:t>4 / 5</a:t>
             </a:r>
+            <a:endParaRPr lang="es-MX" sz="750"/>
           </a:p>
         </p:txBody>
       </p:sp>
@@ -5183,1315 +7154,712 @@
 </file>
 
 <file path=ppt/slides/slide5.xml><?xml version="1.0" encoding="utf-8"?>
-<p:sld xmlns:a="http://schemas.openxmlformats.org/drawingml/2006/main" xmlns:p="http://schemas.openxmlformats.org/presentationml/2006/main" xmlns:r="http://schemas.openxmlformats.org/officeDocument/2006/relationships">
+<p:sld xmlns:a="http://schemas.openxmlformats.org/drawingml/2006/main" xmlns:r="http://schemas.openxmlformats.org/officeDocument/2006/relationships" xmlns:p="http://schemas.openxmlformats.org/presentationml/2006/main">
   <p:cSld>
-    <p:bg>
-      <p:bgPr>
-        <a:solidFill>
-          <a:srgbClr val="0A0A0A"/>
-        </a:solidFill>
-        <a:effectLst/>
-      </p:bgPr>
-    </p:bg>
     <p:spTree>
       <p:nvGrpSpPr>
         <p:cNvPr id="1" name=""/>
         <p:cNvGrpSpPr/>
         <p:nvPr/>
       </p:nvGrpSpPr>
-      <p:grpSpPr/>
-      <p:sp>
-        <p:nvSpPr>
-          <p:cNvPr id="2" name="Rectangle 1"/>
+      <p:grpSpPr>
+        <a:xfrm>
+          <a:off x="0" y="0"/>
+          <a:ext cx="12192000" cy="6858000"/>
+          <a:chOff x="0" y="0"/>
+          <a:chExt cx="12192000" cy="6858000"/>
+        </a:xfrm>
+      </p:grpSpPr>
+      <p:sp>
+        <p:nvSpPr>
+          <p:cNvPr id="2" name="Block"/>
           <p:cNvSpPr/>
           <p:nvPr/>
         </p:nvSpPr>
         <p:spPr>
           <a:xfrm>
             <a:off x="0" y="0"/>
-            <a:ext cx="12191695" cy="54864"/>
+            <a:ext cx="12191695" cy="6858000"/>
           </a:xfrm>
           <a:prstGeom prst="rect">
             <a:avLst/>
           </a:prstGeom>
           <a:solidFill>
-            <a:srgbClr val="E4002B"/>
+            <a:srgbClr val="F7FAFC"/>
           </a:solidFill>
           <a:ln>
             <a:noFill/>
           </a:ln>
         </p:spPr>
-        <p:style>
-          <a:lnRef idx="1">
-            <a:schemeClr val="accent1"/>
-          </a:lnRef>
-          <a:fillRef idx="3">
-            <a:schemeClr val="accent1"/>
-          </a:fillRef>
-          <a:effectRef idx="2">
-            <a:schemeClr val="accent1"/>
-          </a:effectRef>
-          <a:fontRef idx="minor">
-            <a:schemeClr val="lt1"/>
-          </a:fontRef>
-        </p:style>
-        <p:txBody>
-          <a:bodyPr rtlCol="0" anchor="ctr"/>
-          <a:lstStyle/>
-          <a:p>
-            <a:pPr algn="ctr"/>
-          </a:p>
-        </p:txBody>
-      </p:sp>
-      <p:sp>
-        <p:nvSpPr>
-          <p:cNvPr id="3" name="TextBox 2"/>
-          <p:cNvSpPr txBox="1"/>
-          <p:nvPr/>
-        </p:nvSpPr>
-        <p:spPr>
-          <a:xfrm>
-            <a:off x="457200" y="274320"/>
-            <a:ext cx="9144000" cy="548640"/>
+        <p:txBody>
+          <a:bodyPr/>
+          <a:lstStyle/>
+          <a:p/>
+        </p:txBody>
+      </p:sp>
+      <p:sp>
+        <p:nvSpPr>
+          <p:cNvPr id="3" name="Block"/>
+          <p:cNvSpPr/>
+          <p:nvPr/>
+        </p:nvSpPr>
+        <p:spPr>
+          <a:xfrm>
+            <a:off x="0" y="0"/>
+            <a:ext cx="201168" cy="6858000"/>
           </a:xfrm>
           <a:prstGeom prst="rect">
             <a:avLst/>
           </a:prstGeom>
-          <a:noFill/>
-        </p:spPr>
-        <p:txBody>
-          <a:bodyPr wrap="square">
-            <a:spAutoFit/>
-          </a:bodyPr>
-          <a:lstStyle/>
-          <a:p>
-            <a:pPr algn="l">
-              <a:defRPr sz="2800" b="1">
-                <a:solidFill>
-                  <a:srgbClr val="FFFFFF"/>
-                </a:solidFill>
-                <a:latin typeface="Calibri"/>
-              </a:defRPr>
-            </a:pPr>
-            <a:r>
-              <a:t>Impact &amp; Security Architecture</a:t>
-            </a:r>
-          </a:p>
-        </p:txBody>
-      </p:sp>
-      <p:sp>
-        <p:nvSpPr>
-          <p:cNvPr id="4" name="TextBox 3"/>
-          <p:cNvSpPr txBox="1"/>
-          <p:nvPr/>
-        </p:nvSpPr>
-        <p:spPr>
-          <a:xfrm>
-            <a:off x="457200" y="822960"/>
-            <a:ext cx="9144000" cy="365760"/>
-          </a:xfrm>
-          <a:prstGeom prst="rect">
-            <a:avLst/>
-          </a:prstGeom>
-          <a:noFill/>
-        </p:spPr>
-        <p:txBody>
-          <a:bodyPr wrap="square">
-            <a:spAutoFit/>
-          </a:bodyPr>
-          <a:lstStyle/>
-          <a:p>
-            <a:pPr algn="l">
-              <a:defRPr sz="1400" b="0">
-                <a:solidFill>
-                  <a:srgbClr val="CCCCCC"/>
-                </a:solidFill>
-                <a:latin typeface="Calibri"/>
-              </a:defRPr>
-            </a:pPr>
-            <a:r>
-              <a:t>Key metrics and security controls</a:t>
-            </a:r>
-          </a:p>
-        </p:txBody>
-      </p:sp>
-      <p:sp>
-        <p:nvSpPr>
-          <p:cNvPr id="5" name="Rectangle 4"/>
-          <p:cNvSpPr/>
-          <p:nvPr/>
-        </p:nvSpPr>
-        <p:spPr>
-          <a:xfrm>
-            <a:off x="457200" y="1188720"/>
-            <a:ext cx="2286000" cy="36576"/>
-          </a:xfrm>
-          <a:prstGeom prst="rect">
-            <a:avLst/>
-          </a:prstGeom>
-          <a:solidFill>
-            <a:srgbClr val="E4002B"/>
+          <a:solidFill>
+            <a:srgbClr val="D64545"/>
           </a:solidFill>
           <a:ln>
             <a:noFill/>
           </a:ln>
         </p:spPr>
-        <p:style>
-          <a:lnRef idx="1">
-            <a:schemeClr val="accent1"/>
-          </a:lnRef>
-          <a:fillRef idx="3">
-            <a:schemeClr val="accent1"/>
-          </a:fillRef>
-          <a:effectRef idx="2">
-            <a:schemeClr val="accent1"/>
-          </a:effectRef>
-          <a:fontRef idx="minor">
-            <a:schemeClr val="lt1"/>
-          </a:fontRef>
-        </p:style>
-        <p:txBody>
-          <a:bodyPr rtlCol="0" anchor="ctr"/>
-          <a:lstStyle/>
-          <a:p>
-            <a:pPr algn="ctr"/>
-          </a:p>
-        </p:txBody>
-      </p:sp>
-      <p:sp>
-        <p:nvSpPr>
-          <p:cNvPr id="6" name="TextBox 5"/>
+        <p:txBody>
+          <a:bodyPr/>
+          <a:lstStyle/>
+          <a:p/>
+        </p:txBody>
+      </p:sp>
+      <p:sp>
+        <p:nvSpPr>
+          <p:cNvPr id="4" name="Kicker"/>
           <p:cNvSpPr txBox="1"/>
           <p:nvPr/>
         </p:nvSpPr>
         <p:spPr>
           <a:xfrm>
-            <a:off x="457200" y="1463040"/>
-            <a:ext cx="1737360" cy="548640"/>
+            <a:off x="502920" y="256032"/>
+            <a:ext cx="4572000" cy="256032"/>
           </a:xfrm>
           <a:prstGeom prst="rect">
             <a:avLst/>
           </a:prstGeom>
           <a:noFill/>
-        </p:spPr>
-        <p:txBody>
-          <a:bodyPr wrap="square">
-            <a:spAutoFit/>
-          </a:bodyPr>
-          <a:lstStyle/>
-          <a:p>
-            <a:pPr algn="ctr">
-              <a:defRPr sz="3200" b="1">
-                <a:solidFill>
-                  <a:srgbClr val="E4002B"/>
-                </a:solidFill>
-                <a:latin typeface="Calibri"/>
-              </a:defRPr>
-            </a:pPr>
-            <a:r>
-              <a:t>2,300</a:t>
-            </a:r>
-          </a:p>
-        </p:txBody>
-      </p:sp>
-      <p:sp>
-        <p:nvSpPr>
-          <p:cNvPr id="7" name="TextBox 6"/>
-          <p:cNvSpPr txBox="1"/>
-          <p:nvPr/>
-        </p:nvSpPr>
-        <p:spPr>
-          <a:xfrm>
-            <a:off x="457200" y="2011680"/>
-            <a:ext cx="1737360" cy="365760"/>
-          </a:xfrm>
-          <a:prstGeom prst="rect">
-            <a:avLst/>
-          </a:prstGeom>
-          <a:noFill/>
-        </p:spPr>
-        <p:txBody>
-          <a:bodyPr wrap="square">
-            <a:spAutoFit/>
-          </a:bodyPr>
-          <a:lstStyle/>
-          <a:p>
-            <a:pPr algn="ctr">
-              <a:defRPr sz="1100" b="0">
-                <a:solidFill>
-                  <a:srgbClr val="999999"/>
-                </a:solidFill>
-                <a:latin typeface="Calibri"/>
-              </a:defRPr>
-            </a:pPr>
-            <a:r>
-              <a:t>vendors scored</a:t>
-            </a:r>
-          </a:p>
-        </p:txBody>
-      </p:sp>
-      <p:sp>
-        <p:nvSpPr>
-          <p:cNvPr id="8" name="TextBox 7"/>
-          <p:cNvSpPr txBox="1"/>
-          <p:nvPr/>
-        </p:nvSpPr>
-        <p:spPr>
-          <a:xfrm>
-            <a:off x="2331720" y="1463040"/>
-            <a:ext cx="1737360" cy="548640"/>
-          </a:xfrm>
-          <a:prstGeom prst="rect">
-            <a:avLst/>
-          </a:prstGeom>
-          <a:noFill/>
-        </p:spPr>
-        <p:txBody>
-          <a:bodyPr wrap="square">
-            <a:spAutoFit/>
-          </a:bodyPr>
-          <a:lstStyle/>
-          <a:p>
-            <a:pPr algn="ctr">
-              <a:defRPr sz="3200" b="1">
-                <a:solidFill>
-                  <a:srgbClr val="34D399"/>
-                </a:solidFill>
-                <a:latin typeface="Calibri"/>
-              </a:defRPr>
-            </a:pPr>
-            <a:r>
-              <a:t>8 min</a:t>
-            </a:r>
-          </a:p>
-        </p:txBody>
-      </p:sp>
-      <p:sp>
-        <p:nvSpPr>
-          <p:cNvPr id="9" name="TextBox 8"/>
-          <p:cNvSpPr txBox="1"/>
-          <p:nvPr/>
-        </p:nvSpPr>
-        <p:spPr>
-          <a:xfrm>
-            <a:off x="2331720" y="2011680"/>
-            <a:ext cx="1737360" cy="365760"/>
-          </a:xfrm>
-          <a:prstGeom prst="rect">
-            <a:avLst/>
-          </a:prstGeom>
-          <a:noFill/>
-        </p:spPr>
-        <p:txBody>
-          <a:bodyPr wrap="square">
-            <a:spAutoFit/>
-          </a:bodyPr>
-          <a:lstStyle/>
-          <a:p>
-            <a:pPr algn="ctr">
-              <a:defRPr sz="1100" b="0">
-                <a:solidFill>
-                  <a:srgbClr val="999999"/>
-                </a:solidFill>
-                <a:latin typeface="Calibri"/>
-              </a:defRPr>
-            </a:pPr>
-            <a:r>
-              <a:t>vs 2 semanas</a:t>
-            </a:r>
-          </a:p>
-        </p:txBody>
-      </p:sp>
-      <p:sp>
-        <p:nvSpPr>
-          <p:cNvPr id="10" name="TextBox 9"/>
-          <p:cNvSpPr txBox="1"/>
-          <p:nvPr/>
-        </p:nvSpPr>
-        <p:spPr>
-          <a:xfrm>
-            <a:off x="4206240" y="1463040"/>
-            <a:ext cx="1737360" cy="548640"/>
-          </a:xfrm>
-          <a:prstGeom prst="rect">
-            <a:avLst/>
-          </a:prstGeom>
-          <a:noFill/>
-        </p:spPr>
-        <p:txBody>
-          <a:bodyPr wrap="square">
-            <a:spAutoFit/>
-          </a:bodyPr>
-          <a:lstStyle/>
-          <a:p>
-            <a:pPr algn="ctr">
-              <a:defRPr sz="3200" b="1">
-                <a:solidFill>
-                  <a:srgbClr val="A78BFA"/>
-                </a:solidFill>
-                <a:latin typeface="Calibri"/>
-              </a:defRPr>
-            </a:pPr>
-            <a:r>
-              <a:t>4 niveles</a:t>
-            </a:r>
-          </a:p>
-        </p:txBody>
-      </p:sp>
-      <p:sp>
-        <p:nvSpPr>
-          <p:cNvPr id="11" name="TextBox 10"/>
-          <p:cNvSpPr txBox="1"/>
-          <p:nvPr/>
-        </p:nvSpPr>
-        <p:spPr>
-          <a:xfrm>
-            <a:off x="4206240" y="2011680"/>
-            <a:ext cx="1737360" cy="365760"/>
-          </a:xfrm>
-          <a:prstGeom prst="rect">
-            <a:avLst/>
-          </a:prstGeom>
-          <a:noFill/>
-        </p:spPr>
-        <p:txBody>
-          <a:bodyPr wrap="square">
-            <a:spAutoFit/>
-          </a:bodyPr>
-          <a:lstStyle/>
-          <a:p>
-            <a:pPr algn="ctr">
-              <a:defRPr sz="1100" b="0">
-                <a:solidFill>
-                  <a:srgbClr val="999999"/>
-                </a:solidFill>
-                <a:latin typeface="Calibri"/>
-              </a:defRPr>
-            </a:pPr>
-            <a:r>
-              <a:t>Bajo → Crítico</a:t>
-            </a:r>
-          </a:p>
-        </p:txBody>
-      </p:sp>
-      <p:sp>
-        <p:nvSpPr>
-          <p:cNvPr id="12" name="TextBox 11"/>
-          <p:cNvSpPr txBox="1"/>
-          <p:nvPr/>
-        </p:nvSpPr>
-        <p:spPr>
-          <a:xfrm>
-            <a:off x="6080759" y="1463040"/>
-            <a:ext cx="1737360" cy="548640"/>
-          </a:xfrm>
-          <a:prstGeom prst="rect">
-            <a:avLst/>
-          </a:prstGeom>
-          <a:noFill/>
-        </p:spPr>
-        <p:txBody>
-          <a:bodyPr wrap="square">
-            <a:spAutoFit/>
-          </a:bodyPr>
-          <a:lstStyle/>
-          <a:p>
-            <a:pPr algn="ctr">
-              <a:defRPr sz="3200" b="1">
-                <a:solidFill>
-                  <a:srgbClr val="22D3EE"/>
-                </a:solidFill>
-                <a:latin typeface="Calibri"/>
-              </a:defRPr>
-            </a:pPr>
-            <a:r>
-              <a:t>$133M</a:t>
-            </a:r>
-          </a:p>
-        </p:txBody>
-      </p:sp>
-      <p:sp>
-        <p:nvSpPr>
-          <p:cNvPr id="13" name="TextBox 12"/>
-          <p:cNvSpPr txBox="1"/>
-          <p:nvPr/>
-        </p:nvSpPr>
-        <p:spPr>
-          <a:xfrm>
-            <a:off x="6080759" y="2011680"/>
-            <a:ext cx="1737360" cy="365760"/>
-          </a:xfrm>
-          <a:prstGeom prst="rect">
-            <a:avLst/>
-          </a:prstGeom>
-          <a:noFill/>
-        </p:spPr>
-        <p:txBody>
-          <a:bodyPr wrap="square">
-            <a:spAutoFit/>
-          </a:bodyPr>
-          <a:lstStyle/>
-          <a:p>
-            <a:pPr algn="ctr">
-              <a:defRPr sz="1100" b="0">
-                <a:solidFill>
-                  <a:srgbClr val="999999"/>
-                </a:solidFill>
-                <a:latin typeface="Calibri"/>
-              </a:defRPr>
-            </a:pPr>
-            <a:r>
-              <a:t>MXN exposure</a:t>
-            </a:r>
-          </a:p>
-        </p:txBody>
-      </p:sp>
-      <p:sp>
-        <p:nvSpPr>
-          <p:cNvPr id="14" name="TextBox 13"/>
-          <p:cNvSpPr txBox="1"/>
-          <p:nvPr/>
-        </p:nvSpPr>
-        <p:spPr>
-          <a:xfrm>
-            <a:off x="7955279" y="1463040"/>
-            <a:ext cx="1737360" cy="548640"/>
-          </a:xfrm>
-          <a:prstGeom prst="rect">
-            <a:avLst/>
-          </a:prstGeom>
-          <a:noFill/>
-        </p:spPr>
-        <p:txBody>
-          <a:bodyPr wrap="square">
-            <a:spAutoFit/>
-          </a:bodyPr>
-          <a:lstStyle/>
-          <a:p>
-            <a:pPr algn="ctr">
-              <a:defRPr sz="3200" b="1">
-                <a:solidFill>
-                  <a:srgbClr val="FF9800"/>
-                </a:solidFill>
-                <a:latin typeface="Calibri"/>
-              </a:defRPr>
-            </a:pPr>
-            <a:r>
-              <a:t>$0.0001</a:t>
-            </a:r>
-          </a:p>
-        </p:txBody>
-      </p:sp>
-      <p:sp>
-        <p:nvSpPr>
-          <p:cNvPr id="15" name="TextBox 14"/>
-          <p:cNvSpPr txBox="1"/>
-          <p:nvPr/>
-        </p:nvSpPr>
-        <p:spPr>
-          <a:xfrm>
-            <a:off x="7955279" y="2011680"/>
-            <a:ext cx="1737360" cy="365760"/>
-          </a:xfrm>
-          <a:prstGeom prst="rect">
-            <a:avLst/>
-          </a:prstGeom>
-          <a:noFill/>
-        </p:spPr>
-        <p:txBody>
-          <a:bodyPr wrap="square">
-            <a:spAutoFit/>
-          </a:bodyPr>
-          <a:lstStyle/>
-          <a:p>
-            <a:pPr algn="ctr">
-              <a:defRPr sz="1100" b="0">
-                <a:solidFill>
-                  <a:srgbClr val="999999"/>
-                </a:solidFill>
-                <a:latin typeface="Calibri"/>
-              </a:defRPr>
-            </a:pPr>
-            <a:r>
-              <a:t>per contract cost</a:t>
-            </a:r>
-          </a:p>
-        </p:txBody>
-      </p:sp>
-      <p:sp>
-        <p:nvSpPr>
-          <p:cNvPr id="16" name="TextBox 15"/>
-          <p:cNvSpPr txBox="1"/>
-          <p:nvPr/>
-        </p:nvSpPr>
-        <p:spPr>
-          <a:xfrm>
-            <a:off x="9829800" y="1463040"/>
-            <a:ext cx="1737360" cy="548640"/>
-          </a:xfrm>
-          <a:prstGeom prst="rect">
-            <a:avLst/>
-          </a:prstGeom>
-          <a:noFill/>
-        </p:spPr>
-        <p:txBody>
-          <a:bodyPr wrap="square">
-            <a:spAutoFit/>
-          </a:bodyPr>
-          <a:lstStyle/>
-          <a:p>
-            <a:pPr algn="ctr">
-              <a:defRPr sz="3200" b="1">
-                <a:solidFill>
-                  <a:srgbClr val="34D399"/>
-                </a:solidFill>
-                <a:latin typeface="Calibri"/>
-              </a:defRPr>
-            </a:pPr>
-            <a:r>
-              <a:t>Dry run</a:t>
-            </a:r>
-          </a:p>
-        </p:txBody>
-      </p:sp>
-      <p:sp>
-        <p:nvSpPr>
-          <p:cNvPr id="17" name="TextBox 16"/>
-          <p:cNvSpPr txBox="1"/>
-          <p:nvPr/>
-        </p:nvSpPr>
-        <p:spPr>
-          <a:xfrm>
-            <a:off x="9829800" y="2011680"/>
-            <a:ext cx="1737360" cy="365760"/>
-          </a:xfrm>
-          <a:prstGeom prst="rect">
-            <a:avLst/>
-          </a:prstGeom>
-          <a:noFill/>
-        </p:spPr>
-        <p:txBody>
-          <a:bodyPr wrap="square">
-            <a:spAutoFit/>
-          </a:bodyPr>
-          <a:lstStyle/>
-          <a:p>
-            <a:pPr algn="ctr">
-              <a:defRPr sz="1100" b="0">
-                <a:solidFill>
-                  <a:srgbClr val="999999"/>
-                </a:solidFill>
-                <a:latin typeface="Calibri"/>
-              </a:defRPr>
-            </a:pPr>
-            <a:r>
-              <a:t>latency</a:t>
-            </a:r>
-          </a:p>
-        </p:txBody>
-      </p:sp>
-      <p:sp>
-        <p:nvSpPr>
-          <p:cNvPr id="18" name="TextBox 17"/>
-          <p:cNvSpPr txBox="1"/>
-          <p:nvPr/>
-        </p:nvSpPr>
-        <p:spPr>
-          <a:xfrm>
-            <a:off x="457200" y="2926080"/>
-            <a:ext cx="3657600" cy="365760"/>
-          </a:xfrm>
-          <a:prstGeom prst="rect">
-            <a:avLst/>
-          </a:prstGeom>
-          <a:noFill/>
-        </p:spPr>
-        <p:txBody>
-          <a:bodyPr wrap="square">
-            <a:spAutoFit/>
-          </a:bodyPr>
-          <a:lstStyle/>
-          <a:p>
-            <a:pPr algn="l">
-              <a:defRPr sz="1800" b="1">
-                <a:solidFill>
-                  <a:srgbClr val="FFFFFF"/>
-                </a:solidFill>
-                <a:latin typeface="Calibri"/>
-              </a:defRPr>
-            </a:pPr>
-            <a:r>
-              <a:t>Security Controls</a:t>
-            </a:r>
-          </a:p>
-        </p:txBody>
-      </p:sp>
-      <p:sp>
-        <p:nvSpPr>
-          <p:cNvPr id="19" name="Rectangle 18"/>
-          <p:cNvSpPr/>
-          <p:nvPr/>
-        </p:nvSpPr>
-        <p:spPr>
-          <a:xfrm>
-            <a:off x="457200" y="3246120"/>
-            <a:ext cx="1371600" cy="27432"/>
-          </a:xfrm>
-          <a:prstGeom prst="rect">
-            <a:avLst/>
-          </a:prstGeom>
-          <a:solidFill>
-            <a:srgbClr val="E4002B"/>
-          </a:solidFill>
           <a:ln>
             <a:noFill/>
           </a:ln>
         </p:spPr>
-        <p:style>
-          <a:lnRef idx="1">
-            <a:schemeClr val="accent1"/>
-          </a:lnRef>
-          <a:fillRef idx="3">
-            <a:schemeClr val="accent1"/>
-          </a:fillRef>
-          <a:effectRef idx="2">
-            <a:schemeClr val="accent1"/>
-          </a:effectRef>
-          <a:fontRef idx="minor">
-            <a:schemeClr val="lt1"/>
-          </a:fontRef>
-        </p:style>
-        <p:txBody>
-          <a:bodyPr rtlCol="0" anchor="ctr"/>
-          <a:lstStyle/>
-          <a:p>
-            <a:pPr algn="ctr"/>
-          </a:p>
-        </p:txBody>
-      </p:sp>
-      <p:sp>
-        <p:nvSpPr>
-          <p:cNvPr id="20" name="TextBox 19"/>
+        <p:txBody>
+          <a:bodyPr wrap="square" anchor="mid" lIns="73152" rIns="73152" tIns="73152" bIns="73152"/>
+          <a:lstStyle/>
+          <a:p>
+            <a:pPr algn="l">
+              <a:spcAft>
+                <a:spcPts val="0"/>
+              </a:spcAft>
+            </a:pPr>
+            <a:r>
+              <a:rPr lang="es-MX" sz="850" b="1">
+                <a:solidFill>
+                  <a:srgbClr val="1FB6C9"/>
+                </a:solidFill>
+                <a:latin typeface="Aptos"/>
+              </a:rPr>
+              <a:t>CIERRE EJECUTIVO</a:t>
+            </a:r>
+            <a:endParaRPr lang="es-MX" sz="850"/>
+          </a:p>
+        </p:txBody>
+      </p:sp>
+      <p:sp>
+        <p:nvSpPr>
+          <p:cNvPr id="5" name="Title"/>
           <p:cNvSpPr txBox="1"/>
           <p:nvPr/>
         </p:nvSpPr>
         <p:spPr>
           <a:xfrm>
-            <a:off x="457200" y="3474720"/>
-            <a:ext cx="5486400" cy="457200"/>
+            <a:off x="502920" y="502920"/>
+            <a:ext cx="7955280" cy="566928"/>
           </a:xfrm>
           <a:prstGeom prst="rect">
             <a:avLst/>
           </a:prstGeom>
           <a:noFill/>
-        </p:spPr>
-        <p:txBody>
-          <a:bodyPr wrap="square">
-            <a:spAutoFit/>
-          </a:bodyPr>
-          <a:lstStyle/>
-          <a:p>
-            <a:pPr algn="l">
-              <a:defRPr sz="1200" b="0">
-                <a:solidFill>
-                  <a:srgbClr val="CCCCCC"/>
-                </a:solidFill>
-                <a:latin typeface="Calibri"/>
-              </a:defRPr>
-            </a:pPr>
-            <a:r>
-              <a:t>▸  VPC Isolation — 172.16.0.0/16 private subnets</a:t>
-            </a:r>
-          </a:p>
-        </p:txBody>
-      </p:sp>
-      <p:sp>
-        <p:nvSpPr>
-          <p:cNvPr id="21" name="TextBox 20"/>
-          <p:cNvSpPr txBox="1"/>
-          <p:nvPr/>
-        </p:nvSpPr>
-        <p:spPr>
-          <a:xfrm>
-            <a:off x="6217920" y="3474720"/>
-            <a:ext cx="5486400" cy="457200"/>
-          </a:xfrm>
-          <a:prstGeom prst="rect">
-            <a:avLst/>
-          </a:prstGeom>
-          <a:noFill/>
-        </p:spPr>
-        <p:txBody>
-          <a:bodyPr wrap="square">
-            <a:spAutoFit/>
-          </a:bodyPr>
-          <a:lstStyle/>
-          <a:p>
-            <a:pPr algn="l">
-              <a:defRPr sz="1200" b="0">
-                <a:solidFill>
-                  <a:srgbClr val="CCCCCC"/>
-                </a:solidFill>
-                <a:latin typeface="Calibri"/>
-              </a:defRPr>
-            </a:pPr>
-            <a:r>
-              <a:t>▸  Security Groups — Admin, HTTP, DWS ports</a:t>
-            </a:r>
-          </a:p>
-        </p:txBody>
-      </p:sp>
-      <p:sp>
-        <p:nvSpPr>
-          <p:cNvPr id="22" name="TextBox 21"/>
-          <p:cNvSpPr txBox="1"/>
-          <p:nvPr/>
-        </p:nvSpPr>
-        <p:spPr>
-          <a:xfrm>
-            <a:off x="457200" y="3931920"/>
-            <a:ext cx="5486400" cy="457200"/>
-          </a:xfrm>
-          <a:prstGeom prst="rect">
-            <a:avLst/>
-          </a:prstGeom>
-          <a:noFill/>
-        </p:spPr>
-        <p:txBody>
-          <a:bodyPr wrap="square">
-            <a:spAutoFit/>
-          </a:bodyPr>
-          <a:lstStyle/>
-          <a:p>
-            <a:pPr algn="l">
-              <a:defRPr sz="1200" b="0">
-                <a:solidFill>
-                  <a:srgbClr val="CCCCCC"/>
-                </a:solidFill>
-                <a:latin typeface="Calibri"/>
-              </a:defRPr>
-            </a:pPr>
-            <a:r>
-              <a:t>▸  IAM RBAC — Least privilege roles</a:t>
-            </a:r>
-          </a:p>
-        </p:txBody>
-      </p:sp>
-      <p:sp>
-        <p:nvSpPr>
-          <p:cNvPr id="23" name="TextBox 22"/>
-          <p:cNvSpPr txBox="1"/>
-          <p:nvPr/>
-        </p:nvSpPr>
-        <p:spPr>
-          <a:xfrm>
-            <a:off x="6217920" y="3931920"/>
-            <a:ext cx="5486400" cy="457200"/>
-          </a:xfrm>
-          <a:prstGeom prst="rect">
-            <a:avLst/>
-          </a:prstGeom>
-          <a:noFill/>
-        </p:spPr>
-        <p:txBody>
-          <a:bodyPr wrap="square">
-            <a:spAutoFit/>
-          </a:bodyPr>
-          <a:lstStyle/>
-          <a:p>
-            <a:pPr algn="l">
-              <a:defRPr sz="1200" b="0">
-                <a:solidFill>
-                  <a:srgbClr val="CCCCCC"/>
-                </a:solidFill>
-                <a:latin typeface="Calibri"/>
-              </a:defRPr>
-            </a:pPr>
-            <a:r>
-              <a:t>▸  KMS AES-256 — OBS + DWS at rest encryption</a:t>
-            </a:r>
-          </a:p>
-        </p:txBody>
-      </p:sp>
-      <p:sp>
-        <p:nvSpPr>
-          <p:cNvPr id="24" name="TextBox 23"/>
-          <p:cNvSpPr txBox="1"/>
-          <p:nvPr/>
-        </p:nvSpPr>
-        <p:spPr>
-          <a:xfrm>
-            <a:off x="457200" y="4389120"/>
-            <a:ext cx="5486400" cy="457200"/>
-          </a:xfrm>
-          <a:prstGeom prst="rect">
-            <a:avLst/>
-          </a:prstGeom>
-          <a:noFill/>
-        </p:spPr>
-        <p:txBody>
-          <a:bodyPr wrap="square">
-            <a:spAutoFit/>
-          </a:bodyPr>
-          <a:lstStyle/>
-          <a:p>
-            <a:pPr algn="l">
-              <a:defRPr sz="1200" b="0">
-                <a:solidFill>
-                  <a:srgbClr val="CCCCCC"/>
-                </a:solidFill>
-                <a:latin typeface="Calibri"/>
-              </a:defRPr>
-            </a:pPr>
-            <a:r>
-              <a:t>▸  1Password → .env — Secrets never in git</a:t>
-            </a:r>
-          </a:p>
-        </p:txBody>
-      </p:sp>
-      <p:sp>
-        <p:nvSpPr>
-          <p:cNvPr id="25" name="TextBox 24"/>
-          <p:cNvSpPr txBox="1"/>
-          <p:nvPr/>
-        </p:nvSpPr>
-        <p:spPr>
-          <a:xfrm>
-            <a:off x="6217920" y="4389120"/>
-            <a:ext cx="5486400" cy="457200"/>
-          </a:xfrm>
-          <a:prstGeom prst="rect">
-            <a:avLst/>
-          </a:prstGeom>
-          <a:noFill/>
-        </p:spPr>
-        <p:txBody>
-          <a:bodyPr wrap="square">
-            <a:spAutoFit/>
-          </a:bodyPr>
-          <a:lstStyle/>
-          <a:p>
-            <a:pPr algn="l">
-              <a:defRPr sz="1200" b="0">
-                <a:solidFill>
-                  <a:srgbClr val="CCCCCC"/>
-                </a:solidFill>
-                <a:latin typeface="Calibri"/>
-              </a:defRPr>
-            </a:pPr>
-            <a:r>
-              <a:t>▸  CNBV alignment — AML, KYC, audit trail</a:t>
-            </a:r>
-          </a:p>
-        </p:txBody>
-      </p:sp>
-      <p:sp>
-        <p:nvSpPr>
-          <p:cNvPr id="26" name="TextBox 25"/>
-          <p:cNvSpPr txBox="1"/>
-          <p:nvPr/>
-        </p:nvSpPr>
-        <p:spPr>
-          <a:xfrm>
-            <a:off x="457200" y="5120640"/>
-            <a:ext cx="3657600" cy="365760"/>
-          </a:xfrm>
-          <a:prstGeom prst="rect">
-            <a:avLst/>
-          </a:prstGeom>
-          <a:noFill/>
-        </p:spPr>
-        <p:txBody>
-          <a:bodyPr wrap="square">
-            <a:spAutoFit/>
-          </a:bodyPr>
-          <a:lstStyle/>
-          <a:p>
-            <a:pPr algn="l">
-              <a:defRPr sz="1800" b="1">
-                <a:solidFill>
-                  <a:srgbClr val="FFFFFF"/>
-                </a:solidFill>
-                <a:latin typeface="Calibri"/>
-              </a:defRPr>
-            </a:pPr>
-            <a:r>
-              <a:t>Huawei Cloud Resources</a:t>
-            </a:r>
-          </a:p>
-        </p:txBody>
-      </p:sp>
-      <p:sp>
-        <p:nvSpPr>
-          <p:cNvPr id="27" name="Rectangle 26"/>
-          <p:cNvSpPr/>
-          <p:nvPr/>
-        </p:nvSpPr>
-        <p:spPr>
-          <a:xfrm>
-            <a:off x="457200" y="5440680"/>
-            <a:ext cx="1371600" cy="27432"/>
-          </a:xfrm>
-          <a:prstGeom prst="rect">
-            <a:avLst/>
-          </a:prstGeom>
-          <a:solidFill>
-            <a:srgbClr val="E4002B"/>
-          </a:solidFill>
           <a:ln>
             <a:noFill/>
           </a:ln>
         </p:spPr>
-        <p:style>
-          <a:lnRef idx="1">
-            <a:schemeClr val="accent1"/>
-          </a:lnRef>
-          <a:fillRef idx="3">
-            <a:schemeClr val="accent1"/>
-          </a:fillRef>
-          <a:effectRef idx="2">
-            <a:schemeClr val="accent1"/>
-          </a:effectRef>
-          <a:fontRef idx="minor">
-            <a:schemeClr val="lt1"/>
-          </a:fontRef>
-        </p:style>
-        <p:txBody>
-          <a:bodyPr rtlCol="0" anchor="ctr"/>
-          <a:lstStyle/>
-          <a:p>
-            <a:pPr algn="ctr"/>
-          </a:p>
-        </p:txBody>
-      </p:sp>
-      <p:sp>
-        <p:nvSpPr>
-          <p:cNvPr id="28" name="TextBox 27"/>
+        <p:txBody>
+          <a:bodyPr wrap="square" anchor="mid" lIns="73152" rIns="73152" tIns="73152" bIns="73152"/>
+          <a:lstStyle/>
+          <a:p>
+            <a:pPr algn="l">
+              <a:spcAft>
+                <a:spcPts val="0"/>
+              </a:spcAft>
+            </a:pPr>
+            <a:r>
+              <a:rPr lang="es-MX" sz="2500" b="1">
+                <a:solidFill>
+                  <a:srgbClr val="0B1728"/>
+                </a:solidFill>
+                <a:latin typeface="Aptos"/>
+              </a:rPr>
+              <a:t>Impacto para AYCO</a:t>
+            </a:r>
+            <a:endParaRPr lang="es-MX" sz="2500"/>
+          </a:p>
+        </p:txBody>
+      </p:sp>
+      <p:sp>
+        <p:nvSpPr>
+          <p:cNvPr id="6" name="Text"/>
           <p:cNvSpPr txBox="1"/>
           <p:nvPr/>
         </p:nvSpPr>
         <p:spPr>
           <a:xfrm>
-            <a:off x="457200" y="5623560"/>
-            <a:ext cx="5486400" cy="320040"/>
-          </a:xfrm>
-          <a:prstGeom prst="rect">
-            <a:avLst/>
-          </a:prstGeom>
-          <a:noFill/>
-        </p:spPr>
-        <p:txBody>
-          <a:bodyPr wrap="square">
-            <a:spAutoFit/>
-          </a:bodyPr>
-          <a:lstStyle/>
-          <a:p>
-            <a:pPr algn="l">
-              <a:defRPr sz="1100" b="0">
-                <a:solidFill>
-                  <a:srgbClr val="999999"/>
-                </a:solidFill>
-                <a:latin typeface="Calibri"/>
-              </a:defRPr>
-            </a:pPr>
-            <a:r>
-              <a:t>▸  ECS ×2 — Dify (s6.xlarge.2) + Web (s6.large.2)</a:t>
-            </a:r>
-          </a:p>
-        </p:txBody>
-      </p:sp>
-      <p:sp>
-        <p:nvSpPr>
-          <p:cNvPr id="29" name="TextBox 28"/>
-          <p:cNvSpPr txBox="1"/>
-          <p:nvPr/>
-        </p:nvSpPr>
-        <p:spPr>
-          <a:xfrm>
-            <a:off x="6217920" y="5623560"/>
-            <a:ext cx="5486400" cy="320040"/>
-          </a:xfrm>
-          <a:prstGeom prst="rect">
-            <a:avLst/>
-          </a:prstGeom>
-          <a:noFill/>
-        </p:spPr>
-        <p:txBody>
-          <a:bodyPr wrap="square">
-            <a:spAutoFit/>
-          </a:bodyPr>
-          <a:lstStyle/>
-          <a:p>
-            <a:pPr algn="l">
-              <a:defRPr sz="1100" b="0">
-                <a:solidFill>
-                  <a:srgbClr val="999999"/>
-                </a:solidFill>
-                <a:latin typeface="Calibri"/>
-              </a:defRPr>
-            </a:pPr>
-            <a:r>
-              <a:t>▸  DWS — dwsx3.4U16G.4DPU ×3 nodes</a:t>
-            </a:r>
-          </a:p>
-        </p:txBody>
-      </p:sp>
-      <p:sp>
-        <p:nvSpPr>
-          <p:cNvPr id="30" name="TextBox 29"/>
-          <p:cNvSpPr txBox="1"/>
-          <p:nvPr/>
-        </p:nvSpPr>
-        <p:spPr>
-          <a:xfrm>
-            <a:off x="457200" y="5943600"/>
-            <a:ext cx="5486400" cy="320040"/>
-          </a:xfrm>
-          <a:prstGeom prst="rect">
-            <a:avLst/>
-          </a:prstGeom>
-          <a:noFill/>
-        </p:spPr>
-        <p:txBody>
-          <a:bodyPr wrap="square">
-            <a:spAutoFit/>
-          </a:bodyPr>
-          <a:lstStyle/>
-          <a:p>
-            <a:pPr algn="l">
-              <a:defRPr sz="1100" b="0">
-                <a:solidFill>
-                  <a:srgbClr val="999999"/>
-                </a:solidFill>
-                <a:latin typeface="Calibri"/>
-              </a:defRPr>
-            </a:pPr>
-            <a:r>
-              <a:t>▸  DLI — Serverless Spark SQL</a:t>
-            </a:r>
-          </a:p>
-        </p:txBody>
-      </p:sp>
-      <p:sp>
-        <p:nvSpPr>
-          <p:cNvPr id="31" name="TextBox 30"/>
-          <p:cNvSpPr txBox="1"/>
-          <p:nvPr/>
-        </p:nvSpPr>
-        <p:spPr>
-          <a:xfrm>
-            <a:off x="6217920" y="5943600"/>
-            <a:ext cx="5486400" cy="320040"/>
-          </a:xfrm>
-          <a:prstGeom prst="rect">
-            <a:avLst/>
-          </a:prstGeom>
-          <a:noFill/>
-        </p:spPr>
-        <p:txBody>
-          <a:bodyPr wrap="square">
-            <a:spAutoFit/>
-          </a:bodyPr>
-          <a:lstStyle/>
-          <a:p>
-            <a:pPr algn="l">
-              <a:defRPr sz="1100" b="0">
-                <a:solidFill>
-                  <a:srgbClr val="999999"/>
-                </a:solidFill>
-                <a:latin typeface="Calibri"/>
-              </a:defRPr>
-            </a:pPr>
-            <a:r>
-              <a:t>▸  FunctionGraph ×3 — OCR, Parse, LLM inference</a:t>
-            </a:r>
-          </a:p>
-        </p:txBody>
-      </p:sp>
-      <p:sp>
-        <p:nvSpPr>
-          <p:cNvPr id="32" name="TextBox 31"/>
-          <p:cNvSpPr txBox="1"/>
-          <p:nvPr/>
-        </p:nvSpPr>
-        <p:spPr>
-          <a:xfrm>
-            <a:off x="457200" y="6263640"/>
-            <a:ext cx="5486400" cy="320040"/>
-          </a:xfrm>
-          <a:prstGeom prst="rect">
-            <a:avLst/>
-          </a:prstGeom>
-          <a:noFill/>
-        </p:spPr>
-        <p:txBody>
-          <a:bodyPr wrap="square">
-            <a:spAutoFit/>
-          </a:bodyPr>
-          <a:lstStyle/>
-          <a:p>
-            <a:pPr algn="l">
-              <a:defRPr sz="1100" b="0">
-                <a:solidFill>
-                  <a:srgbClr val="999999"/>
-                </a:solidFill>
-                <a:latin typeface="Calibri"/>
-              </a:defRPr>
-            </a:pPr>
-            <a:r>
-              <a:t>▸  DataArts Studio — Professional tier</a:t>
-            </a:r>
-          </a:p>
-        </p:txBody>
-      </p:sp>
-      <p:sp>
-        <p:nvSpPr>
-          <p:cNvPr id="33" name="TextBox 32"/>
-          <p:cNvSpPr txBox="1"/>
-          <p:nvPr/>
-        </p:nvSpPr>
-        <p:spPr>
-          <a:xfrm>
-            <a:off x="6217920" y="6263640"/>
-            <a:ext cx="5486400" cy="320040"/>
-          </a:xfrm>
-          <a:prstGeom prst="rect">
-            <a:avLst/>
-          </a:prstGeom>
-          <a:noFill/>
-        </p:spPr>
-        <p:txBody>
-          <a:bodyPr wrap="square">
-            <a:spAutoFit/>
-          </a:bodyPr>
-          <a:lstStyle/>
-          <a:p>
-            <a:pPr algn="l">
-              <a:defRPr sz="1100" b="0">
-                <a:solidFill>
-                  <a:srgbClr val="999999"/>
-                </a:solidFill>
-                <a:latin typeface="Calibri"/>
-              </a:defRPr>
-            </a:pPr>
-            <a:r>
-              <a:t>▸  OBS ×3 + KMS + Langfuse Cloud</a:t>
-            </a:r>
-          </a:p>
-        </p:txBody>
-      </p:sp>
-      <p:sp>
-        <p:nvSpPr>
-          <p:cNvPr id="34" name="Rectangle 33"/>
-          <p:cNvSpPr/>
-          <p:nvPr/>
-        </p:nvSpPr>
-        <p:spPr>
-          <a:xfrm>
-            <a:off x="0" y="6492240"/>
-            <a:ext cx="12191695" cy="54864"/>
-          </a:xfrm>
-          <a:prstGeom prst="rect">
-            <a:avLst/>
-          </a:prstGeom>
-          <a:solidFill>
-            <a:srgbClr val="1A1A1A"/>
+            <a:off x="658368" y="1234440"/>
+            <a:ext cx="3931920" cy="1920240"/>
+          </a:xfrm>
+          <a:prstGeom prst="roundRect">
+            <a:avLst/>
+          </a:prstGeom>
+          <a:solidFill>
+            <a:srgbClr val="08233F"/>
           </a:solidFill>
           <a:ln>
             <a:noFill/>
           </a:ln>
         </p:spPr>
-        <p:style>
-          <a:lnRef idx="1">
-            <a:schemeClr val="accent1"/>
-          </a:lnRef>
-          <a:fillRef idx="3">
-            <a:schemeClr val="accent1"/>
-          </a:fillRef>
-          <a:effectRef idx="2">
-            <a:schemeClr val="accent1"/>
-          </a:effectRef>
-          <a:fontRef idx="minor">
-            <a:schemeClr val="lt1"/>
-          </a:fontRef>
-        </p:style>
-        <p:txBody>
-          <a:bodyPr rtlCol="0" anchor="ctr"/>
-          <a:lstStyle/>
-          <a:p>
-            <a:pPr algn="ctr"/>
-          </a:p>
-        </p:txBody>
-      </p:sp>
-      <p:sp>
-        <p:nvSpPr>
-          <p:cNvPr id="35" name="TextBox 34"/>
+        <p:txBody>
+          <a:bodyPr wrap="square" anchor="mid" lIns="73152" rIns="73152" tIns="73152" bIns="73152"/>
+          <a:lstStyle/>
+          <a:p>
+            <a:pPr algn="ctr">
+              <a:spcAft>
+                <a:spcPts val="0"/>
+              </a:spcAft>
+            </a:pPr>
+            <a:r>
+              <a:rPr lang="es-MX" sz="2800" b="1">
+                <a:solidFill>
+                  <a:srgbClr val="FFFFFF"/>
+                </a:solidFill>
+                <a:latin typeface="Aptos"/>
+              </a:rPr>
+              <a:t>2 semanas -&gt; 8 minutos</a:t>
+            </a:r>
+            <a:endParaRPr lang="es-MX" sz="2800"/>
+          </a:p>
+          <a:p>
+            <a:pPr algn="ctr">
+              <a:spcAft>
+                <a:spcPts val="0"/>
+              </a:spcAft>
+            </a:pPr>
+            <a:r>
+              <a:rPr lang="es-MX" sz="1150">
+                <a:solidFill>
+                  <a:srgbClr val="FFFFFF"/>
+                </a:solidFill>
+                <a:latin typeface="Aptos"/>
+              </a:rPr>
+              <a:t>La tesis de valor: comprimir revisión contractual y enfocar analistas donde existe exposición real.</a:t>
+            </a:r>
+            <a:endParaRPr lang="es-MX" sz="1150"/>
+          </a:p>
+        </p:txBody>
+      </p:sp>
+      <p:sp>
+        <p:nvSpPr>
+          <p:cNvPr id="7" name="Text"/>
           <p:cNvSpPr txBox="1"/>
           <p:nvPr/>
         </p:nvSpPr>
         <p:spPr>
           <a:xfrm>
-            <a:off x="457200" y="6510528"/>
-            <a:ext cx="11277295" cy="320040"/>
+            <a:off x="4892040" y="1234440"/>
+            <a:ext cx="1920240" cy="868680"/>
+          </a:xfrm>
+          <a:prstGeom prst="roundRect">
+            <a:avLst/>
+          </a:prstGeom>
+          <a:solidFill>
+            <a:srgbClr val="FFFFFF"/>
+          </a:solidFill>
+          <a:ln w="10160">
+            <a:solidFill>
+              <a:srgbClr val="D7E3F0"/>
+            </a:solidFill>
+          </a:ln>
+        </p:spPr>
+        <p:txBody>
+          <a:bodyPr wrap="square" anchor="mid" lIns="73152" rIns="73152" tIns="73152" bIns="73152"/>
+          <a:lstStyle/>
+          <a:p>
+            <a:pPr algn="ctr">
+              <a:spcAft>
+                <a:spcPts val="0"/>
+              </a:spcAft>
+            </a:pPr>
+            <a:r>
+              <a:rPr lang="es-MX" sz="2400" b="1">
+                <a:solidFill>
+                  <a:srgbClr val="F5A623"/>
+                </a:solidFill>
+                <a:latin typeface="Aptos"/>
+              </a:rPr>
+              <a:t>$133M</a:t>
+            </a:r>
+            <a:endParaRPr lang="es-MX" sz="2400"/>
+          </a:p>
+          <a:p>
+            <a:pPr algn="ctr">
+              <a:spcAft>
+                <a:spcPts val="0"/>
+              </a:spcAft>
+            </a:pPr>
+            <a:r>
+              <a:rPr lang="es-MX" sz="819">
+                <a:solidFill>
+                  <a:srgbClr val="0B1728"/>
+                </a:solidFill>
+                <a:latin typeface="Aptos"/>
+              </a:rPr>
+              <a:t>exposición identificada</a:t>
+            </a:r>
+            <a:endParaRPr lang="es-MX" sz="819"/>
+          </a:p>
+        </p:txBody>
+      </p:sp>
+      <p:sp>
+        <p:nvSpPr>
+          <p:cNvPr id="8" name="Text"/>
+          <p:cNvSpPr txBox="1"/>
+          <p:nvPr/>
+        </p:nvSpPr>
+        <p:spPr>
+          <a:xfrm>
+            <a:off x="7114032" y="1234440"/>
+            <a:ext cx="1920240" cy="868680"/>
+          </a:xfrm>
+          <a:prstGeom prst="roundRect">
+            <a:avLst/>
+          </a:prstGeom>
+          <a:solidFill>
+            <a:srgbClr val="FFFFFF"/>
+          </a:solidFill>
+          <a:ln w="10160">
+            <a:solidFill>
+              <a:srgbClr val="D7E3F0"/>
+            </a:solidFill>
+          </a:ln>
+        </p:spPr>
+        <p:txBody>
+          <a:bodyPr wrap="square" anchor="mid" lIns="73152" rIns="73152" tIns="73152" bIns="73152"/>
+          <a:lstStyle/>
+          <a:p>
+            <a:pPr algn="ctr">
+              <a:spcAft>
+                <a:spcPts val="0"/>
+              </a:spcAft>
+            </a:pPr>
+            <a:r>
+              <a:rPr lang="es-MX" sz="2400" b="1">
+                <a:solidFill>
+                  <a:srgbClr val="D64545"/>
+                </a:solidFill>
+                <a:latin typeface="Aptos"/>
+              </a:rPr>
+              <a:t>4 niveles</a:t>
+            </a:r>
+            <a:endParaRPr lang="es-MX" sz="2400"/>
+          </a:p>
+          <a:p>
+            <a:pPr algn="ctr">
+              <a:spcAft>
+                <a:spcPts val="0"/>
+              </a:spcAft>
+            </a:pPr>
+            <a:r>
+              <a:rPr lang="es-MX" sz="819">
+                <a:solidFill>
+                  <a:srgbClr val="0B1728"/>
+                </a:solidFill>
+                <a:latin typeface="Aptos"/>
+              </a:rPr>
+              <a:t>bajo a critico</a:t>
+            </a:r>
+            <a:endParaRPr lang="es-MX" sz="819"/>
+          </a:p>
+        </p:txBody>
+      </p:sp>
+      <p:sp>
+        <p:nvSpPr>
+          <p:cNvPr id="9" name="Text"/>
+          <p:cNvSpPr txBox="1"/>
+          <p:nvPr/>
+        </p:nvSpPr>
+        <p:spPr>
+          <a:xfrm>
+            <a:off x="9326880" y="1234440"/>
+            <a:ext cx="1920240" cy="868680"/>
+          </a:xfrm>
+          <a:prstGeom prst="roundRect">
+            <a:avLst/>
+          </a:prstGeom>
+          <a:solidFill>
+            <a:srgbClr val="FFFFFF"/>
+          </a:solidFill>
+          <a:ln w="10160">
+            <a:solidFill>
+              <a:srgbClr val="D7E3F0"/>
+            </a:solidFill>
+          </a:ln>
+        </p:spPr>
+        <p:txBody>
+          <a:bodyPr wrap="square" anchor="mid" lIns="73152" rIns="73152" tIns="73152" bIns="73152"/>
+          <a:lstStyle/>
+          <a:p>
+            <a:pPr algn="ctr">
+              <a:spcAft>
+                <a:spcPts val="0"/>
+              </a:spcAft>
+            </a:pPr>
+            <a:r>
+              <a:rPr lang="es-MX" sz="2400" b="1">
+                <a:solidFill>
+                  <a:srgbClr val="22A06B"/>
+                </a:solidFill>
+                <a:latin typeface="Aptos"/>
+              </a:rPr>
+              <a:t>2,300</a:t>
+            </a:r>
+            <a:endParaRPr lang="es-MX" sz="2400"/>
+          </a:p>
+          <a:p>
+            <a:pPr algn="ctr">
+              <a:spcAft>
+                <a:spcPts val="0"/>
+              </a:spcAft>
+            </a:pPr>
+            <a:r>
+              <a:rPr lang="es-MX" sz="819">
+                <a:solidFill>
+                  <a:srgbClr val="0B1728"/>
+                </a:solidFill>
+                <a:latin typeface="Aptos"/>
+              </a:rPr>
+              <a:t>vendors escalables</a:t>
+            </a:r>
+            <a:endParaRPr lang="es-MX" sz="819"/>
+          </a:p>
+        </p:txBody>
+      </p:sp>
+      <p:sp>
+        <p:nvSpPr>
+          <p:cNvPr id="10" name="Text"/>
+          <p:cNvSpPr txBox="1"/>
+          <p:nvPr/>
+        </p:nvSpPr>
+        <p:spPr>
+          <a:xfrm>
+            <a:off x="4892040" y="2542032"/>
+            <a:ext cx="2788920" cy="1325880"/>
+          </a:xfrm>
+          <a:prstGeom prst="roundRect">
+            <a:avLst/>
+          </a:prstGeom>
+          <a:solidFill>
+            <a:srgbClr val="FFFFFF"/>
+          </a:solidFill>
+          <a:ln w="10160">
+            <a:solidFill>
+              <a:srgbClr val="D7E3F0"/>
+            </a:solidFill>
+          </a:ln>
+        </p:spPr>
+        <p:txBody>
+          <a:bodyPr wrap="square" anchor="top" lIns="73152" rIns="73152" tIns="73152" bIns="73152"/>
+          <a:lstStyle/>
+          <a:p>
+            <a:pPr algn="l">
+              <a:spcAft>
+                <a:spcPts val="0"/>
+              </a:spcAft>
+            </a:pPr>
+            <a:r>
+              <a:rPr lang="es-MX" sz="1220" b="1">
+                <a:solidFill>
+                  <a:srgbClr val="0B1728"/>
+                </a:solidFill>
+                <a:latin typeface="Aptos"/>
+              </a:rPr>
+              <a:t>Controles listos para explicar</a:t>
+            </a:r>
+            <a:endParaRPr lang="es-MX" sz="1220"/>
+          </a:p>
+          <a:p>
+            <a:pPr algn="l">
+              <a:spcAft>
+                <a:spcPts val="0"/>
+              </a:spcAft>
+            </a:pPr>
+            <a:r>
+              <a:rPr lang="es-MX" sz="860">
+                <a:solidFill>
+                  <a:srgbClr val="64748B"/>
+                </a:solidFill>
+                <a:latin typeface="Aptos"/>
+              </a:rPr>
+              <a:t>VPC privada, IAM por rol, OBS/DWS con KMS, secretos fuera de git y trazabilidad de ejecuciones LLM.</a:t>
+            </a:r>
+            <a:endParaRPr lang="es-MX" sz="860"/>
+          </a:p>
+        </p:txBody>
+      </p:sp>
+      <p:sp>
+        <p:nvSpPr>
+          <p:cNvPr id="11" name="Text"/>
+          <p:cNvSpPr txBox="1"/>
+          <p:nvPr/>
+        </p:nvSpPr>
+        <p:spPr>
+          <a:xfrm>
+            <a:off x="7991856" y="2542032"/>
+            <a:ext cx="2788920" cy="1325880"/>
+          </a:xfrm>
+          <a:prstGeom prst="roundRect">
+            <a:avLst/>
+          </a:prstGeom>
+          <a:solidFill>
+            <a:srgbClr val="FFFFFF"/>
+          </a:solidFill>
+          <a:ln w="10160">
+            <a:solidFill>
+              <a:srgbClr val="D7E3F0"/>
+            </a:solidFill>
+          </a:ln>
+        </p:spPr>
+        <p:txBody>
+          <a:bodyPr wrap="square" anchor="top" lIns="73152" rIns="73152" tIns="73152" bIns="73152"/>
+          <a:lstStyle/>
+          <a:p>
+            <a:pPr algn="l">
+              <a:spcAft>
+                <a:spcPts val="0"/>
+              </a:spcAft>
+            </a:pPr>
+            <a:r>
+              <a:rPr lang="es-MX" sz="1220" b="1">
+                <a:solidFill>
+                  <a:srgbClr val="0B1728"/>
+                </a:solidFill>
+                <a:latin typeface="Aptos"/>
+              </a:rPr>
+              <a:t>Recursos Huawei Cloud</a:t>
+            </a:r>
+            <a:endParaRPr lang="es-MX" sz="1220"/>
+          </a:p>
+          <a:p>
+            <a:pPr algn="l">
+              <a:spcAft>
+                <a:spcPts val="0"/>
+              </a:spcAft>
+            </a:pPr>
+            <a:r>
+              <a:rPr lang="es-MX" sz="860">
+                <a:solidFill>
+                  <a:srgbClr val="64748B"/>
+                </a:solidFill>
+                <a:latin typeface="Aptos"/>
+              </a:rPr>
+              <a:t>ECS x2, OBS x3, FunctionGraph x3, DLI, DWS 3 nodos, DataArts Studio y Langfuse Cloud.</a:t>
+            </a:r>
+            <a:endParaRPr lang="es-MX" sz="860"/>
+          </a:p>
+        </p:txBody>
+      </p:sp>
+      <p:sp>
+        <p:nvSpPr>
+          <p:cNvPr id="12" name="Text"/>
+          <p:cNvSpPr txBox="1"/>
+          <p:nvPr/>
+        </p:nvSpPr>
+        <p:spPr>
+          <a:xfrm>
+            <a:off x="658368" y="3977640"/>
+            <a:ext cx="10012680" cy="804672"/>
+          </a:xfrm>
+          <a:prstGeom prst="roundRect">
+            <a:avLst/>
+          </a:prstGeom>
+          <a:solidFill>
+            <a:srgbClr val="08233F"/>
+          </a:solidFill>
+          <a:ln>
+            <a:noFill/>
+          </a:ln>
+        </p:spPr>
+        <p:txBody>
+          <a:bodyPr wrap="square" anchor="mid" lIns="73152" rIns="73152" tIns="73152" bIns="73152"/>
+          <a:lstStyle/>
+          <a:p>
+            <a:pPr algn="ctr">
+              <a:spcAft>
+                <a:spcPts val="0"/>
+              </a:spcAft>
+            </a:pPr>
+            <a:r>
+              <a:rPr lang="es-MX" sz="1200" b="1">
+                <a:solidFill>
+                  <a:srgbClr val="1FB6C9"/>
+                </a:solidFill>
+                <a:latin typeface="Aptos"/>
+              </a:rPr>
+              <a:t>Cierre recomendado</a:t>
+            </a:r>
+            <a:endParaRPr lang="es-MX" sz="1200"/>
+          </a:p>
+          <a:p>
+            <a:pPr algn="ctr">
+              <a:spcAft>
+                <a:spcPts val="0"/>
+              </a:spcAft>
+            </a:pPr>
+            <a:r>
+              <a:rPr lang="es-MX" sz="1300">
+                <a:solidFill>
+                  <a:srgbClr val="FFFFFF"/>
+                </a:solidFill>
+                <a:latin typeface="Aptos"/>
+              </a:rPr>
+              <a:t>Pedir al grupo elegir un contrato crítico y una pregunta de chatbot para probar explicabilidad, trazabilidad y siguiente mejor acción.</a:t>
+            </a:r>
+            <a:endParaRPr lang="es-MX" sz="1300"/>
+          </a:p>
+        </p:txBody>
+      </p:sp>
+      <p:sp>
+        <p:nvSpPr>
+          <p:cNvPr id="13" name="Text"/>
+          <p:cNvSpPr txBox="1"/>
+          <p:nvPr/>
+        </p:nvSpPr>
+        <p:spPr>
+          <a:xfrm>
+            <a:off x="658368" y="5230368"/>
+            <a:ext cx="10012680" cy="384048"/>
+          </a:xfrm>
+          <a:prstGeom prst="roundRect">
+            <a:avLst/>
+          </a:prstGeom>
+          <a:solidFill>
+            <a:srgbClr val="FFFFFF"/>
+          </a:solidFill>
+          <a:ln w="10160">
+            <a:solidFill>
+              <a:srgbClr val="D7E3F0"/>
+            </a:solidFill>
+          </a:ln>
+        </p:spPr>
+        <p:txBody>
+          <a:bodyPr wrap="square" anchor="mid" lIns="73152" rIns="73152" tIns="73152" bIns="73152"/>
+          <a:lstStyle/>
+          <a:p>
+            <a:pPr algn="ctr">
+              <a:spcAft>
+                <a:spcPts val="0"/>
+              </a:spcAft>
+            </a:pPr>
+            <a:r>
+              <a:rPr lang="es-MX" sz="1050">
+                <a:solidFill>
+                  <a:srgbClr val="64748B"/>
+                </a:solidFill>
+                <a:latin typeface="Aptos"/>
+              </a:rPr>
+              <a:t>Se removieron claims débiles como costo por contrato y latencia fija: mejor mostrar métricas defendibles del dataset y del flujo observado.</a:t>
+            </a:r>
+            <a:endParaRPr lang="es-MX" sz="1050"/>
+          </a:p>
+        </p:txBody>
+      </p:sp>
+      <p:sp>
+        <p:nvSpPr>
+          <p:cNvPr id="14" name="Footer"/>
+          <p:cNvSpPr txBox="1"/>
+          <p:nvPr/>
+        </p:nvSpPr>
+        <p:spPr>
+          <a:xfrm>
+            <a:off x="502920" y="6446520"/>
+            <a:ext cx="9875520" cy="228600"/>
           </a:xfrm>
           <a:prstGeom prst="rect">
             <a:avLst/>
           </a:prstGeom>
           <a:noFill/>
-        </p:spPr>
-        <p:txBody>
-          <a:bodyPr wrap="square">
-            <a:spAutoFit/>
-          </a:bodyPr>
-          <a:lstStyle/>
-          <a:p>
-            <a:pPr algn="ctr">
-              <a:defRPr sz="900" b="0">
-                <a:solidFill>
-                  <a:srgbClr val="999999"/>
-                </a:solidFill>
-                <a:latin typeface="Calibri"/>
-              </a:defRPr>
-            </a:pPr>
-            <a:r>
-              <a:t>Workshop Huawei Cloud × Salinas  |  Mayo 8, 2026  |  México Century Plaza</a:t>
-            </a:r>
-          </a:p>
-        </p:txBody>
-      </p:sp>
-      <p:sp>
-        <p:nvSpPr>
-          <p:cNvPr id="36" name="TextBox 35"/>
+          <a:ln>
+            <a:noFill/>
+          </a:ln>
+        </p:spPr>
+        <p:txBody>
+          <a:bodyPr wrap="square" anchor="mid" lIns="73152" rIns="73152" tIns="73152" bIns="73152"/>
+          <a:lstStyle/>
+          <a:p>
+            <a:pPr algn="l">
+              <a:spcAft>
+                <a:spcPts val="0"/>
+              </a:spcAft>
+            </a:pPr>
+            <a:r>
+              <a:rPr lang="es-MX" sz="750">
+                <a:solidFill>
+                  <a:srgbClr val="64748B"/>
+                </a:solidFill>
+                <a:latin typeface="Aptos"/>
+              </a:rPr>
+              <a:t>Workshop Huawei Cloud x Salinas | Mayo 8, 2026 | México Century Plaza</a:t>
+            </a:r>
+            <a:endParaRPr lang="es-MX" sz="750"/>
+          </a:p>
+        </p:txBody>
+      </p:sp>
+      <p:sp>
+        <p:nvSpPr>
+          <p:cNvPr id="15" name="Page"/>
           <p:cNvSpPr txBox="1"/>
           <p:nvPr/>
         </p:nvSpPr>
         <p:spPr>
           <a:xfrm>
-            <a:off x="11094415" y="6510528"/>
-            <a:ext cx="731520" cy="320040"/>
+            <a:off x="11064240" y="6446520"/>
+            <a:ext cx="594360" cy="228600"/>
           </a:xfrm>
           <a:prstGeom prst="rect">
             <a:avLst/>
           </a:prstGeom>
           <a:noFill/>
-        </p:spPr>
-        <p:txBody>
-          <a:bodyPr wrap="square">
-            <a:spAutoFit/>
-          </a:bodyPr>
+          <a:ln>
+            <a:noFill/>
+          </a:ln>
+        </p:spPr>
+        <p:txBody>
+          <a:bodyPr wrap="square" anchor="mid" lIns="73152" rIns="73152" tIns="73152" bIns="73152"/>
           <a:lstStyle/>
           <a:p>
             <a:pPr algn="r">
-              <a:defRPr sz="900" b="0">
-                <a:solidFill>
-                  <a:srgbClr val="555555"/>
-                </a:solidFill>
-                <a:latin typeface="Calibri"/>
-              </a:defRPr>
-            </a:pPr>
-            <a:r>
+              <a:spcAft>
+                <a:spcPts val="0"/>
+              </a:spcAft>
+            </a:pPr>
+            <a:r>
+              <a:rPr lang="es-MX" sz="750">
+                <a:solidFill>
+                  <a:srgbClr val="64748B"/>
+                </a:solidFill>
+                <a:latin typeface="Aptos"/>
+              </a:rPr>
               <a:t>5 / 5</a:t>
             </a:r>
+            <a:endParaRPr lang="es-MX" sz="750"/>
           </a:p>
         </p:txBody>
       </p:sp>

--- a/docs/slides-arquitectura.pptx
+++ b/docs/slides-arquitectura.pptx
@@ -4127,847 +4127,15 @@
               </a:spcAft>
             </a:pPr>
             <a:r>
-              <a:rPr lang="es-MX" sz="2500" b="1">
-                <a:solidFill>
-                  <a:srgbClr val="0B1728"/>
-                </a:solidFill>
-                <a:latin typeface="Aptos"/>
-              </a:rPr>
-              <a:t>Ruta del demo en vivo</a:t>
+              <a:rPr sz="1800">
+                <a:solidFill>
+                  <a:srgbClr val="E4002B"/>
+                </a:solidFill>
+                <a:latin typeface="Aptos"/>
+              </a:rPr>
+              <a:t>Pipeline MPP · CTS audit trail · Terraform IaC · EXPLAIN ANALYZE en vivo</a:t>
             </a:r>
             <a:endParaRPr lang="es-MX" sz="2500"/>
-          </a:p>
-        </p:txBody>
-      </p:sp>
-      <p:sp>
-        <p:nvSpPr>
-          <p:cNvPr id="6" name="Contratos"/>
-          <p:cNvSpPr txBox="1"/>
-          <p:nvPr/>
-        </p:nvSpPr>
-        <p:spPr>
-          <a:xfrm>
-            <a:off x="502920" y="1828800"/>
-            <a:ext cx="1225296" cy="960120"/>
-          </a:xfrm>
-          <a:prstGeom prst="roundRect">
-            <a:avLst/>
-          </a:prstGeom>
-          <a:solidFill>
-            <a:srgbClr val="FFFFFF"/>
-          </a:solidFill>
-          <a:ln w="10160">
-            <a:solidFill>
-              <a:srgbClr val="D7E3F0"/>
-            </a:solidFill>
-          </a:ln>
-        </p:spPr>
-        <p:txBody>
-          <a:bodyPr wrap="square" anchor="mid" lIns="73152" rIns="73152" tIns="73152" bIns="73152"/>
-          <a:lstStyle/>
-          <a:p>
-            <a:pPr algn="ctr">
-              <a:spcAft>
-                <a:spcPts val="0"/>
-              </a:spcAft>
-            </a:pPr>
-            <a:r>
-              <a:rPr lang="es-MX" sz="1200" b="1">
-                <a:solidFill>
-                  <a:srgbClr val="2B6CB0"/>
-                </a:solidFill>
-                <a:latin typeface="Aptos"/>
-              </a:rPr>
-              <a:t>Contratos</a:t>
-            </a:r>
-            <a:endParaRPr lang="es-MX" sz="1200"/>
-          </a:p>
-          <a:p>
-            <a:pPr algn="ctr">
-              <a:spcAft>
-                <a:spcPts val="0"/>
-              </a:spcAft>
-            </a:pPr>
-            <a:r>
-              <a:rPr lang="es-MX" sz="780">
-                <a:solidFill>
-                  <a:srgbClr val="64748B"/>
-                </a:solidFill>
-                <a:latin typeface="Aptos"/>
-              </a:rPr>
-              <a:t>20 PDFs
-+ metadata</a:t>
-            </a:r>
-            <a:endParaRPr lang="es-MX" sz="780"/>
-          </a:p>
-        </p:txBody>
-      </p:sp>
-      <p:sp>
-        <p:nvSpPr>
-          <p:cNvPr id="7" name="Arrow"/>
-          <p:cNvSpPr/>
-          <p:nvPr/>
-        </p:nvSpPr>
-        <p:spPr>
-          <a:xfrm>
-            <a:off x="1764792" y="2221992"/>
-            <a:ext cx="219456" cy="164592"/>
-          </a:xfrm>
-          <a:prstGeom prst="rightArrow">
-            <a:avLst/>
-          </a:prstGeom>
-          <a:solidFill>
-            <a:srgbClr val="1FB6C9"/>
-          </a:solidFill>
-          <a:ln>
-            <a:noFill/>
-          </a:ln>
-        </p:spPr>
-        <p:txBody>
-          <a:bodyPr/>
-          <a:lstStyle/>
-          <a:p/>
-        </p:txBody>
-      </p:sp>
-      <p:sp>
-        <p:nvSpPr>
-          <p:cNvPr id="8" name="OBS"/>
-          <p:cNvSpPr txBox="1"/>
-          <p:nvPr/>
-        </p:nvSpPr>
-        <p:spPr>
-          <a:xfrm>
-            <a:off x="1993392" y="1828800"/>
-            <a:ext cx="1225296" cy="960120"/>
-          </a:xfrm>
-          <a:prstGeom prst="roundRect">
-            <a:avLst/>
-          </a:prstGeom>
-          <a:solidFill>
-            <a:srgbClr val="FFFFFF"/>
-          </a:solidFill>
-          <a:ln w="10160">
-            <a:solidFill>
-              <a:srgbClr val="D7E3F0"/>
-            </a:solidFill>
-          </a:ln>
-        </p:spPr>
-        <p:txBody>
-          <a:bodyPr wrap="square" anchor="mid" lIns="73152" rIns="73152" tIns="73152" bIns="73152"/>
-          <a:lstStyle/>
-          <a:p>
-            <a:pPr algn="ctr">
-              <a:spcAft>
-                <a:spcPts val="0"/>
-              </a:spcAft>
-            </a:pPr>
-            <a:r>
-              <a:rPr lang="es-MX" sz="1200" b="1">
-                <a:solidFill>
-                  <a:srgbClr val="2B6CB0"/>
-                </a:solidFill>
-                <a:latin typeface="Aptos"/>
-              </a:rPr>
-              <a:t>OBS</a:t>
-            </a:r>
-            <a:endParaRPr lang="es-MX" sz="1200"/>
-          </a:p>
-          <a:p>
-            <a:pPr algn="ctr">
-              <a:spcAft>
-                <a:spcPts val="0"/>
-              </a:spcAft>
-            </a:pPr>
-            <a:r>
-              <a:rPr lang="es-MX" sz="780">
-                <a:solidFill>
-                  <a:srgbClr val="64748B"/>
-                </a:solidFill>
-                <a:latin typeface="Aptos"/>
-              </a:rPr>
-              <a:t>raw / processed
-/ results</a:t>
-            </a:r>
-            <a:endParaRPr lang="es-MX" sz="780"/>
-          </a:p>
-        </p:txBody>
-      </p:sp>
-      <p:sp>
-        <p:nvSpPr>
-          <p:cNvPr id="9" name="Arrow"/>
-          <p:cNvSpPr/>
-          <p:nvPr/>
-        </p:nvSpPr>
-        <p:spPr>
-          <a:xfrm>
-            <a:off x="3255264" y="2221992"/>
-            <a:ext cx="219456" cy="164592"/>
-          </a:xfrm>
-          <a:prstGeom prst="rightArrow">
-            <a:avLst/>
-          </a:prstGeom>
-          <a:solidFill>
-            <a:srgbClr val="1FB6C9"/>
-          </a:solidFill>
-          <a:ln>
-            <a:noFill/>
-          </a:ln>
-        </p:spPr>
-        <p:txBody>
-          <a:bodyPr/>
-          <a:lstStyle/>
-          <a:p/>
-        </p:txBody>
-      </p:sp>
-      <p:sp>
-        <p:nvSpPr>
-          <p:cNvPr id="10" name="FunctionGraph"/>
-          <p:cNvSpPr txBox="1"/>
-          <p:nvPr/>
-        </p:nvSpPr>
-        <p:spPr>
-          <a:xfrm>
-            <a:off x="3493008" y="1828800"/>
-            <a:ext cx="1225296" cy="960120"/>
-          </a:xfrm>
-          <a:prstGeom prst="roundRect">
-            <a:avLst/>
-          </a:prstGeom>
-          <a:solidFill>
-            <a:srgbClr val="FFFFFF"/>
-          </a:solidFill>
-          <a:ln w="10160">
-            <a:solidFill>
-              <a:srgbClr val="D7E3F0"/>
-            </a:solidFill>
-          </a:ln>
-        </p:spPr>
-        <p:txBody>
-          <a:bodyPr wrap="square" anchor="mid" lIns="73152" rIns="73152" tIns="73152" bIns="73152"/>
-          <a:lstStyle/>
-          <a:p>
-            <a:pPr algn="ctr">
-              <a:spcAft>
-                <a:spcPts val="0"/>
-              </a:spcAft>
-            </a:pPr>
-            <a:r>
-              <a:rPr lang="es-MX" sz="1200" b="1">
-                <a:solidFill>
-                  <a:srgbClr val="2B6CB0"/>
-                </a:solidFill>
-                <a:latin typeface="Aptos"/>
-              </a:rPr>
-              <a:t>FunctionGraph</a:t>
-            </a:r>
-            <a:endParaRPr lang="es-MX" sz="1200"/>
-          </a:p>
-          <a:p>
-            <a:pPr algn="ctr">
-              <a:spcAft>
-                <a:spcPts val="0"/>
-              </a:spcAft>
-            </a:pPr>
-            <a:r>
-              <a:rPr lang="es-MX" sz="780">
-                <a:solidFill>
-                  <a:srgbClr val="64748B"/>
-                </a:solidFill>
-                <a:latin typeface="Aptos"/>
-              </a:rPr>
-              <a:t>OCR, parse,
-LLM inference</a:t>
-            </a:r>
-            <a:endParaRPr lang="es-MX" sz="780"/>
-          </a:p>
-        </p:txBody>
-      </p:sp>
-      <p:sp>
-        <p:nvSpPr>
-          <p:cNvPr id="11" name="Arrow"/>
-          <p:cNvSpPr/>
-          <p:nvPr/>
-        </p:nvSpPr>
-        <p:spPr>
-          <a:xfrm>
-            <a:off x="4754880" y="2221992"/>
-            <a:ext cx="219456" cy="164592"/>
-          </a:xfrm>
-          <a:prstGeom prst="rightArrow">
-            <a:avLst/>
-          </a:prstGeom>
-          <a:solidFill>
-            <a:srgbClr val="1FB6C9"/>
-          </a:solidFill>
-          <a:ln>
-            <a:noFill/>
-          </a:ln>
-        </p:spPr>
-        <p:txBody>
-          <a:bodyPr/>
-          <a:lstStyle/>
-          <a:p/>
-        </p:txBody>
-      </p:sp>
-      <p:sp>
-        <p:nvSpPr>
-          <p:cNvPr id="12" name="DeepSeek"/>
-          <p:cNvSpPr txBox="1"/>
-          <p:nvPr/>
-        </p:nvSpPr>
-        <p:spPr>
-          <a:xfrm>
-            <a:off x="4992624" y="1828800"/>
-            <a:ext cx="1225296" cy="960120"/>
-          </a:xfrm>
-          <a:prstGeom prst="roundRect">
-            <a:avLst/>
-          </a:prstGeom>
-          <a:solidFill>
-            <a:srgbClr val="FFFFFF"/>
-          </a:solidFill>
-          <a:ln w="10160">
-            <a:solidFill>
-              <a:srgbClr val="D7E3F0"/>
-            </a:solidFill>
-          </a:ln>
-        </p:spPr>
-        <p:txBody>
-          <a:bodyPr wrap="square" anchor="mid" lIns="73152" rIns="73152" tIns="73152" bIns="73152"/>
-          <a:lstStyle/>
-          <a:p>
-            <a:pPr algn="ctr">
-              <a:spcAft>
-                <a:spcPts val="0"/>
-              </a:spcAft>
-            </a:pPr>
-            <a:r>
-              <a:rPr lang="es-MX" sz="1200" b="1">
-                <a:solidFill>
-                  <a:srgbClr val="2B6CB0"/>
-                </a:solidFill>
-                <a:latin typeface="Aptos"/>
-              </a:rPr>
-              <a:t>DeepSeek</a:t>
-            </a:r>
-            <a:endParaRPr lang="es-MX" sz="1200"/>
-          </a:p>
-          <a:p>
-            <a:pPr algn="ctr">
-              <a:spcAft>
-                <a:spcPts val="0"/>
-              </a:spcAft>
-            </a:pPr>
-            <a:r>
-              <a:rPr lang="es-MX" sz="780">
-                <a:solidFill>
-                  <a:srgbClr val="64748B"/>
-                </a:solidFill>
-                <a:latin typeface="Aptos"/>
-              </a:rPr>
-              <a:t>riesgo y
-razones</a:t>
-            </a:r>
-            <a:endParaRPr lang="es-MX" sz="780"/>
-          </a:p>
-        </p:txBody>
-      </p:sp>
-      <p:sp>
-        <p:nvSpPr>
-          <p:cNvPr id="13" name="Arrow"/>
-          <p:cNvSpPr/>
-          <p:nvPr/>
-        </p:nvSpPr>
-        <p:spPr>
-          <a:xfrm>
-            <a:off x="6254496" y="2221992"/>
-            <a:ext cx="219456" cy="164592"/>
-          </a:xfrm>
-          <a:prstGeom prst="rightArrow">
-            <a:avLst/>
-          </a:prstGeom>
-          <a:solidFill>
-            <a:srgbClr val="1FB6C9"/>
-          </a:solidFill>
-          <a:ln>
-            <a:noFill/>
-          </a:ln>
-        </p:spPr>
-        <p:txBody>
-          <a:bodyPr/>
-          <a:lstStyle/>
-          <a:p/>
-        </p:txBody>
-      </p:sp>
-      <p:sp>
-        <p:nvSpPr>
-          <p:cNvPr id="14" name="DWS + DLI"/>
-          <p:cNvSpPr txBox="1"/>
-          <p:nvPr/>
-        </p:nvSpPr>
-        <p:spPr>
-          <a:xfrm>
-            <a:off x="6492240" y="1828800"/>
-            <a:ext cx="1225296" cy="960120"/>
-          </a:xfrm>
-          <a:prstGeom prst="roundRect">
-            <a:avLst/>
-          </a:prstGeom>
-          <a:solidFill>
-            <a:srgbClr val="FFFFFF"/>
-          </a:solidFill>
-          <a:ln w="10160">
-            <a:solidFill>
-              <a:srgbClr val="D7E3F0"/>
-            </a:solidFill>
-          </a:ln>
-        </p:spPr>
-        <p:txBody>
-          <a:bodyPr wrap="square" anchor="mid" lIns="73152" rIns="73152" tIns="73152" bIns="73152"/>
-          <a:lstStyle/>
-          <a:p>
-            <a:pPr algn="ctr">
-              <a:spcAft>
-                <a:spcPts val="0"/>
-              </a:spcAft>
-            </a:pPr>
-            <a:r>
-              <a:rPr lang="es-MX" sz="1200" b="1">
-                <a:solidFill>
-                  <a:srgbClr val="2B6CB0"/>
-                </a:solidFill>
-                <a:latin typeface="Aptos"/>
-              </a:rPr>
-              <a:t>DWS + DLI</a:t>
-            </a:r>
-            <a:endParaRPr lang="es-MX" sz="1200"/>
-          </a:p>
-          <a:p>
-            <a:pPr algn="ctr">
-              <a:spcAft>
-                <a:spcPts val="0"/>
-              </a:spcAft>
-            </a:pPr>
-            <a:r>
-              <a:rPr lang="es-MX" sz="780">
-                <a:solidFill>
-                  <a:srgbClr val="64748B"/>
-                </a:solidFill>
-                <a:latin typeface="Aptos"/>
-              </a:rPr>
-              <a:t>tablas, SQL,
-analytics</a:t>
-            </a:r>
-            <a:endParaRPr lang="es-MX" sz="780"/>
-          </a:p>
-        </p:txBody>
-      </p:sp>
-      <p:sp>
-        <p:nvSpPr>
-          <p:cNvPr id="15" name="Arrow"/>
-          <p:cNvSpPr/>
-          <p:nvPr/>
-        </p:nvSpPr>
-        <p:spPr>
-          <a:xfrm>
-            <a:off x="7754112" y="2221992"/>
-            <a:ext cx="219456" cy="164592"/>
-          </a:xfrm>
-          <a:prstGeom prst="rightArrow">
-            <a:avLst/>
-          </a:prstGeom>
-          <a:solidFill>
-            <a:srgbClr val="1FB6C9"/>
-          </a:solidFill>
-          <a:ln>
-            <a:noFill/>
-          </a:ln>
-        </p:spPr>
-        <p:txBody>
-          <a:bodyPr/>
-          <a:lstStyle/>
-          <a:p/>
-        </p:txBody>
-      </p:sp>
-      <p:sp>
-        <p:nvSpPr>
-          <p:cNvPr id="16" name="DataArts"/>
-          <p:cNvSpPr txBox="1"/>
-          <p:nvPr/>
-        </p:nvSpPr>
-        <p:spPr>
-          <a:xfrm>
-            <a:off x="7991856" y="1828800"/>
-            <a:ext cx="1225296" cy="960120"/>
-          </a:xfrm>
-          <a:prstGeom prst="roundRect">
-            <a:avLst/>
-          </a:prstGeom>
-          <a:solidFill>
-            <a:srgbClr val="FFFFFF"/>
-          </a:solidFill>
-          <a:ln w="10160">
-            <a:solidFill>
-              <a:srgbClr val="D7E3F0"/>
-            </a:solidFill>
-          </a:ln>
-        </p:spPr>
-        <p:txBody>
-          <a:bodyPr wrap="square" anchor="mid" lIns="73152" rIns="73152" tIns="73152" bIns="73152"/>
-          <a:lstStyle/>
-          <a:p>
-            <a:pPr algn="ctr">
-              <a:spcAft>
-                <a:spcPts val="0"/>
-              </a:spcAft>
-            </a:pPr>
-            <a:r>
-              <a:rPr lang="es-MX" sz="1200" b="1">
-                <a:solidFill>
-                  <a:srgbClr val="22A06B"/>
-                </a:solidFill>
-                <a:latin typeface="Aptos"/>
-              </a:rPr>
-              <a:t>DataArts</a:t>
-            </a:r>
-            <a:endParaRPr lang="es-MX" sz="1200"/>
-          </a:p>
-          <a:p>
-            <a:pPr algn="ctr">
-              <a:spcAft>
-                <a:spcPts val="0"/>
-              </a:spcAft>
-            </a:pPr>
-            <a:r>
-              <a:rPr lang="es-MX" sz="780">
-                <a:solidFill>
-                  <a:srgbClr val="64748B"/>
-                </a:solidFill>
-                <a:latin typeface="Aptos"/>
-              </a:rPr>
-              <a:t>catálogo, linaje,
-políticas</a:t>
-            </a:r>
-            <a:endParaRPr lang="es-MX" sz="780"/>
-          </a:p>
-        </p:txBody>
-      </p:sp>
-      <p:sp>
-        <p:nvSpPr>
-          <p:cNvPr id="17" name="Arrow"/>
-          <p:cNvSpPr/>
-          <p:nvPr/>
-        </p:nvSpPr>
-        <p:spPr>
-          <a:xfrm>
-            <a:off x="9253728" y="2221992"/>
-            <a:ext cx="219456" cy="164592"/>
-          </a:xfrm>
-          <a:prstGeom prst="rightArrow">
-            <a:avLst/>
-          </a:prstGeom>
-          <a:solidFill>
-            <a:srgbClr val="1FB6C9"/>
-          </a:solidFill>
-          <a:ln>
-            <a:noFill/>
-          </a:ln>
-        </p:spPr>
-        <p:txBody>
-          <a:bodyPr/>
-          <a:lstStyle/>
-          <a:p/>
-        </p:txBody>
-      </p:sp>
-      <p:sp>
-        <p:nvSpPr>
-          <p:cNvPr id="18" name="Dify + Web"/>
-          <p:cNvSpPr txBox="1"/>
-          <p:nvPr/>
-        </p:nvSpPr>
-        <p:spPr>
-          <a:xfrm>
-            <a:off x="9491472" y="1828800"/>
-            <a:ext cx="1225296" cy="960120"/>
-          </a:xfrm>
-          <a:prstGeom prst="roundRect">
-            <a:avLst/>
-          </a:prstGeom>
-          <a:solidFill>
-            <a:srgbClr val="FFFFFF"/>
-          </a:solidFill>
-          <a:ln w="10160">
-            <a:solidFill>
-              <a:srgbClr val="D7E3F0"/>
-            </a:solidFill>
-          </a:ln>
-        </p:spPr>
-        <p:txBody>
-          <a:bodyPr wrap="square" anchor="mid" lIns="73152" rIns="73152" tIns="73152" bIns="73152"/>
-          <a:lstStyle/>
-          <a:p>
-            <a:pPr algn="ctr">
-              <a:spcAft>
-                <a:spcPts val="0"/>
-              </a:spcAft>
-            </a:pPr>
-            <a:r>
-              <a:rPr lang="es-MX" sz="1200" b="1">
-                <a:solidFill>
-                  <a:srgbClr val="22A06B"/>
-                </a:solidFill>
-                <a:latin typeface="Aptos"/>
-              </a:rPr>
-              <a:t>Dify + Web</a:t>
-            </a:r>
-            <a:endParaRPr lang="es-MX" sz="1200"/>
-          </a:p>
-          <a:p>
-            <a:pPr algn="ctr">
-              <a:spcAft>
-                <a:spcPts val="0"/>
-              </a:spcAft>
-            </a:pPr>
-            <a:r>
-              <a:rPr lang="es-MX" sz="780">
-                <a:solidFill>
-                  <a:srgbClr val="64748B"/>
-                </a:solidFill>
-                <a:latin typeface="Aptos"/>
-              </a:rPr>
-              <a:t>chatbot y
-tablero</a:t>
-            </a:r>
-            <a:endParaRPr lang="es-MX" sz="780"/>
-          </a:p>
-        </p:txBody>
-      </p:sp>
-      <p:sp>
-        <p:nvSpPr>
-          <p:cNvPr id="19" name="Text"/>
-          <p:cNvSpPr txBox="1"/>
-          <p:nvPr/>
-        </p:nvSpPr>
-        <p:spPr>
-          <a:xfrm>
-            <a:off x="658368" y="3310128"/>
-            <a:ext cx="2926080" cy="914400"/>
-          </a:xfrm>
-          <a:prstGeom prst="roundRect">
-            <a:avLst/>
-          </a:prstGeom>
-          <a:solidFill>
-            <a:srgbClr val="08233F"/>
-          </a:solidFill>
-          <a:ln>
-            <a:noFill/>
-          </a:ln>
-        </p:spPr>
-        <p:txBody>
-          <a:bodyPr wrap="square" anchor="top" lIns="73152" rIns="73152" tIns="73152" bIns="73152"/>
-          <a:lstStyle/>
-          <a:p>
-            <a:pPr algn="l">
-              <a:spcAft>
-                <a:spcPts val="0"/>
-              </a:spcAft>
-            </a:pPr>
-            <a:r>
-              <a:rPr lang="es-MX" sz="1200" b="1">
-                <a:solidFill>
-                  <a:srgbClr val="FFFFFF"/>
-                </a:solidFill>
-                <a:latin typeface="Aptos"/>
-              </a:rPr>
-              <a:t>Demo path</a:t>
-            </a:r>
-            <a:endParaRPr lang="es-MX" sz="1200"/>
-          </a:p>
-          <a:p>
-            <a:pPr algn="l">
-              <a:spcAft>
-                <a:spcPts val="0"/>
-              </a:spcAft>
-            </a:pPr>
-            <a:r>
-              <a:rPr lang="es-MX" sz="860">
-                <a:solidFill>
-                  <a:srgbClr val="FFFFFF"/>
-                </a:solidFill>
-                <a:latin typeface="Aptos"/>
-              </a:rPr>
-              <a:t>Upload -&gt; processing logs -&gt; DWS query -&gt; DataArts lineage -&gt; Dify Q&amp;A -&gt; Streamlit KPIs</a:t>
-            </a:r>
-            <a:endParaRPr lang="es-MX" sz="860"/>
-          </a:p>
-        </p:txBody>
-      </p:sp>
-      <p:sp>
-        <p:nvSpPr>
-          <p:cNvPr id="20" name="Text"/>
-          <p:cNvSpPr txBox="1"/>
-          <p:nvPr/>
-        </p:nvSpPr>
-        <p:spPr>
-          <a:xfrm>
-            <a:off x="3822192" y="3310128"/>
-            <a:ext cx="2788920" cy="914400"/>
-          </a:xfrm>
-          <a:prstGeom prst="roundRect">
-            <a:avLst/>
-          </a:prstGeom>
-          <a:solidFill>
-            <a:srgbClr val="FFFFFF"/>
-          </a:solidFill>
-          <a:ln w="10160">
-            <a:solidFill>
-              <a:srgbClr val="D7E3F0"/>
-            </a:solidFill>
-          </a:ln>
-        </p:spPr>
-        <p:txBody>
-          <a:bodyPr wrap="square" anchor="top" lIns="73152" rIns="73152" tIns="73152" bIns="73152"/>
-          <a:lstStyle/>
-          <a:p>
-            <a:pPr algn="l">
-              <a:spcAft>
-                <a:spcPts val="0"/>
-              </a:spcAft>
-            </a:pPr>
-            <a:r>
-              <a:rPr lang="es-MX" sz="1200" b="1">
-                <a:solidFill>
-                  <a:srgbClr val="0B1728"/>
-                </a:solidFill>
-                <a:latin typeface="Aptos"/>
-              </a:rPr>
-              <a:t>Lo que AYCO ve</a:t>
-            </a:r>
-            <a:endParaRPr lang="es-MX" sz="1200"/>
-          </a:p>
-          <a:p>
-            <a:pPr algn="l">
-              <a:spcAft>
-                <a:spcPts val="0"/>
-              </a:spcAft>
-            </a:pPr>
-            <a:r>
-              <a:rPr lang="es-MX" sz="860">
-                <a:solidFill>
-                  <a:srgbClr val="64748B"/>
-                </a:solidFill>
-                <a:latin typeface="Aptos"/>
-              </a:rPr>
-              <a:t>Top critical contracts, exposure by risk tier, vendor concentration and explainable clauses.</a:t>
-            </a:r>
-            <a:endParaRPr lang="es-MX" sz="860"/>
-          </a:p>
-        </p:txBody>
-      </p:sp>
-      <p:sp>
-        <p:nvSpPr>
-          <p:cNvPr id="21" name="Text"/>
-          <p:cNvSpPr txBox="1"/>
-          <p:nvPr/>
-        </p:nvSpPr>
-        <p:spPr>
-          <a:xfrm>
-            <a:off x="6839712" y="3310128"/>
-            <a:ext cx="2788920" cy="914400"/>
-          </a:xfrm>
-          <a:prstGeom prst="roundRect">
-            <a:avLst/>
-          </a:prstGeom>
-          <a:solidFill>
-            <a:srgbClr val="FFFFFF"/>
-          </a:solidFill>
-          <a:ln w="10160">
-            <a:solidFill>
-              <a:srgbClr val="D7E3F0"/>
-            </a:solidFill>
-          </a:ln>
-        </p:spPr>
-        <p:txBody>
-          <a:bodyPr wrap="square" anchor="top" lIns="73152" rIns="73152" tIns="73152" bIns="73152"/>
-          <a:lstStyle/>
-          <a:p>
-            <a:pPr algn="l">
-              <a:spcAft>
-                <a:spcPts val="0"/>
-              </a:spcAft>
-            </a:pPr>
-            <a:r>
-              <a:rPr lang="es-MX" sz="1200" b="1">
-                <a:solidFill>
-                  <a:srgbClr val="0B1728"/>
-                </a:solidFill>
-                <a:latin typeface="Aptos"/>
-              </a:rPr>
-              <a:t>Lo que TI valida</a:t>
-            </a:r>
-            <a:endParaRPr lang="es-MX" sz="1200"/>
-          </a:p>
-          <a:p>
-            <a:pPr algn="l">
-              <a:spcAft>
-                <a:spcPts val="0"/>
-              </a:spcAft>
-            </a:pPr>
-            <a:r>
-              <a:rPr lang="es-MX" sz="860">
-                <a:solidFill>
-                  <a:srgbClr val="64748B"/>
-                </a:solidFill>
-                <a:latin typeface="Aptos"/>
-              </a:rPr>
-              <a:t>Compute isolation, secrets outside git, OBS/KMS/DWS/DLI services and observable LLM traces.</a:t>
-            </a:r>
-            <a:endParaRPr lang="es-MX" sz="860"/>
-          </a:p>
-        </p:txBody>
-      </p:sp>
-      <p:sp>
-        <p:nvSpPr>
-          <p:cNvPr id="22" name="Text"/>
-          <p:cNvSpPr txBox="1"/>
-          <p:nvPr/>
-        </p:nvSpPr>
-        <p:spPr>
-          <a:xfrm>
-            <a:off x="658368" y="4754880"/>
-            <a:ext cx="9144000" cy="502920"/>
-          </a:xfrm>
-          <a:prstGeom prst="roundRect">
-            <a:avLst/>
-          </a:prstGeom>
-          <a:solidFill>
-            <a:srgbClr val="EAF6FA"/>
-          </a:solidFill>
-          <a:ln w="10160">
-            <a:solidFill>
-              <a:srgbClr val="BFEAF2"/>
-            </a:solidFill>
-          </a:ln>
-        </p:spPr>
-        <p:txBody>
-          <a:bodyPr wrap="square" anchor="mid" lIns="73152" rIns="73152" tIns="73152" bIns="73152"/>
-          <a:lstStyle/>
-          <a:p>
-            <a:pPr algn="ctr">
-              <a:spcAft>
-                <a:spcPts val="0"/>
-              </a:spcAft>
-            </a:pPr>
-            <a:r>
-              <a:rPr lang="es-MX" sz="1200">
-                <a:solidFill>
-                  <a:srgbClr val="12345A"/>
-                </a:solidFill>
-                <a:latin typeface="Aptos"/>
-              </a:rPr>
-              <a:t>El diagrama debe vender continuidad: del documento original hasta decisiones de riesgo, no una lista de servicios.</a:t>
-            </a:r>
-            <a:endParaRPr lang="es-MX" sz="1200"/>
           </a:p>
         </p:txBody>
       </p:sp>
@@ -5050,6 +4218,65 @@
               <a:t>2 / 5</a:t>
             </a:r>
             <a:endParaRPr lang="es-MX" sz="750"/>
+          </a:p>
+        </p:txBody>
+      </p:sp>
+      <p:pic>
+        <p:nvPicPr>
+          <p:cNvPr id="25" name="Picture 24" descr="ayco-arch-slide.png"/>
+          <p:cNvPicPr>
+            <a:picLocks noChangeAspect="1"/>
+          </p:cNvPicPr>
+          <p:nvPr/>
+        </p:nvPicPr>
+        <p:blipFill>
+          <a:blip r:embed="rId3"/>
+          <a:stretch>
+            <a:fillRect/>
+          </a:stretch>
+        </p:blipFill>
+        <p:spPr>
+          <a:xfrm>
+            <a:off x="731520" y="1280160"/>
+            <a:ext cx="10515600" cy="4572000"/>
+          </a:xfrm>
+          <a:prstGeom prst="rect">
+            <a:avLst/>
+          </a:prstGeom>
+        </p:spPr>
+      </p:pic>
+      <p:sp>
+        <p:nvSpPr>
+          <p:cNvPr id="26" name="TextBox 25"/>
+          <p:cNvSpPr txBox="1"/>
+          <p:nvPr/>
+        </p:nvSpPr>
+        <p:spPr>
+          <a:xfrm>
+            <a:off x="731520" y="5943600"/>
+            <a:ext cx="10515600" cy="365760"/>
+          </a:xfrm>
+          <a:prstGeom prst="rect">
+            <a:avLst/>
+          </a:prstGeom>
+          <a:noFill/>
+        </p:spPr>
+        <p:txBody>
+          <a:bodyPr wrap="square">
+            <a:spAutoFit/>
+          </a:bodyPr>
+          <a:lstStyle/>
+          <a:p>
+            <a:pPr algn="ctr"/>
+            <a:r>
+              <a:rPr sz="1100">
+                <a:solidFill>
+                  <a:srgbClr val="2B6CB0"/>
+                </a:solidFill>
+                <a:latin typeface="Aptos"/>
+              </a:rPr>
+              <a:t>MPP 3 nodos · CTS Cloud Trace Service · Terraform zero-diff · EXPLAIN ANALYZE en vivo · Langfuse · DWS 3-datanode parallelism</a:t>
+            </a:r>
           </a:p>
         </p:txBody>
       </p:sp>
@@ -6347,7 +5574,7 @@
                 </a:solidFill>
                 <a:latin typeface="Aptos"/>
               </a:rPr>
-              <a:t>DATAARTS STUDIO + DWS + DLI</a:t>
+              <a:t>DATAARTS + DWS + DLI + CTS</a:t>
             </a:r>
             <a:endParaRPr lang="es-MX" sz="850"/>
           </a:p>
@@ -7608,7 +6835,7 @@
                 </a:solidFill>
                 <a:latin typeface="Aptos"/>
               </a:rPr>
-              <a:t>VPC privada, IAM por rol, OBS/DWS con KMS, secretos fuera de git y trazabilidad de ejecuciones LLM.</a:t>
+              <a:t>VPC privada, IAM/KMS, CTS Cloud Trace (auditoría CNBV), 3 datanodes MPP (EXPLAIN ANALYZE en vivo), Terraform IaC (zero-diff plan), y Langfuse Cloud</a:t>
             </a:r>
             <a:endParaRPr lang="es-MX" sz="860"/>
           </a:p>

--- a/docs/slides-arquitectura.pptx
+++ b/docs/slides-arquitectura.pptx
@@ -3270,7 +3270,7 @@
                 </a:solidFill>
                 <a:latin typeface="Aptos"/>
               </a:rPr>
-              <a:t>Un demo ejecutivo: 20 contratos entran por OBS, la IA extrae obligaciones y el tablero prioriza riesgo financiero y cumplimiento en minutos.</a:t>
+              <a:t>Un demo ejecutivo: 24 contratos entran por OBS, la IA extrae obligaciones y el tablero prioriza riesgo financiero y cumplimiento en minutos.</a:t>
             </a:r>
             <a:endParaRPr lang="es-MX" sz="1350"/>
           </a:p>
@@ -3309,32 +3309,13 @@
               </a:spcAft>
             </a:pPr>
             <a:r>
-              <a:rPr lang="es-MX" sz="2300" b="1">
-                <a:solidFill>
-                  <a:srgbClr val="2B6CB0"/>
-                </a:solidFill>
-                <a:latin typeface="Aptos"/>
-              </a:rPr>
-              <a:t>20</a:t>
+              <a:t>24</a:t>
+            </a:r>
+            <a:br/>
+            <a:r>
+              <a:t>contratos procesados</a:t>
             </a:r>
             <a:endParaRPr lang="es-MX" sz="2300"/>
-          </a:p>
-          <a:p>
-            <a:pPr algn="ctr">
-              <a:spcAft>
-                <a:spcPts val="0"/>
-              </a:spcAft>
-            </a:pPr>
-            <a:r>
-              <a:rPr lang="es-MX" sz="860">
-                <a:solidFill>
-                  <a:srgbClr val="0B1728"/>
-                </a:solidFill>
-                <a:latin typeface="Aptos"/>
-              </a:rPr>
-              <a:t>contratos procesados</a:t>
-            </a:r>
-            <a:endParaRPr lang="es-MX" sz="860"/>
           </a:p>
         </p:txBody>
       </p:sp>
@@ -3377,7 +3358,7 @@
                 </a:solidFill>
                 <a:latin typeface="Aptos"/>
               </a:rPr>
-              <a:t>$133M</a:t>
+              <a:t>$175M</a:t>
             </a:r>
             <a:endParaRPr lang="es-MX" sz="2300"/>
           </a:p>
@@ -3439,7 +3420,7 @@
                 </a:solidFill>
                 <a:latin typeface="Aptos"/>
               </a:rPr>
-              <a:t>2,300</a:t>
+              <a:t>24</a:t>
             </a:r>
             <a:endParaRPr lang="es-MX" sz="2300"/>
           </a:p>
@@ -3931,7 +3912,7 @@
                 </a:solidFill>
                 <a:latin typeface="Aptos"/>
               </a:rPr>
-              <a:t>Workshop Huawei Cloud x Salinas | Mayo 8, 2026 | México Century Plaza</a:t>
+              <a:t>Workshop Huawei Cloud x Salinas | Mayo 13, 2026 | México Century Plaza</a:t>
             </a:r>
             <a:endParaRPr lang="es-MX" sz="750"/>
           </a:p>
@@ -4174,7 +4155,7 @@
                 </a:solidFill>
                 <a:latin typeface="Aptos"/>
               </a:rPr>
-              <a:t>Workshop Huawei Cloud x Salinas | Mayo 8, 2026 | México Century Plaza</a:t>
+              <a:t>Workshop Huawei Cloud x Salinas | Mayo 13, 2026 | México Century Plaza</a:t>
             </a:r>
             <a:endParaRPr lang="es-MX" sz="750"/>
           </a:p>
@@ -4275,7 +4256,7 @@
                 </a:solidFill>
                 <a:latin typeface="Aptos"/>
               </a:rPr>
-              <a:t>MPP 3 nodos · CTS Cloud Trace Service · Terraform zero-diff · EXPLAIN ANALYZE en vivo · Langfuse · DWS 3-datanode parallelism</a:t>
+              <a:t>MPP 2 nodos · CTS Cloud Trace Service · Terraform zero-diff · EXPLAIN ANALYZE en vivo · Langfuse · DWS 2-datanode parallelism</a:t>
             </a:r>
           </a:p>
         </p:txBody>
@@ -4435,7 +4416,7 @@
                 </a:solidFill>
                 <a:latin typeface="Aptos"/>
               </a:rPr>
-              <a:t>Prueba con 20 contratos</a:t>
+              <a:t>Prueba con 24 contratos</a:t>
             </a:r>
             <a:endParaRPr lang="es-MX" sz="2500"/>
           </a:p>
@@ -4480,7 +4461,7 @@
                 </a:solidFill>
                 <a:latin typeface="Aptos"/>
               </a:rPr>
-              <a:t>$133.1M</a:t>
+              <a:t>$175.0M</a:t>
             </a:r>
             <a:endParaRPr lang="es-MX" sz="3000"/>
           </a:p>
@@ -4621,7 +4602,7 @@
                 </a:solidFill>
                 <a:latin typeface="Aptos"/>
               </a:rPr>
-              <a:t>$96.0M MXN para priorizar revisión</a:t>
+              <a:t>$125.0M MXN para priorizar revisión</a:t>
             </a:r>
             <a:endParaRPr lang="es-MX" sz="950"/>
           </a:p>
@@ -4757,7 +4738,7 @@
                 </a:solidFill>
                 <a:latin typeface="Aptos"/>
               </a:rPr>
-              <a:t>6 contratos</a:t>
+              <a:t>5 contratos</a:t>
             </a:r>
             <a:endParaRPr lang="es-MX" sz="860"/>
           </a:p>
@@ -4798,7 +4779,7 @@
                 </a:solidFill>
                 <a:latin typeface="Aptos"/>
               </a:rPr>
-              <a:t>$5.96M</a:t>
+              <a:t>$12.5M</a:t>
             </a:r>
             <a:endParaRPr lang="es-MX" sz="860"/>
           </a:p>
@@ -4934,7 +4915,7 @@
                 </a:solidFill>
                 <a:latin typeface="Aptos"/>
               </a:rPr>
-              <a:t>3 contratos</a:t>
+              <a:t>5 contratos</a:t>
             </a:r>
             <a:endParaRPr lang="es-MX" sz="860"/>
           </a:p>
@@ -4975,7 +4956,7 @@
                 </a:solidFill>
                 <a:latin typeface="Aptos"/>
               </a:rPr>
-              <a:t>$18.67M</a:t>
+              <a:t>$25.0M</a:t>
             </a:r>
             <a:endParaRPr lang="es-MX" sz="860"/>
           </a:p>
@@ -5111,7 +5092,7 @@
                 </a:solidFill>
                 <a:latin typeface="Aptos"/>
               </a:rPr>
-              <a:t>10 contratos</a:t>
+              <a:t>15 contratoss</a:t>
             </a:r>
             <a:endParaRPr lang="es-MX" sz="860"/>
           </a:p>
@@ -5288,7 +5269,7 @@
                 </a:solidFill>
                 <a:latin typeface="Aptos"/>
               </a:rPr>
-              <a:t>1 contrato</a:t>
+              <a:t>5 contratos</a:t>
             </a:r>
             <a:endParaRPr lang="es-MX" sz="860"/>
           </a:p>
@@ -5329,7 +5310,7 @@
                 </a:solidFill>
                 <a:latin typeface="Aptos"/>
               </a:rPr>
-              <a:t>$12.50M</a:t>
+              <a:t>$12.5M</a:t>
             </a:r>
             <a:endParaRPr lang="es-MX" sz="860"/>
           </a:p>
@@ -5413,7 +5394,7 @@
                 </a:solidFill>
                 <a:latin typeface="Aptos"/>
               </a:rPr>
-              <a:t>Workshop Huawei Cloud x Salinas | Mayo 8, 2026 | México Century Plaza</a:t>
+              <a:t>Workshop Huawei Cloud x Salinas | Mayo 13, 2026 | México Century Plaza</a:t>
             </a:r>
             <a:endParaRPr lang="es-MX" sz="750"/>
           </a:p>
@@ -6325,7 +6306,7 @@
                 </a:solidFill>
                 <a:latin typeface="Aptos"/>
               </a:rPr>
-              <a:t>Workshop Huawei Cloud x Salinas | Mayo 8, 2026 | México Century Plaza</a:t>
+              <a:t>Workshop Huawei Cloud x Salinas | Mayo 13, 2026 | México Century Plaza</a:t>
             </a:r>
             <a:endParaRPr lang="es-MX" sz="750"/>
           </a:p>
@@ -6632,7 +6613,7 @@
                 </a:solidFill>
                 <a:latin typeface="Aptos"/>
               </a:rPr>
-              <a:t>$133M</a:t>
+              <a:t>$175M</a:t>
             </a:r>
             <a:endParaRPr lang="es-MX" sz="2400"/>
           </a:p>
@@ -6756,7 +6737,7 @@
                 </a:solidFill>
                 <a:latin typeface="Aptos"/>
               </a:rPr>
-              <a:t>2,300</a:t>
+              <a:t>24</a:t>
             </a:r>
             <a:endParaRPr lang="es-MX" sz="2400"/>
           </a:p>
@@ -6897,7 +6878,7 @@
                 </a:solidFill>
                 <a:latin typeface="Aptos"/>
               </a:rPr>
-              <a:t>ECS x2, OBS x3, FunctionGraph x3, DLI, DWS 3 nodos, DataArts Studio y Langfuse Cloud.</a:t>
+              <a:t>ECS x2, OBS x3, FunctionGraph x3, DLI, DWS 2 nodos, DataArts Studio y Langfuse Cloud.</a:t>
             </a:r>
             <a:endParaRPr lang="es-MX" sz="860"/>
           </a:p>
@@ -7043,7 +7024,7 @@
                 </a:solidFill>
                 <a:latin typeface="Aptos"/>
               </a:rPr>
-              <a:t>Workshop Huawei Cloud x Salinas | Mayo 8, 2026 | México Century Plaza</a:t>
+              <a:t>Workshop Huawei Cloud x Salinas | Mayo 13, 2026 | México Century Plaza</a:t>
             </a:r>
             <a:endParaRPr lang="es-MX" sz="750"/>
           </a:p>
